--- a/ARIMA_HJ/Plots/arima plots.pptx
+++ b/ARIMA_HJ/Plots/arima plots.pptx
@@ -2,7 +2,7 @@
 <file path=ppt/presentation.xml><?xml version="1.0" encoding="utf-8"?>
 <p:presentation xmlns:a="http://schemas.openxmlformats.org/drawingml/2006/main" xmlns:r="http://schemas.openxmlformats.org/officeDocument/2006/relationships" xmlns:p="http://schemas.openxmlformats.org/presentationml/2006/main" saveSubsetFonts="1" autoCompressPictures="0">
   <p:sldMasterIdLst>
-    <p:sldMasterId id="2147483648" r:id="rId1"/>
+    <p:sldMasterId id="2147483672" r:id="rId1"/>
   </p:sldMasterIdLst>
   <p:sldIdLst>
     <p:sldId id="257" r:id="rId2"/>
@@ -27,13 +27,13 @@
     <p:sldId id="276" r:id="rId21"/>
     <p:sldId id="277" r:id="rId22"/>
   </p:sldIdLst>
-  <p:sldSz cx="12192000" cy="6858000"/>
+  <p:sldSz cx="16216313" cy="6858000"/>
   <p:notesSz cx="6858000" cy="9144000"/>
   <p:defaultTextStyle>
     <a:defPPr>
       <a:defRPr lang="en-US"/>
     </a:defPPr>
-    <a:lvl1pPr marL="0" algn="l" defTabSz="914400" rtl="0" eaLnBrk="1" latinLnBrk="0" hangingPunct="1">
+    <a:lvl1pPr marL="0" algn="l" defTabSz="457200" rtl="0" eaLnBrk="1" latinLnBrk="0" hangingPunct="1">
       <a:defRPr sz="1800" kern="1200">
         <a:solidFill>
           <a:schemeClr val="tx1"/>
@@ -43,7 +43,7 @@
         <a:cs typeface="+mn-cs"/>
       </a:defRPr>
     </a:lvl1pPr>
-    <a:lvl2pPr marL="457200" algn="l" defTabSz="914400" rtl="0" eaLnBrk="1" latinLnBrk="0" hangingPunct="1">
+    <a:lvl2pPr marL="457200" algn="l" defTabSz="457200" rtl="0" eaLnBrk="1" latinLnBrk="0" hangingPunct="1">
       <a:defRPr sz="1800" kern="1200">
         <a:solidFill>
           <a:schemeClr val="tx1"/>
@@ -53,7 +53,7 @@
         <a:cs typeface="+mn-cs"/>
       </a:defRPr>
     </a:lvl2pPr>
-    <a:lvl3pPr marL="914400" algn="l" defTabSz="914400" rtl="0" eaLnBrk="1" latinLnBrk="0" hangingPunct="1">
+    <a:lvl3pPr marL="914400" algn="l" defTabSz="457200" rtl="0" eaLnBrk="1" latinLnBrk="0" hangingPunct="1">
       <a:defRPr sz="1800" kern="1200">
         <a:solidFill>
           <a:schemeClr val="tx1"/>
@@ -63,7 +63,7 @@
         <a:cs typeface="+mn-cs"/>
       </a:defRPr>
     </a:lvl3pPr>
-    <a:lvl4pPr marL="1371600" algn="l" defTabSz="914400" rtl="0" eaLnBrk="1" latinLnBrk="0" hangingPunct="1">
+    <a:lvl4pPr marL="1371600" algn="l" defTabSz="457200" rtl="0" eaLnBrk="1" latinLnBrk="0" hangingPunct="1">
       <a:defRPr sz="1800" kern="1200">
         <a:solidFill>
           <a:schemeClr val="tx1"/>
@@ -73,7 +73,7 @@
         <a:cs typeface="+mn-cs"/>
       </a:defRPr>
     </a:lvl4pPr>
-    <a:lvl5pPr marL="1828800" algn="l" defTabSz="914400" rtl="0" eaLnBrk="1" latinLnBrk="0" hangingPunct="1">
+    <a:lvl5pPr marL="1828800" algn="l" defTabSz="457200" rtl="0" eaLnBrk="1" latinLnBrk="0" hangingPunct="1">
       <a:defRPr sz="1800" kern="1200">
         <a:solidFill>
           <a:schemeClr val="tx1"/>
@@ -83,7 +83,7 @@
         <a:cs typeface="+mn-cs"/>
       </a:defRPr>
     </a:lvl5pPr>
-    <a:lvl6pPr marL="2286000" algn="l" defTabSz="914400" rtl="0" eaLnBrk="1" latinLnBrk="0" hangingPunct="1">
+    <a:lvl6pPr marL="2286000" algn="l" defTabSz="457200" rtl="0" eaLnBrk="1" latinLnBrk="0" hangingPunct="1">
       <a:defRPr sz="1800" kern="1200">
         <a:solidFill>
           <a:schemeClr val="tx1"/>
@@ -93,7 +93,7 @@
         <a:cs typeface="+mn-cs"/>
       </a:defRPr>
     </a:lvl6pPr>
-    <a:lvl7pPr marL="2743200" algn="l" defTabSz="914400" rtl="0" eaLnBrk="1" latinLnBrk="0" hangingPunct="1">
+    <a:lvl7pPr marL="2743200" algn="l" defTabSz="457200" rtl="0" eaLnBrk="1" latinLnBrk="0" hangingPunct="1">
       <a:defRPr sz="1800" kern="1200">
         <a:solidFill>
           <a:schemeClr val="tx1"/>
@@ -103,7 +103,7 @@
         <a:cs typeface="+mn-cs"/>
       </a:defRPr>
     </a:lvl7pPr>
-    <a:lvl8pPr marL="3200400" algn="l" defTabSz="914400" rtl="0" eaLnBrk="1" latinLnBrk="0" hangingPunct="1">
+    <a:lvl8pPr marL="3200400" algn="l" defTabSz="457200" rtl="0" eaLnBrk="1" latinLnBrk="0" hangingPunct="1">
       <a:defRPr sz="1800" kern="1200">
         <a:solidFill>
           <a:schemeClr val="tx1"/>
@@ -113,7 +113,7 @@
         <a:cs typeface="+mn-cs"/>
       </a:defRPr>
     </a:lvl8pPr>
-    <a:lvl9pPr marL="3657600" algn="l" defTabSz="914400" rtl="0" eaLnBrk="1" latinLnBrk="0" hangingPunct="1">
+    <a:lvl9pPr marL="3657600" algn="l" defTabSz="457200" rtl="0" eaLnBrk="1" latinLnBrk="0" hangingPunct="1">
       <a:defRPr sz="1800" kern="1200">
         <a:solidFill>
           <a:schemeClr val="tx1"/>
@@ -124,6 +124,11 @@
       </a:defRPr>
     </a:lvl9pPr>
   </p:defaultTextStyle>
+  <p:extLst>
+    <p:ext uri="{EFAFB233-063F-42B5-8137-9DF3F51BA10A}">
+      <p15:sldGuideLst xmlns:p15="http://schemas.microsoft.com/office/powerpoint/2012/main"/>
+    </p:ext>
+  </p:extLst>
 </p:presentation>
 </file>
 
@@ -146,13 +151,7 @@
       </p:grpSpPr>
       <p:sp>
         <p:nvSpPr>
-          <p:cNvPr id="2" name="Title 1">
-            <a:extLst>
-              <a:ext uri="{FF2B5EF4-FFF2-40B4-BE49-F238E27FC236}">
-                <a16:creationId xmlns:a16="http://schemas.microsoft.com/office/drawing/2014/main" id="{F12E9489-16F8-8EFC-6F6E-EA64490A8B55}"/>
-              </a:ext>
-            </a:extLst>
-          </p:cNvPr>
+          <p:cNvPr id="2" name="Title 1"/>
           <p:cNvSpPr>
             <a:spLocks noGrp="1"/>
           </p:cNvSpPr>
@@ -162,8 +161,8 @@
         </p:nvSpPr>
         <p:spPr>
           <a:xfrm>
-            <a:off x="1524000" y="1122363"/>
-            <a:ext cx="9144000" cy="2387600"/>
+            <a:off x="2027039" y="1122363"/>
+            <a:ext cx="12162235" cy="2387600"/>
           </a:xfrm>
         </p:spPr>
         <p:txBody>
@@ -178,18 +177,13 @@
               <a:rPr lang="en-US"/>
               <a:t>Click to edit Master title style</a:t>
             </a:r>
-          </a:p>
-        </p:txBody>
-      </p:sp>
-      <p:sp>
-        <p:nvSpPr>
-          <p:cNvPr id="3" name="Subtitle 2">
-            <a:extLst>
-              <a:ext uri="{FF2B5EF4-FFF2-40B4-BE49-F238E27FC236}">
-                <a16:creationId xmlns:a16="http://schemas.microsoft.com/office/drawing/2014/main" id="{B7186215-1A67-A8A9-C7A6-CE8F93AD9089}"/>
-              </a:ext>
-            </a:extLst>
-          </p:cNvPr>
+            <a:endParaRPr lang="en-US" dirty="0"/>
+          </a:p>
+        </p:txBody>
+      </p:sp>
+      <p:sp>
+        <p:nvSpPr>
+          <p:cNvPr id="3" name="Subtitle 2"/>
           <p:cNvSpPr>
             <a:spLocks noGrp="1"/>
           </p:cNvSpPr>
@@ -199,8 +193,8 @@
         </p:nvSpPr>
         <p:spPr>
           <a:xfrm>
-            <a:off x="1524000" y="3602038"/>
-            <a:ext cx="9144000" cy="1655762"/>
+            <a:off x="2027039" y="3602038"/>
+            <a:ext cx="12162235" cy="1655762"/>
           </a:xfrm>
         </p:spPr>
         <p:txBody>
@@ -248,18 +242,13 @@
               <a:rPr lang="en-US"/>
               <a:t>Click to edit Master subtitle style</a:t>
             </a:r>
-          </a:p>
-        </p:txBody>
-      </p:sp>
-      <p:sp>
-        <p:nvSpPr>
-          <p:cNvPr id="4" name="Date Placeholder 3">
-            <a:extLst>
-              <a:ext uri="{FF2B5EF4-FFF2-40B4-BE49-F238E27FC236}">
-                <a16:creationId xmlns:a16="http://schemas.microsoft.com/office/drawing/2014/main" id="{E3FF1C7E-A78C-CE62-491B-711BAC793B0F}"/>
-              </a:ext>
-            </a:extLst>
-          </p:cNvPr>
+            <a:endParaRPr lang="en-US" dirty="0"/>
+          </a:p>
+        </p:txBody>
+      </p:sp>
+      <p:sp>
+        <p:nvSpPr>
+          <p:cNvPr id="4" name="Date Placeholder 3"/>
           <p:cNvSpPr>
             <a:spLocks noGrp="1"/>
           </p:cNvSpPr>
@@ -274,7 +263,7 @@
           <a:p>
             <a:fld id="{E83DCB1C-7482-A248-B459-A59749D0D03F}" type="datetimeFigureOut">
               <a:rPr lang="en-US" smtClean="0"/>
-              <a:t>3/12/25</a:t>
+              <a:t>3/13/25</a:t>
             </a:fld>
             <a:endParaRPr lang="en-US"/>
           </a:p>
@@ -282,13 +271,7 @@
       </p:sp>
       <p:sp>
         <p:nvSpPr>
-          <p:cNvPr id="5" name="Footer Placeholder 4">
-            <a:extLst>
-              <a:ext uri="{FF2B5EF4-FFF2-40B4-BE49-F238E27FC236}">
-                <a16:creationId xmlns:a16="http://schemas.microsoft.com/office/drawing/2014/main" id="{E9735A2E-A753-EA0D-970A-F00E62E3553A}"/>
-              </a:ext>
-            </a:extLst>
-          </p:cNvPr>
+          <p:cNvPr id="5" name="Footer Placeholder 4"/>
           <p:cNvSpPr>
             <a:spLocks noGrp="1"/>
           </p:cNvSpPr>
@@ -307,13 +290,7 @@
       </p:sp>
       <p:sp>
         <p:nvSpPr>
-          <p:cNvPr id="6" name="Slide Number Placeholder 5">
-            <a:extLst>
-              <a:ext uri="{FF2B5EF4-FFF2-40B4-BE49-F238E27FC236}">
-                <a16:creationId xmlns:a16="http://schemas.microsoft.com/office/drawing/2014/main" id="{31EE3ADF-E35E-CC63-9E07-B0EDF78C9E91}"/>
-              </a:ext>
-            </a:extLst>
-          </p:cNvPr>
+          <p:cNvPr id="6" name="Slide Number Placeholder 5"/>
           <p:cNvSpPr>
             <a:spLocks noGrp="1"/>
           </p:cNvSpPr>
@@ -337,7 +314,7 @@
     </p:spTree>
     <p:extLst>
       <p:ext uri="{BB962C8B-B14F-4D97-AF65-F5344CB8AC3E}">
-        <p14:creationId xmlns:p14="http://schemas.microsoft.com/office/powerpoint/2010/main" val="198536276"/>
+        <p14:creationId xmlns:p14="http://schemas.microsoft.com/office/powerpoint/2010/main" val="3381806107"/>
       </p:ext>
     </p:extLst>
   </p:cSld>
@@ -366,13 +343,7 @@
       </p:grpSpPr>
       <p:sp>
         <p:nvSpPr>
-          <p:cNvPr id="2" name="Title 1">
-            <a:extLst>
-              <a:ext uri="{FF2B5EF4-FFF2-40B4-BE49-F238E27FC236}">
-                <a16:creationId xmlns:a16="http://schemas.microsoft.com/office/drawing/2014/main" id="{AC573DDE-7893-E115-23F7-56BC6EF4406A}"/>
-              </a:ext>
-            </a:extLst>
-          </p:cNvPr>
+          <p:cNvPr id="2" name="Title 1"/>
           <p:cNvSpPr>
             <a:spLocks noGrp="1"/>
           </p:cNvSpPr>
@@ -389,18 +360,13 @@
               <a:rPr lang="en-US"/>
               <a:t>Click to edit Master title style</a:t>
             </a:r>
-          </a:p>
-        </p:txBody>
-      </p:sp>
-      <p:sp>
-        <p:nvSpPr>
-          <p:cNvPr id="3" name="Vertical Text Placeholder 2">
-            <a:extLst>
-              <a:ext uri="{FF2B5EF4-FFF2-40B4-BE49-F238E27FC236}">
-                <a16:creationId xmlns:a16="http://schemas.microsoft.com/office/drawing/2014/main" id="{A5CDD226-221C-4459-3E0E-56A8C8568183}"/>
-              </a:ext>
-            </a:extLst>
-          </p:cNvPr>
+            <a:endParaRPr lang="en-US" dirty="0"/>
+          </a:p>
+        </p:txBody>
+      </p:sp>
+      <p:sp>
+        <p:nvSpPr>
+          <p:cNvPr id="3" name="Vertical Text Placeholder 2"/>
           <p:cNvSpPr>
             <a:spLocks noGrp="1"/>
           </p:cNvSpPr>
@@ -446,18 +412,13 @@
               <a:rPr lang="en-US"/>
               <a:t>Fifth level</a:t>
             </a:r>
-          </a:p>
-        </p:txBody>
-      </p:sp>
-      <p:sp>
-        <p:nvSpPr>
-          <p:cNvPr id="4" name="Date Placeholder 3">
-            <a:extLst>
-              <a:ext uri="{FF2B5EF4-FFF2-40B4-BE49-F238E27FC236}">
-                <a16:creationId xmlns:a16="http://schemas.microsoft.com/office/drawing/2014/main" id="{6E6D1956-BB29-EB94-F8AF-214C2A734CD8}"/>
-              </a:ext>
-            </a:extLst>
-          </p:cNvPr>
+            <a:endParaRPr lang="en-US" dirty="0"/>
+          </a:p>
+        </p:txBody>
+      </p:sp>
+      <p:sp>
+        <p:nvSpPr>
+          <p:cNvPr id="4" name="Date Placeholder 3"/>
           <p:cNvSpPr>
             <a:spLocks noGrp="1"/>
           </p:cNvSpPr>
@@ -472,7 +433,7 @@
           <a:p>
             <a:fld id="{E83DCB1C-7482-A248-B459-A59749D0D03F}" type="datetimeFigureOut">
               <a:rPr lang="en-US" smtClean="0"/>
-              <a:t>3/12/25</a:t>
+              <a:t>3/13/25</a:t>
             </a:fld>
             <a:endParaRPr lang="en-US"/>
           </a:p>
@@ -480,13 +441,7 @@
       </p:sp>
       <p:sp>
         <p:nvSpPr>
-          <p:cNvPr id="5" name="Footer Placeholder 4">
-            <a:extLst>
-              <a:ext uri="{FF2B5EF4-FFF2-40B4-BE49-F238E27FC236}">
-                <a16:creationId xmlns:a16="http://schemas.microsoft.com/office/drawing/2014/main" id="{28C0F79C-53C1-7135-5C39-D73F794245BF}"/>
-              </a:ext>
-            </a:extLst>
-          </p:cNvPr>
+          <p:cNvPr id="5" name="Footer Placeholder 4"/>
           <p:cNvSpPr>
             <a:spLocks noGrp="1"/>
           </p:cNvSpPr>
@@ -505,13 +460,7 @@
       </p:sp>
       <p:sp>
         <p:nvSpPr>
-          <p:cNvPr id="6" name="Slide Number Placeholder 5">
-            <a:extLst>
-              <a:ext uri="{FF2B5EF4-FFF2-40B4-BE49-F238E27FC236}">
-                <a16:creationId xmlns:a16="http://schemas.microsoft.com/office/drawing/2014/main" id="{20944188-C42C-DD83-2BD4-89E900D78B04}"/>
-              </a:ext>
-            </a:extLst>
-          </p:cNvPr>
+          <p:cNvPr id="6" name="Slide Number Placeholder 5"/>
           <p:cNvSpPr>
             <a:spLocks noGrp="1"/>
           </p:cNvSpPr>
@@ -535,7 +484,7 @@
     </p:spTree>
     <p:extLst>
       <p:ext uri="{BB962C8B-B14F-4D97-AF65-F5344CB8AC3E}">
-        <p14:creationId xmlns:p14="http://schemas.microsoft.com/office/powerpoint/2010/main" val="3338974395"/>
+        <p14:creationId xmlns:p14="http://schemas.microsoft.com/office/powerpoint/2010/main" val="3679679737"/>
       </p:ext>
     </p:extLst>
   </p:cSld>
@@ -564,13 +513,7 @@
       </p:grpSpPr>
       <p:sp>
         <p:nvSpPr>
-          <p:cNvPr id="2" name="Vertical Title 1">
-            <a:extLst>
-              <a:ext uri="{FF2B5EF4-FFF2-40B4-BE49-F238E27FC236}">
-                <a16:creationId xmlns:a16="http://schemas.microsoft.com/office/drawing/2014/main" id="{5738DA52-6A11-3D9C-30DC-2850363C3571}"/>
-              </a:ext>
-            </a:extLst>
-          </p:cNvPr>
+          <p:cNvPr id="2" name="Vertical Title 1"/>
           <p:cNvSpPr>
             <a:spLocks noGrp="1"/>
           </p:cNvSpPr>
@@ -580,8 +523,8 @@
         </p:nvSpPr>
         <p:spPr>
           <a:xfrm>
-            <a:off x="8724900" y="365125"/>
-            <a:ext cx="2628900" cy="5811838"/>
+            <a:off x="11604799" y="365125"/>
+            <a:ext cx="3496642" cy="5811838"/>
           </a:xfrm>
         </p:spPr>
         <p:txBody>
@@ -592,18 +535,13 @@
               <a:rPr lang="en-US"/>
               <a:t>Click to edit Master title style</a:t>
             </a:r>
-          </a:p>
-        </p:txBody>
-      </p:sp>
-      <p:sp>
-        <p:nvSpPr>
-          <p:cNvPr id="3" name="Vertical Text Placeholder 2">
-            <a:extLst>
-              <a:ext uri="{FF2B5EF4-FFF2-40B4-BE49-F238E27FC236}">
-                <a16:creationId xmlns:a16="http://schemas.microsoft.com/office/drawing/2014/main" id="{1F7DAC3D-28AA-C576-F9A7-9E8814BE1958}"/>
-              </a:ext>
-            </a:extLst>
-          </p:cNvPr>
+            <a:endParaRPr lang="en-US" dirty="0"/>
+          </a:p>
+        </p:txBody>
+      </p:sp>
+      <p:sp>
+        <p:nvSpPr>
+          <p:cNvPr id="3" name="Vertical Text Placeholder 2"/>
           <p:cNvSpPr>
             <a:spLocks noGrp="1"/>
           </p:cNvSpPr>
@@ -613,8 +551,8 @@
         </p:nvSpPr>
         <p:spPr>
           <a:xfrm>
-            <a:off x="838200" y="365125"/>
-            <a:ext cx="7734300" cy="5811838"/>
+            <a:off x="1114871" y="365125"/>
+            <a:ext cx="10287224" cy="5811838"/>
           </a:xfrm>
         </p:spPr>
         <p:txBody>
@@ -654,18 +592,13 @@
               <a:rPr lang="en-US"/>
               <a:t>Fifth level</a:t>
             </a:r>
-          </a:p>
-        </p:txBody>
-      </p:sp>
-      <p:sp>
-        <p:nvSpPr>
-          <p:cNvPr id="4" name="Date Placeholder 3">
-            <a:extLst>
-              <a:ext uri="{FF2B5EF4-FFF2-40B4-BE49-F238E27FC236}">
-                <a16:creationId xmlns:a16="http://schemas.microsoft.com/office/drawing/2014/main" id="{65A4C9CD-E7A8-BA50-2389-1C9EAC94277A}"/>
-              </a:ext>
-            </a:extLst>
-          </p:cNvPr>
+            <a:endParaRPr lang="en-US" dirty="0"/>
+          </a:p>
+        </p:txBody>
+      </p:sp>
+      <p:sp>
+        <p:nvSpPr>
+          <p:cNvPr id="4" name="Date Placeholder 3"/>
           <p:cNvSpPr>
             <a:spLocks noGrp="1"/>
           </p:cNvSpPr>
@@ -680,7 +613,7 @@
           <a:p>
             <a:fld id="{E83DCB1C-7482-A248-B459-A59749D0D03F}" type="datetimeFigureOut">
               <a:rPr lang="en-US" smtClean="0"/>
-              <a:t>3/12/25</a:t>
+              <a:t>3/13/25</a:t>
             </a:fld>
             <a:endParaRPr lang="en-US"/>
           </a:p>
@@ -688,13 +621,7 @@
       </p:sp>
       <p:sp>
         <p:nvSpPr>
-          <p:cNvPr id="5" name="Footer Placeholder 4">
-            <a:extLst>
-              <a:ext uri="{FF2B5EF4-FFF2-40B4-BE49-F238E27FC236}">
-                <a16:creationId xmlns:a16="http://schemas.microsoft.com/office/drawing/2014/main" id="{64352A0E-F769-EC12-0FE4-46A61A0FFFCD}"/>
-              </a:ext>
-            </a:extLst>
-          </p:cNvPr>
+          <p:cNvPr id="5" name="Footer Placeholder 4"/>
           <p:cNvSpPr>
             <a:spLocks noGrp="1"/>
           </p:cNvSpPr>
@@ -713,13 +640,7 @@
       </p:sp>
       <p:sp>
         <p:nvSpPr>
-          <p:cNvPr id="6" name="Slide Number Placeholder 5">
-            <a:extLst>
-              <a:ext uri="{FF2B5EF4-FFF2-40B4-BE49-F238E27FC236}">
-                <a16:creationId xmlns:a16="http://schemas.microsoft.com/office/drawing/2014/main" id="{A7CC4E6B-65BB-2E3A-BA57-32FBB824BF0E}"/>
-              </a:ext>
-            </a:extLst>
-          </p:cNvPr>
+          <p:cNvPr id="6" name="Slide Number Placeholder 5"/>
           <p:cNvSpPr>
             <a:spLocks noGrp="1"/>
           </p:cNvSpPr>
@@ -743,7 +664,7 @@
     </p:spTree>
     <p:extLst>
       <p:ext uri="{BB962C8B-B14F-4D97-AF65-F5344CB8AC3E}">
-        <p14:creationId xmlns:p14="http://schemas.microsoft.com/office/powerpoint/2010/main" val="179248620"/>
+        <p14:creationId xmlns:p14="http://schemas.microsoft.com/office/powerpoint/2010/main" val="3889524180"/>
       </p:ext>
     </p:extLst>
   </p:cSld>
@@ -772,13 +693,7 @@
       </p:grpSpPr>
       <p:sp>
         <p:nvSpPr>
-          <p:cNvPr id="2" name="Title 1">
-            <a:extLst>
-              <a:ext uri="{FF2B5EF4-FFF2-40B4-BE49-F238E27FC236}">
-                <a16:creationId xmlns:a16="http://schemas.microsoft.com/office/drawing/2014/main" id="{7F1F9F93-B428-68E4-9B03-C76C4E810525}"/>
-              </a:ext>
-            </a:extLst>
-          </p:cNvPr>
+          <p:cNvPr id="2" name="Title 1"/>
           <p:cNvSpPr>
             <a:spLocks noGrp="1"/>
           </p:cNvSpPr>
@@ -795,18 +710,13 @@
               <a:rPr lang="en-US"/>
               <a:t>Click to edit Master title style</a:t>
             </a:r>
-          </a:p>
-        </p:txBody>
-      </p:sp>
-      <p:sp>
-        <p:nvSpPr>
-          <p:cNvPr id="3" name="Content Placeholder 2">
-            <a:extLst>
-              <a:ext uri="{FF2B5EF4-FFF2-40B4-BE49-F238E27FC236}">
-                <a16:creationId xmlns:a16="http://schemas.microsoft.com/office/drawing/2014/main" id="{0A7FBD9D-562A-D1D3-A251-674C1B8B7AC0}"/>
-              </a:ext>
-            </a:extLst>
-          </p:cNvPr>
+            <a:endParaRPr lang="en-US" dirty="0"/>
+          </a:p>
+        </p:txBody>
+      </p:sp>
+      <p:sp>
+        <p:nvSpPr>
+          <p:cNvPr id="3" name="Content Placeholder 2"/>
           <p:cNvSpPr>
             <a:spLocks noGrp="1"/>
           </p:cNvSpPr>
@@ -852,18 +762,13 @@
               <a:rPr lang="en-US"/>
               <a:t>Fifth level</a:t>
             </a:r>
-          </a:p>
-        </p:txBody>
-      </p:sp>
-      <p:sp>
-        <p:nvSpPr>
-          <p:cNvPr id="4" name="Date Placeholder 3">
-            <a:extLst>
-              <a:ext uri="{FF2B5EF4-FFF2-40B4-BE49-F238E27FC236}">
-                <a16:creationId xmlns:a16="http://schemas.microsoft.com/office/drawing/2014/main" id="{CF11610C-2BF8-6FCC-FC41-9E1F8A05F8C1}"/>
-              </a:ext>
-            </a:extLst>
-          </p:cNvPr>
+            <a:endParaRPr lang="en-US" dirty="0"/>
+          </a:p>
+        </p:txBody>
+      </p:sp>
+      <p:sp>
+        <p:nvSpPr>
+          <p:cNvPr id="4" name="Date Placeholder 3"/>
           <p:cNvSpPr>
             <a:spLocks noGrp="1"/>
           </p:cNvSpPr>
@@ -878,7 +783,7 @@
           <a:p>
             <a:fld id="{E83DCB1C-7482-A248-B459-A59749D0D03F}" type="datetimeFigureOut">
               <a:rPr lang="en-US" smtClean="0"/>
-              <a:t>3/12/25</a:t>
+              <a:t>3/13/25</a:t>
             </a:fld>
             <a:endParaRPr lang="en-US"/>
           </a:p>
@@ -886,13 +791,7 @@
       </p:sp>
       <p:sp>
         <p:nvSpPr>
-          <p:cNvPr id="5" name="Footer Placeholder 4">
-            <a:extLst>
-              <a:ext uri="{FF2B5EF4-FFF2-40B4-BE49-F238E27FC236}">
-                <a16:creationId xmlns:a16="http://schemas.microsoft.com/office/drawing/2014/main" id="{75E1C401-90D3-157E-FF61-DE42C851D215}"/>
-              </a:ext>
-            </a:extLst>
-          </p:cNvPr>
+          <p:cNvPr id="5" name="Footer Placeholder 4"/>
           <p:cNvSpPr>
             <a:spLocks noGrp="1"/>
           </p:cNvSpPr>
@@ -911,13 +810,7 @@
       </p:sp>
       <p:sp>
         <p:nvSpPr>
-          <p:cNvPr id="6" name="Slide Number Placeholder 5">
-            <a:extLst>
-              <a:ext uri="{FF2B5EF4-FFF2-40B4-BE49-F238E27FC236}">
-                <a16:creationId xmlns:a16="http://schemas.microsoft.com/office/drawing/2014/main" id="{4C87190E-35C7-0411-B26E-69358F90280D}"/>
-              </a:ext>
-            </a:extLst>
-          </p:cNvPr>
+          <p:cNvPr id="6" name="Slide Number Placeholder 5"/>
           <p:cNvSpPr>
             <a:spLocks noGrp="1"/>
           </p:cNvSpPr>
@@ -941,7 +834,7 @@
     </p:spTree>
     <p:extLst>
       <p:ext uri="{BB962C8B-B14F-4D97-AF65-F5344CB8AC3E}">
-        <p14:creationId xmlns:p14="http://schemas.microsoft.com/office/powerpoint/2010/main" val="3965485615"/>
+        <p14:creationId xmlns:p14="http://schemas.microsoft.com/office/powerpoint/2010/main" val="1889027183"/>
       </p:ext>
     </p:extLst>
   </p:cSld>
@@ -970,13 +863,7 @@
       </p:grpSpPr>
       <p:sp>
         <p:nvSpPr>
-          <p:cNvPr id="2" name="Title 1">
-            <a:extLst>
-              <a:ext uri="{FF2B5EF4-FFF2-40B4-BE49-F238E27FC236}">
-                <a16:creationId xmlns:a16="http://schemas.microsoft.com/office/drawing/2014/main" id="{04C6203B-752E-1C9B-6A35-A27C55A1558D}"/>
-              </a:ext>
-            </a:extLst>
-          </p:cNvPr>
+          <p:cNvPr id="2" name="Title 1"/>
           <p:cNvSpPr>
             <a:spLocks noGrp="1"/>
           </p:cNvSpPr>
@@ -986,8 +873,8 @@
         </p:nvSpPr>
         <p:spPr>
           <a:xfrm>
-            <a:off x="831850" y="1709738"/>
-            <a:ext cx="10515600" cy="2852737"/>
+            <a:off x="1106426" y="1709738"/>
+            <a:ext cx="13986570" cy="2852737"/>
           </a:xfrm>
         </p:spPr>
         <p:txBody>
@@ -1002,18 +889,13 @@
               <a:rPr lang="en-US"/>
               <a:t>Click to edit Master title style</a:t>
             </a:r>
-          </a:p>
-        </p:txBody>
-      </p:sp>
-      <p:sp>
-        <p:nvSpPr>
-          <p:cNvPr id="3" name="Text Placeholder 2">
-            <a:extLst>
-              <a:ext uri="{FF2B5EF4-FFF2-40B4-BE49-F238E27FC236}">
-                <a16:creationId xmlns:a16="http://schemas.microsoft.com/office/drawing/2014/main" id="{645A44D8-BF49-75B6-5041-E31FFCF4501E}"/>
-              </a:ext>
-            </a:extLst>
-          </p:cNvPr>
+            <a:endParaRPr lang="en-US" dirty="0"/>
+          </a:p>
+        </p:txBody>
+      </p:sp>
+      <p:sp>
+        <p:nvSpPr>
+          <p:cNvPr id="3" name="Text Placeholder 2"/>
           <p:cNvSpPr>
             <a:spLocks noGrp="1"/>
           </p:cNvSpPr>
@@ -1023,8 +905,8 @@
         </p:nvSpPr>
         <p:spPr>
           <a:xfrm>
-            <a:off x="831850" y="4589463"/>
-            <a:ext cx="10515600" cy="1500187"/>
+            <a:off x="1106426" y="4589464"/>
+            <a:ext cx="13986570" cy="1500187"/>
           </a:xfrm>
         </p:spPr>
         <p:txBody>
@@ -1132,13 +1014,7 @@
       </p:sp>
       <p:sp>
         <p:nvSpPr>
-          <p:cNvPr id="4" name="Date Placeholder 3">
-            <a:extLst>
-              <a:ext uri="{FF2B5EF4-FFF2-40B4-BE49-F238E27FC236}">
-                <a16:creationId xmlns:a16="http://schemas.microsoft.com/office/drawing/2014/main" id="{BA1386C1-6A4C-7B5D-3232-1346D95641B4}"/>
-              </a:ext>
-            </a:extLst>
-          </p:cNvPr>
+          <p:cNvPr id="4" name="Date Placeholder 3"/>
           <p:cNvSpPr>
             <a:spLocks noGrp="1"/>
           </p:cNvSpPr>
@@ -1153,7 +1029,7 @@
           <a:p>
             <a:fld id="{E83DCB1C-7482-A248-B459-A59749D0D03F}" type="datetimeFigureOut">
               <a:rPr lang="en-US" smtClean="0"/>
-              <a:t>3/12/25</a:t>
+              <a:t>3/13/25</a:t>
             </a:fld>
             <a:endParaRPr lang="en-US"/>
           </a:p>
@@ -1161,13 +1037,7 @@
       </p:sp>
       <p:sp>
         <p:nvSpPr>
-          <p:cNvPr id="5" name="Footer Placeholder 4">
-            <a:extLst>
-              <a:ext uri="{FF2B5EF4-FFF2-40B4-BE49-F238E27FC236}">
-                <a16:creationId xmlns:a16="http://schemas.microsoft.com/office/drawing/2014/main" id="{3F7D47D3-469D-3313-99EA-8352077EC8AD}"/>
-              </a:ext>
-            </a:extLst>
-          </p:cNvPr>
+          <p:cNvPr id="5" name="Footer Placeholder 4"/>
           <p:cNvSpPr>
             <a:spLocks noGrp="1"/>
           </p:cNvSpPr>
@@ -1186,13 +1056,7 @@
       </p:sp>
       <p:sp>
         <p:nvSpPr>
-          <p:cNvPr id="6" name="Slide Number Placeholder 5">
-            <a:extLst>
-              <a:ext uri="{FF2B5EF4-FFF2-40B4-BE49-F238E27FC236}">
-                <a16:creationId xmlns:a16="http://schemas.microsoft.com/office/drawing/2014/main" id="{D396CEED-33EE-87B5-7A19-2927EF496161}"/>
-              </a:ext>
-            </a:extLst>
-          </p:cNvPr>
+          <p:cNvPr id="6" name="Slide Number Placeholder 5"/>
           <p:cNvSpPr>
             <a:spLocks noGrp="1"/>
           </p:cNvSpPr>
@@ -1216,7 +1080,7 @@
     </p:spTree>
     <p:extLst>
       <p:ext uri="{BB962C8B-B14F-4D97-AF65-F5344CB8AC3E}">
-        <p14:creationId xmlns:p14="http://schemas.microsoft.com/office/powerpoint/2010/main" val="2972504161"/>
+        <p14:creationId xmlns:p14="http://schemas.microsoft.com/office/powerpoint/2010/main" val="4281440198"/>
       </p:ext>
     </p:extLst>
   </p:cSld>
@@ -1245,13 +1109,7 @@
       </p:grpSpPr>
       <p:sp>
         <p:nvSpPr>
-          <p:cNvPr id="2" name="Title 1">
-            <a:extLst>
-              <a:ext uri="{FF2B5EF4-FFF2-40B4-BE49-F238E27FC236}">
-                <a16:creationId xmlns:a16="http://schemas.microsoft.com/office/drawing/2014/main" id="{8579005D-F381-2615-0993-AE25D5A1F7C1}"/>
-              </a:ext>
-            </a:extLst>
-          </p:cNvPr>
+          <p:cNvPr id="2" name="Title 1"/>
           <p:cNvSpPr>
             <a:spLocks noGrp="1"/>
           </p:cNvSpPr>
@@ -1268,18 +1126,13 @@
               <a:rPr lang="en-US"/>
               <a:t>Click to edit Master title style</a:t>
             </a:r>
-          </a:p>
-        </p:txBody>
-      </p:sp>
-      <p:sp>
-        <p:nvSpPr>
-          <p:cNvPr id="3" name="Content Placeholder 2">
-            <a:extLst>
-              <a:ext uri="{FF2B5EF4-FFF2-40B4-BE49-F238E27FC236}">
-                <a16:creationId xmlns:a16="http://schemas.microsoft.com/office/drawing/2014/main" id="{084F7B98-A657-6714-F7AC-30C717A6A4BF}"/>
-              </a:ext>
-            </a:extLst>
-          </p:cNvPr>
+            <a:endParaRPr lang="en-US" dirty="0"/>
+          </a:p>
+        </p:txBody>
+      </p:sp>
+      <p:sp>
+        <p:nvSpPr>
+          <p:cNvPr id="3" name="Content Placeholder 2"/>
           <p:cNvSpPr>
             <a:spLocks noGrp="1"/>
           </p:cNvSpPr>
@@ -1289,8 +1142,8 @@
         </p:nvSpPr>
         <p:spPr>
           <a:xfrm>
-            <a:off x="838200" y="1825625"/>
-            <a:ext cx="5181600" cy="4351338"/>
+            <a:off x="1114872" y="1825625"/>
+            <a:ext cx="6891933" cy="4351338"/>
           </a:xfrm>
         </p:spPr>
         <p:txBody>
@@ -1330,18 +1183,13 @@
               <a:rPr lang="en-US"/>
               <a:t>Fifth level</a:t>
             </a:r>
-          </a:p>
-        </p:txBody>
-      </p:sp>
-      <p:sp>
-        <p:nvSpPr>
-          <p:cNvPr id="4" name="Content Placeholder 3">
-            <a:extLst>
-              <a:ext uri="{FF2B5EF4-FFF2-40B4-BE49-F238E27FC236}">
-                <a16:creationId xmlns:a16="http://schemas.microsoft.com/office/drawing/2014/main" id="{40DA9907-D038-6925-CCAD-500D82BAE129}"/>
-              </a:ext>
-            </a:extLst>
-          </p:cNvPr>
+            <a:endParaRPr lang="en-US" dirty="0"/>
+          </a:p>
+        </p:txBody>
+      </p:sp>
+      <p:sp>
+        <p:nvSpPr>
+          <p:cNvPr id="4" name="Content Placeholder 3"/>
           <p:cNvSpPr>
             <a:spLocks noGrp="1"/>
           </p:cNvSpPr>
@@ -1351,8 +1199,8 @@
         </p:nvSpPr>
         <p:spPr>
           <a:xfrm>
-            <a:off x="6172200" y="1825625"/>
-            <a:ext cx="5181600" cy="4351338"/>
+            <a:off x="8209508" y="1825625"/>
+            <a:ext cx="6891933" cy="4351338"/>
           </a:xfrm>
         </p:spPr>
         <p:txBody>
@@ -1392,18 +1240,13 @@
               <a:rPr lang="en-US"/>
               <a:t>Fifth level</a:t>
             </a:r>
-          </a:p>
-        </p:txBody>
-      </p:sp>
-      <p:sp>
-        <p:nvSpPr>
-          <p:cNvPr id="5" name="Date Placeholder 4">
-            <a:extLst>
-              <a:ext uri="{FF2B5EF4-FFF2-40B4-BE49-F238E27FC236}">
-                <a16:creationId xmlns:a16="http://schemas.microsoft.com/office/drawing/2014/main" id="{95B8B45F-B355-5FD1-14F5-502DECE0BED0}"/>
-              </a:ext>
-            </a:extLst>
-          </p:cNvPr>
+            <a:endParaRPr lang="en-US" dirty="0"/>
+          </a:p>
+        </p:txBody>
+      </p:sp>
+      <p:sp>
+        <p:nvSpPr>
+          <p:cNvPr id="5" name="Date Placeholder 4"/>
           <p:cNvSpPr>
             <a:spLocks noGrp="1"/>
           </p:cNvSpPr>
@@ -1418,7 +1261,7 @@
           <a:p>
             <a:fld id="{E83DCB1C-7482-A248-B459-A59749D0D03F}" type="datetimeFigureOut">
               <a:rPr lang="en-US" smtClean="0"/>
-              <a:t>3/12/25</a:t>
+              <a:t>3/13/25</a:t>
             </a:fld>
             <a:endParaRPr lang="en-US"/>
           </a:p>
@@ -1426,13 +1269,7 @@
       </p:sp>
       <p:sp>
         <p:nvSpPr>
-          <p:cNvPr id="6" name="Footer Placeholder 5">
-            <a:extLst>
-              <a:ext uri="{FF2B5EF4-FFF2-40B4-BE49-F238E27FC236}">
-                <a16:creationId xmlns:a16="http://schemas.microsoft.com/office/drawing/2014/main" id="{98027A50-E6E4-D3F5-5A89-FE5DCFEC018E}"/>
-              </a:ext>
-            </a:extLst>
-          </p:cNvPr>
+          <p:cNvPr id="6" name="Footer Placeholder 5"/>
           <p:cNvSpPr>
             <a:spLocks noGrp="1"/>
           </p:cNvSpPr>
@@ -1451,13 +1288,7 @@
       </p:sp>
       <p:sp>
         <p:nvSpPr>
-          <p:cNvPr id="7" name="Slide Number Placeholder 6">
-            <a:extLst>
-              <a:ext uri="{FF2B5EF4-FFF2-40B4-BE49-F238E27FC236}">
-                <a16:creationId xmlns:a16="http://schemas.microsoft.com/office/drawing/2014/main" id="{950FDBE2-0F34-71B8-BBB2-CA3413FCCEEE}"/>
-              </a:ext>
-            </a:extLst>
-          </p:cNvPr>
+          <p:cNvPr id="7" name="Slide Number Placeholder 6"/>
           <p:cNvSpPr>
             <a:spLocks noGrp="1"/>
           </p:cNvSpPr>
@@ -1481,7 +1312,7 @@
     </p:spTree>
     <p:extLst>
       <p:ext uri="{BB962C8B-B14F-4D97-AF65-F5344CB8AC3E}">
-        <p14:creationId xmlns:p14="http://schemas.microsoft.com/office/powerpoint/2010/main" val="4088422306"/>
+        <p14:creationId xmlns:p14="http://schemas.microsoft.com/office/powerpoint/2010/main" val="2828378395"/>
       </p:ext>
     </p:extLst>
   </p:cSld>
@@ -1510,13 +1341,7 @@
       </p:grpSpPr>
       <p:sp>
         <p:nvSpPr>
-          <p:cNvPr id="2" name="Title 1">
-            <a:extLst>
-              <a:ext uri="{FF2B5EF4-FFF2-40B4-BE49-F238E27FC236}">
-                <a16:creationId xmlns:a16="http://schemas.microsoft.com/office/drawing/2014/main" id="{6821BC8A-DA62-C299-321A-AD0F1B794725}"/>
-              </a:ext>
-            </a:extLst>
-          </p:cNvPr>
+          <p:cNvPr id="2" name="Title 1"/>
           <p:cNvSpPr>
             <a:spLocks noGrp="1"/>
           </p:cNvSpPr>
@@ -1526,8 +1351,8 @@
         </p:nvSpPr>
         <p:spPr>
           <a:xfrm>
-            <a:off x="839788" y="365125"/>
-            <a:ext cx="10515600" cy="1325563"/>
+            <a:off x="1116984" y="365126"/>
+            <a:ext cx="13986570" cy="1325563"/>
           </a:xfrm>
         </p:spPr>
         <p:txBody>
@@ -1538,18 +1363,13 @@
               <a:rPr lang="en-US"/>
               <a:t>Click to edit Master title style</a:t>
             </a:r>
-          </a:p>
-        </p:txBody>
-      </p:sp>
-      <p:sp>
-        <p:nvSpPr>
-          <p:cNvPr id="3" name="Text Placeholder 2">
-            <a:extLst>
-              <a:ext uri="{FF2B5EF4-FFF2-40B4-BE49-F238E27FC236}">
-                <a16:creationId xmlns:a16="http://schemas.microsoft.com/office/drawing/2014/main" id="{BD3FA21E-E3F9-A6AB-5D72-641A1D40E5E0}"/>
-              </a:ext>
-            </a:extLst>
-          </p:cNvPr>
+            <a:endParaRPr lang="en-US" dirty="0"/>
+          </a:p>
+        </p:txBody>
+      </p:sp>
+      <p:sp>
+        <p:nvSpPr>
+          <p:cNvPr id="3" name="Text Placeholder 2"/>
           <p:cNvSpPr>
             <a:spLocks noGrp="1"/>
           </p:cNvSpPr>
@@ -1559,8 +1379,8 @@
         </p:nvSpPr>
         <p:spPr>
           <a:xfrm>
-            <a:off x="839788" y="1681163"/>
-            <a:ext cx="5157787" cy="823912"/>
+            <a:off x="1116984" y="1681163"/>
+            <a:ext cx="6860260" cy="823912"/>
           </a:xfrm>
         </p:spPr>
         <p:txBody>
@@ -1614,13 +1434,7 @@
       </p:sp>
       <p:sp>
         <p:nvSpPr>
-          <p:cNvPr id="4" name="Content Placeholder 3">
-            <a:extLst>
-              <a:ext uri="{FF2B5EF4-FFF2-40B4-BE49-F238E27FC236}">
-                <a16:creationId xmlns:a16="http://schemas.microsoft.com/office/drawing/2014/main" id="{C9B5A7BB-AD69-3D92-CFCD-DA9E6DFB51D1}"/>
-              </a:ext>
-            </a:extLst>
-          </p:cNvPr>
+          <p:cNvPr id="4" name="Content Placeholder 3"/>
           <p:cNvSpPr>
             <a:spLocks noGrp="1"/>
           </p:cNvSpPr>
@@ -1630,8 +1444,8 @@
         </p:nvSpPr>
         <p:spPr>
           <a:xfrm>
-            <a:off x="839788" y="2505075"/>
-            <a:ext cx="5157787" cy="3684588"/>
+            <a:off x="1116984" y="2505075"/>
+            <a:ext cx="6860260" cy="3684588"/>
           </a:xfrm>
         </p:spPr>
         <p:txBody>
@@ -1671,18 +1485,13 @@
               <a:rPr lang="en-US"/>
               <a:t>Fifth level</a:t>
             </a:r>
-          </a:p>
-        </p:txBody>
-      </p:sp>
-      <p:sp>
-        <p:nvSpPr>
-          <p:cNvPr id="5" name="Text Placeholder 4">
-            <a:extLst>
-              <a:ext uri="{FF2B5EF4-FFF2-40B4-BE49-F238E27FC236}">
-                <a16:creationId xmlns:a16="http://schemas.microsoft.com/office/drawing/2014/main" id="{880FBB26-32AC-C7A7-1EE2-CFEF2FBE9B62}"/>
-              </a:ext>
-            </a:extLst>
-          </p:cNvPr>
+            <a:endParaRPr lang="en-US" dirty="0"/>
+          </a:p>
+        </p:txBody>
+      </p:sp>
+      <p:sp>
+        <p:nvSpPr>
+          <p:cNvPr id="5" name="Text Placeholder 4"/>
           <p:cNvSpPr>
             <a:spLocks noGrp="1"/>
           </p:cNvSpPr>
@@ -1692,8 +1501,8 @@
         </p:nvSpPr>
         <p:spPr>
           <a:xfrm>
-            <a:off x="6172200" y="1681163"/>
-            <a:ext cx="5183188" cy="823912"/>
+            <a:off x="8209509" y="1681163"/>
+            <a:ext cx="6894045" cy="823912"/>
           </a:xfrm>
         </p:spPr>
         <p:txBody>
@@ -1747,13 +1556,7 @@
       </p:sp>
       <p:sp>
         <p:nvSpPr>
-          <p:cNvPr id="6" name="Content Placeholder 5">
-            <a:extLst>
-              <a:ext uri="{FF2B5EF4-FFF2-40B4-BE49-F238E27FC236}">
-                <a16:creationId xmlns:a16="http://schemas.microsoft.com/office/drawing/2014/main" id="{6F909590-F5E4-1B83-F6C2-E0752F6245EE}"/>
-              </a:ext>
-            </a:extLst>
-          </p:cNvPr>
+          <p:cNvPr id="6" name="Content Placeholder 5"/>
           <p:cNvSpPr>
             <a:spLocks noGrp="1"/>
           </p:cNvSpPr>
@@ -1763,8 +1566,8 @@
         </p:nvSpPr>
         <p:spPr>
           <a:xfrm>
-            <a:off x="6172200" y="2505075"/>
-            <a:ext cx="5183188" cy="3684588"/>
+            <a:off x="8209509" y="2505075"/>
+            <a:ext cx="6894045" cy="3684588"/>
           </a:xfrm>
         </p:spPr>
         <p:txBody>
@@ -1804,18 +1607,13 @@
               <a:rPr lang="en-US"/>
               <a:t>Fifth level</a:t>
             </a:r>
-          </a:p>
-        </p:txBody>
-      </p:sp>
-      <p:sp>
-        <p:nvSpPr>
-          <p:cNvPr id="7" name="Date Placeholder 6">
-            <a:extLst>
-              <a:ext uri="{FF2B5EF4-FFF2-40B4-BE49-F238E27FC236}">
-                <a16:creationId xmlns:a16="http://schemas.microsoft.com/office/drawing/2014/main" id="{0D69F8D0-D6C6-A1EB-97D7-39346B6A85D4}"/>
-              </a:ext>
-            </a:extLst>
-          </p:cNvPr>
+            <a:endParaRPr lang="en-US" dirty="0"/>
+          </a:p>
+        </p:txBody>
+      </p:sp>
+      <p:sp>
+        <p:nvSpPr>
+          <p:cNvPr id="7" name="Date Placeholder 6"/>
           <p:cNvSpPr>
             <a:spLocks noGrp="1"/>
           </p:cNvSpPr>
@@ -1830,7 +1628,7 @@
           <a:p>
             <a:fld id="{E83DCB1C-7482-A248-B459-A59749D0D03F}" type="datetimeFigureOut">
               <a:rPr lang="en-US" smtClean="0"/>
-              <a:t>3/12/25</a:t>
+              <a:t>3/13/25</a:t>
             </a:fld>
             <a:endParaRPr lang="en-US"/>
           </a:p>
@@ -1838,13 +1636,7 @@
       </p:sp>
       <p:sp>
         <p:nvSpPr>
-          <p:cNvPr id="8" name="Footer Placeholder 7">
-            <a:extLst>
-              <a:ext uri="{FF2B5EF4-FFF2-40B4-BE49-F238E27FC236}">
-                <a16:creationId xmlns:a16="http://schemas.microsoft.com/office/drawing/2014/main" id="{1CA48221-D061-76F6-A9D8-4429C1D530B0}"/>
-              </a:ext>
-            </a:extLst>
-          </p:cNvPr>
+          <p:cNvPr id="8" name="Footer Placeholder 7"/>
           <p:cNvSpPr>
             <a:spLocks noGrp="1"/>
           </p:cNvSpPr>
@@ -1863,13 +1655,7 @@
       </p:sp>
       <p:sp>
         <p:nvSpPr>
-          <p:cNvPr id="9" name="Slide Number Placeholder 8">
-            <a:extLst>
-              <a:ext uri="{FF2B5EF4-FFF2-40B4-BE49-F238E27FC236}">
-                <a16:creationId xmlns:a16="http://schemas.microsoft.com/office/drawing/2014/main" id="{E4FC0CD7-20B6-867F-7458-32526B71AAD0}"/>
-              </a:ext>
-            </a:extLst>
-          </p:cNvPr>
+          <p:cNvPr id="9" name="Slide Number Placeholder 8"/>
           <p:cNvSpPr>
             <a:spLocks noGrp="1"/>
           </p:cNvSpPr>
@@ -1893,7 +1679,7 @@
     </p:spTree>
     <p:extLst>
       <p:ext uri="{BB962C8B-B14F-4D97-AF65-F5344CB8AC3E}">
-        <p14:creationId xmlns:p14="http://schemas.microsoft.com/office/powerpoint/2010/main" val="1284347399"/>
+        <p14:creationId xmlns:p14="http://schemas.microsoft.com/office/powerpoint/2010/main" val="790115256"/>
       </p:ext>
     </p:extLst>
   </p:cSld>
@@ -1922,13 +1708,7 @@
       </p:grpSpPr>
       <p:sp>
         <p:nvSpPr>
-          <p:cNvPr id="2" name="Title 1">
-            <a:extLst>
-              <a:ext uri="{FF2B5EF4-FFF2-40B4-BE49-F238E27FC236}">
-                <a16:creationId xmlns:a16="http://schemas.microsoft.com/office/drawing/2014/main" id="{B04A7759-3BBD-6FB3-9248-79739E4A4FB9}"/>
-              </a:ext>
-            </a:extLst>
-          </p:cNvPr>
+          <p:cNvPr id="2" name="Title 1"/>
           <p:cNvSpPr>
             <a:spLocks noGrp="1"/>
           </p:cNvSpPr>
@@ -1945,18 +1725,13 @@
               <a:rPr lang="en-US"/>
               <a:t>Click to edit Master title style</a:t>
             </a:r>
-          </a:p>
-        </p:txBody>
-      </p:sp>
-      <p:sp>
-        <p:nvSpPr>
-          <p:cNvPr id="3" name="Date Placeholder 2">
-            <a:extLst>
-              <a:ext uri="{FF2B5EF4-FFF2-40B4-BE49-F238E27FC236}">
-                <a16:creationId xmlns:a16="http://schemas.microsoft.com/office/drawing/2014/main" id="{6FE739B6-2137-1453-D9AB-188F3F08DB4F}"/>
-              </a:ext>
-            </a:extLst>
-          </p:cNvPr>
+            <a:endParaRPr lang="en-US" dirty="0"/>
+          </a:p>
+        </p:txBody>
+      </p:sp>
+      <p:sp>
+        <p:nvSpPr>
+          <p:cNvPr id="3" name="Date Placeholder 2"/>
           <p:cNvSpPr>
             <a:spLocks noGrp="1"/>
           </p:cNvSpPr>
@@ -1971,7 +1746,7 @@
           <a:p>
             <a:fld id="{E83DCB1C-7482-A248-B459-A59749D0D03F}" type="datetimeFigureOut">
               <a:rPr lang="en-US" smtClean="0"/>
-              <a:t>3/12/25</a:t>
+              <a:t>3/13/25</a:t>
             </a:fld>
             <a:endParaRPr lang="en-US"/>
           </a:p>
@@ -1979,13 +1754,7 @@
       </p:sp>
       <p:sp>
         <p:nvSpPr>
-          <p:cNvPr id="4" name="Footer Placeholder 3">
-            <a:extLst>
-              <a:ext uri="{FF2B5EF4-FFF2-40B4-BE49-F238E27FC236}">
-                <a16:creationId xmlns:a16="http://schemas.microsoft.com/office/drawing/2014/main" id="{CC84C68E-DCD8-7C79-EC4D-0F2241CAF960}"/>
-              </a:ext>
-            </a:extLst>
-          </p:cNvPr>
+          <p:cNvPr id="4" name="Footer Placeholder 3"/>
           <p:cNvSpPr>
             <a:spLocks noGrp="1"/>
           </p:cNvSpPr>
@@ -2004,13 +1773,7 @@
       </p:sp>
       <p:sp>
         <p:nvSpPr>
-          <p:cNvPr id="5" name="Slide Number Placeholder 4">
-            <a:extLst>
-              <a:ext uri="{FF2B5EF4-FFF2-40B4-BE49-F238E27FC236}">
-                <a16:creationId xmlns:a16="http://schemas.microsoft.com/office/drawing/2014/main" id="{7F19A41B-E715-8817-D085-42D28E130B55}"/>
-              </a:ext>
-            </a:extLst>
-          </p:cNvPr>
+          <p:cNvPr id="5" name="Slide Number Placeholder 4"/>
           <p:cNvSpPr>
             <a:spLocks noGrp="1"/>
           </p:cNvSpPr>
@@ -2034,7 +1797,7 @@
     </p:spTree>
     <p:extLst>
       <p:ext uri="{BB962C8B-B14F-4D97-AF65-F5344CB8AC3E}">
-        <p14:creationId xmlns:p14="http://schemas.microsoft.com/office/powerpoint/2010/main" val="1108099305"/>
+        <p14:creationId xmlns:p14="http://schemas.microsoft.com/office/powerpoint/2010/main" val="3882103319"/>
       </p:ext>
     </p:extLst>
   </p:cSld>
@@ -2063,13 +1826,7 @@
       </p:grpSpPr>
       <p:sp>
         <p:nvSpPr>
-          <p:cNvPr id="2" name="Date Placeholder 1">
-            <a:extLst>
-              <a:ext uri="{FF2B5EF4-FFF2-40B4-BE49-F238E27FC236}">
-                <a16:creationId xmlns:a16="http://schemas.microsoft.com/office/drawing/2014/main" id="{C73B43D6-BB05-4EF1-EB86-D88329BA8885}"/>
-              </a:ext>
-            </a:extLst>
-          </p:cNvPr>
+          <p:cNvPr id="2" name="Date Placeholder 1"/>
           <p:cNvSpPr>
             <a:spLocks noGrp="1"/>
           </p:cNvSpPr>
@@ -2084,7 +1841,7 @@
           <a:p>
             <a:fld id="{E83DCB1C-7482-A248-B459-A59749D0D03F}" type="datetimeFigureOut">
               <a:rPr lang="en-US" smtClean="0"/>
-              <a:t>3/12/25</a:t>
+              <a:t>3/13/25</a:t>
             </a:fld>
             <a:endParaRPr lang="en-US"/>
           </a:p>
@@ -2092,13 +1849,7 @@
       </p:sp>
       <p:sp>
         <p:nvSpPr>
-          <p:cNvPr id="3" name="Footer Placeholder 2">
-            <a:extLst>
-              <a:ext uri="{FF2B5EF4-FFF2-40B4-BE49-F238E27FC236}">
-                <a16:creationId xmlns:a16="http://schemas.microsoft.com/office/drawing/2014/main" id="{173D90E6-DFBB-E037-EEE5-E3FA24DE96FD}"/>
-              </a:ext>
-            </a:extLst>
-          </p:cNvPr>
+          <p:cNvPr id="3" name="Footer Placeholder 2"/>
           <p:cNvSpPr>
             <a:spLocks noGrp="1"/>
           </p:cNvSpPr>
@@ -2117,13 +1868,7 @@
       </p:sp>
       <p:sp>
         <p:nvSpPr>
-          <p:cNvPr id="4" name="Slide Number Placeholder 3">
-            <a:extLst>
-              <a:ext uri="{FF2B5EF4-FFF2-40B4-BE49-F238E27FC236}">
-                <a16:creationId xmlns:a16="http://schemas.microsoft.com/office/drawing/2014/main" id="{67626D12-BAC8-880F-C06B-749E3FF2C1B4}"/>
-              </a:ext>
-            </a:extLst>
-          </p:cNvPr>
+          <p:cNvPr id="4" name="Slide Number Placeholder 3"/>
           <p:cNvSpPr>
             <a:spLocks noGrp="1"/>
           </p:cNvSpPr>
@@ -2147,7 +1892,7 @@
     </p:spTree>
     <p:extLst>
       <p:ext uri="{BB962C8B-B14F-4D97-AF65-F5344CB8AC3E}">
-        <p14:creationId xmlns:p14="http://schemas.microsoft.com/office/powerpoint/2010/main" val="2752121045"/>
+        <p14:creationId xmlns:p14="http://schemas.microsoft.com/office/powerpoint/2010/main" val="803383702"/>
       </p:ext>
     </p:extLst>
   </p:cSld>
@@ -2176,13 +1921,7 @@
       </p:grpSpPr>
       <p:sp>
         <p:nvSpPr>
-          <p:cNvPr id="2" name="Title 1">
-            <a:extLst>
-              <a:ext uri="{FF2B5EF4-FFF2-40B4-BE49-F238E27FC236}">
-                <a16:creationId xmlns:a16="http://schemas.microsoft.com/office/drawing/2014/main" id="{FFDACC5F-0A7B-DE13-F683-7ED42426C9AB}"/>
-              </a:ext>
-            </a:extLst>
-          </p:cNvPr>
+          <p:cNvPr id="2" name="Title 1"/>
           <p:cNvSpPr>
             <a:spLocks noGrp="1"/>
           </p:cNvSpPr>
@@ -2192,8 +1931,8 @@
         </p:nvSpPr>
         <p:spPr>
           <a:xfrm>
-            <a:off x="839788" y="457200"/>
-            <a:ext cx="3932237" cy="1600200"/>
+            <a:off x="1116984" y="457200"/>
+            <a:ext cx="5230183" cy="1600200"/>
           </a:xfrm>
         </p:spPr>
         <p:txBody>
@@ -2208,18 +1947,13 @@
               <a:rPr lang="en-US"/>
               <a:t>Click to edit Master title style</a:t>
             </a:r>
-          </a:p>
-        </p:txBody>
-      </p:sp>
-      <p:sp>
-        <p:nvSpPr>
-          <p:cNvPr id="3" name="Content Placeholder 2">
-            <a:extLst>
-              <a:ext uri="{FF2B5EF4-FFF2-40B4-BE49-F238E27FC236}">
-                <a16:creationId xmlns:a16="http://schemas.microsoft.com/office/drawing/2014/main" id="{C10BE4A1-8268-EE01-3BA9-D5DA1016DB37}"/>
-              </a:ext>
-            </a:extLst>
-          </p:cNvPr>
+            <a:endParaRPr lang="en-US" dirty="0"/>
+          </a:p>
+        </p:txBody>
+      </p:sp>
+      <p:sp>
+        <p:nvSpPr>
+          <p:cNvPr id="3" name="Content Placeholder 2"/>
           <p:cNvSpPr>
             <a:spLocks noGrp="1"/>
           </p:cNvSpPr>
@@ -2229,8 +1963,8 @@
         </p:nvSpPr>
         <p:spPr>
           <a:xfrm>
-            <a:off x="5183188" y="987425"/>
-            <a:ext cx="6172200" cy="4873625"/>
+            <a:off x="6894045" y="987426"/>
+            <a:ext cx="8209508" cy="4873625"/>
           </a:xfrm>
         </p:spPr>
         <p:txBody>
@@ -2298,18 +2032,13 @@
               <a:rPr lang="en-US"/>
               <a:t>Fifth level</a:t>
             </a:r>
-          </a:p>
-        </p:txBody>
-      </p:sp>
-      <p:sp>
-        <p:nvSpPr>
-          <p:cNvPr id="4" name="Text Placeholder 3">
-            <a:extLst>
-              <a:ext uri="{FF2B5EF4-FFF2-40B4-BE49-F238E27FC236}">
-                <a16:creationId xmlns:a16="http://schemas.microsoft.com/office/drawing/2014/main" id="{B20C9AF2-5439-C7CB-5580-FCC82918E3AC}"/>
-              </a:ext>
-            </a:extLst>
-          </p:cNvPr>
+            <a:endParaRPr lang="en-US" dirty="0"/>
+          </a:p>
+        </p:txBody>
+      </p:sp>
+      <p:sp>
+        <p:nvSpPr>
+          <p:cNvPr id="4" name="Text Placeholder 3"/>
           <p:cNvSpPr>
             <a:spLocks noGrp="1"/>
           </p:cNvSpPr>
@@ -2319,8 +2048,8 @@
         </p:nvSpPr>
         <p:spPr>
           <a:xfrm>
-            <a:off x="839788" y="2057400"/>
-            <a:ext cx="3932237" cy="3811588"/>
+            <a:off x="1116984" y="2057400"/>
+            <a:ext cx="5230183" cy="3811588"/>
           </a:xfrm>
         </p:spPr>
         <p:txBody>
@@ -2374,13 +2103,7 @@
       </p:sp>
       <p:sp>
         <p:nvSpPr>
-          <p:cNvPr id="5" name="Date Placeholder 4">
-            <a:extLst>
-              <a:ext uri="{FF2B5EF4-FFF2-40B4-BE49-F238E27FC236}">
-                <a16:creationId xmlns:a16="http://schemas.microsoft.com/office/drawing/2014/main" id="{D537C4B2-5AB7-D8D5-5B99-F7794A8A1B6D}"/>
-              </a:ext>
-            </a:extLst>
-          </p:cNvPr>
+          <p:cNvPr id="5" name="Date Placeholder 4"/>
           <p:cNvSpPr>
             <a:spLocks noGrp="1"/>
           </p:cNvSpPr>
@@ -2395,7 +2118,7 @@
           <a:p>
             <a:fld id="{E83DCB1C-7482-A248-B459-A59749D0D03F}" type="datetimeFigureOut">
               <a:rPr lang="en-US" smtClean="0"/>
-              <a:t>3/12/25</a:t>
+              <a:t>3/13/25</a:t>
             </a:fld>
             <a:endParaRPr lang="en-US"/>
           </a:p>
@@ -2403,13 +2126,7 @@
       </p:sp>
       <p:sp>
         <p:nvSpPr>
-          <p:cNvPr id="6" name="Footer Placeholder 5">
-            <a:extLst>
-              <a:ext uri="{FF2B5EF4-FFF2-40B4-BE49-F238E27FC236}">
-                <a16:creationId xmlns:a16="http://schemas.microsoft.com/office/drawing/2014/main" id="{42AE8C52-DDCB-AA01-D95F-45E35008C4ED}"/>
-              </a:ext>
-            </a:extLst>
-          </p:cNvPr>
+          <p:cNvPr id="6" name="Footer Placeholder 5"/>
           <p:cNvSpPr>
             <a:spLocks noGrp="1"/>
           </p:cNvSpPr>
@@ -2428,13 +2145,7 @@
       </p:sp>
       <p:sp>
         <p:nvSpPr>
-          <p:cNvPr id="7" name="Slide Number Placeholder 6">
-            <a:extLst>
-              <a:ext uri="{FF2B5EF4-FFF2-40B4-BE49-F238E27FC236}">
-                <a16:creationId xmlns:a16="http://schemas.microsoft.com/office/drawing/2014/main" id="{21016854-9CBF-A3B5-7121-1D45B123837C}"/>
-              </a:ext>
-            </a:extLst>
-          </p:cNvPr>
+          <p:cNvPr id="7" name="Slide Number Placeholder 6"/>
           <p:cNvSpPr>
             <a:spLocks noGrp="1"/>
           </p:cNvSpPr>
@@ -2458,7 +2169,7 @@
     </p:spTree>
     <p:extLst>
       <p:ext uri="{BB962C8B-B14F-4D97-AF65-F5344CB8AC3E}">
-        <p14:creationId xmlns:p14="http://schemas.microsoft.com/office/powerpoint/2010/main" val="939004878"/>
+        <p14:creationId xmlns:p14="http://schemas.microsoft.com/office/powerpoint/2010/main" val="1119262564"/>
       </p:ext>
     </p:extLst>
   </p:cSld>
@@ -2487,13 +2198,7 @@
       </p:grpSpPr>
       <p:sp>
         <p:nvSpPr>
-          <p:cNvPr id="2" name="Title 1">
-            <a:extLst>
-              <a:ext uri="{FF2B5EF4-FFF2-40B4-BE49-F238E27FC236}">
-                <a16:creationId xmlns:a16="http://schemas.microsoft.com/office/drawing/2014/main" id="{DEDCA06F-E729-C02A-81B8-83514EF5AA00}"/>
-              </a:ext>
-            </a:extLst>
-          </p:cNvPr>
+          <p:cNvPr id="2" name="Title 1"/>
           <p:cNvSpPr>
             <a:spLocks noGrp="1"/>
           </p:cNvSpPr>
@@ -2503,8 +2208,8 @@
         </p:nvSpPr>
         <p:spPr>
           <a:xfrm>
-            <a:off x="839788" y="457200"/>
-            <a:ext cx="3932237" cy="1600200"/>
+            <a:off x="1116984" y="457200"/>
+            <a:ext cx="5230183" cy="1600200"/>
           </a:xfrm>
         </p:spPr>
         <p:txBody>
@@ -2519,20 +2224,15 @@
               <a:rPr lang="en-US"/>
               <a:t>Click to edit Master title style</a:t>
             </a:r>
-          </a:p>
-        </p:txBody>
-      </p:sp>
-      <p:sp>
-        <p:nvSpPr>
-          <p:cNvPr id="3" name="Picture Placeholder 2">
-            <a:extLst>
-              <a:ext uri="{FF2B5EF4-FFF2-40B4-BE49-F238E27FC236}">
-                <a16:creationId xmlns:a16="http://schemas.microsoft.com/office/drawing/2014/main" id="{3C9E0CAA-F5C9-5C1E-EBB6-534B140D1708}"/>
-              </a:ext>
-            </a:extLst>
-          </p:cNvPr>
+            <a:endParaRPr lang="en-US" dirty="0"/>
+          </a:p>
+        </p:txBody>
+      </p:sp>
+      <p:sp>
+        <p:nvSpPr>
+          <p:cNvPr id="3" name="Picture Placeholder 2"/>
           <p:cNvSpPr>
-            <a:spLocks noGrp="1"/>
+            <a:spLocks noGrp="1" noChangeAspect="1"/>
           </p:cNvSpPr>
           <p:nvPr>
             <p:ph type="pic" idx="1"/>
@@ -2540,12 +2240,12 @@
         </p:nvSpPr>
         <p:spPr>
           <a:xfrm>
-            <a:off x="5183188" y="987425"/>
-            <a:ext cx="6172200" cy="4873625"/>
-          </a:xfrm>
-        </p:spPr>
-        <p:txBody>
-          <a:bodyPr/>
+            <a:off x="6894045" y="987426"/>
+            <a:ext cx="8209508" cy="4873625"/>
+          </a:xfrm>
+        </p:spPr>
+        <p:txBody>
+          <a:bodyPr anchor="t"/>
           <a:lstStyle>
             <a:lvl1pPr marL="0" indent="0">
               <a:buNone/>
@@ -2585,19 +2285,17 @@
             </a:lvl9pPr>
           </a:lstStyle>
           <a:p>
-            <a:endParaRPr lang="en-US"/>
-          </a:p>
-        </p:txBody>
-      </p:sp>
-      <p:sp>
-        <p:nvSpPr>
-          <p:cNvPr id="4" name="Text Placeholder 3">
-            <a:extLst>
-              <a:ext uri="{FF2B5EF4-FFF2-40B4-BE49-F238E27FC236}">
-                <a16:creationId xmlns:a16="http://schemas.microsoft.com/office/drawing/2014/main" id="{47C14FF7-58DB-F0A0-51AB-8E475F4A8767}"/>
-              </a:ext>
-            </a:extLst>
-          </p:cNvPr>
+            <a:r>
+              <a:rPr lang="en-US"/>
+              <a:t>Click icon to add picture</a:t>
+            </a:r>
+            <a:endParaRPr lang="en-US" dirty="0"/>
+          </a:p>
+        </p:txBody>
+      </p:sp>
+      <p:sp>
+        <p:nvSpPr>
+          <p:cNvPr id="4" name="Text Placeholder 3"/>
           <p:cNvSpPr>
             <a:spLocks noGrp="1"/>
           </p:cNvSpPr>
@@ -2607,8 +2305,8 @@
         </p:nvSpPr>
         <p:spPr>
           <a:xfrm>
-            <a:off x="839788" y="2057400"/>
-            <a:ext cx="3932237" cy="3811588"/>
+            <a:off x="1116984" y="2057400"/>
+            <a:ext cx="5230183" cy="3811588"/>
           </a:xfrm>
         </p:spPr>
         <p:txBody>
@@ -2662,13 +2360,7 @@
       </p:sp>
       <p:sp>
         <p:nvSpPr>
-          <p:cNvPr id="5" name="Date Placeholder 4">
-            <a:extLst>
-              <a:ext uri="{FF2B5EF4-FFF2-40B4-BE49-F238E27FC236}">
-                <a16:creationId xmlns:a16="http://schemas.microsoft.com/office/drawing/2014/main" id="{30A71DC1-7097-7D38-382E-1B5D1829F072}"/>
-              </a:ext>
-            </a:extLst>
-          </p:cNvPr>
+          <p:cNvPr id="5" name="Date Placeholder 4"/>
           <p:cNvSpPr>
             <a:spLocks noGrp="1"/>
           </p:cNvSpPr>
@@ -2683,7 +2375,7 @@
           <a:p>
             <a:fld id="{E83DCB1C-7482-A248-B459-A59749D0D03F}" type="datetimeFigureOut">
               <a:rPr lang="en-US" smtClean="0"/>
-              <a:t>3/12/25</a:t>
+              <a:t>3/13/25</a:t>
             </a:fld>
             <a:endParaRPr lang="en-US"/>
           </a:p>
@@ -2691,13 +2383,7 @@
       </p:sp>
       <p:sp>
         <p:nvSpPr>
-          <p:cNvPr id="6" name="Footer Placeholder 5">
-            <a:extLst>
-              <a:ext uri="{FF2B5EF4-FFF2-40B4-BE49-F238E27FC236}">
-                <a16:creationId xmlns:a16="http://schemas.microsoft.com/office/drawing/2014/main" id="{1DAE6807-585F-9D02-F1CD-003E1B5A8467}"/>
-              </a:ext>
-            </a:extLst>
-          </p:cNvPr>
+          <p:cNvPr id="6" name="Footer Placeholder 5"/>
           <p:cNvSpPr>
             <a:spLocks noGrp="1"/>
           </p:cNvSpPr>
@@ -2716,13 +2402,7 @@
       </p:sp>
       <p:sp>
         <p:nvSpPr>
-          <p:cNvPr id="7" name="Slide Number Placeholder 6">
-            <a:extLst>
-              <a:ext uri="{FF2B5EF4-FFF2-40B4-BE49-F238E27FC236}">
-                <a16:creationId xmlns:a16="http://schemas.microsoft.com/office/drawing/2014/main" id="{81D7BFC0-76F6-A076-E891-0E6D7CB49D3F}"/>
-              </a:ext>
-            </a:extLst>
-          </p:cNvPr>
+          <p:cNvPr id="7" name="Slide Number Placeholder 6"/>
           <p:cNvSpPr>
             <a:spLocks noGrp="1"/>
           </p:cNvSpPr>
@@ -2746,7 +2426,7 @@
     </p:spTree>
     <p:extLst>
       <p:ext uri="{BB962C8B-B14F-4D97-AF65-F5344CB8AC3E}">
-        <p14:creationId xmlns:p14="http://schemas.microsoft.com/office/powerpoint/2010/main" val="2045438372"/>
+        <p14:creationId xmlns:p14="http://schemas.microsoft.com/office/powerpoint/2010/main" val="3874816671"/>
       </p:ext>
     </p:extLst>
   </p:cSld>
@@ -2780,13 +2460,7 @@
       </p:grpSpPr>
       <p:sp>
         <p:nvSpPr>
-          <p:cNvPr id="2" name="Title Placeholder 1">
-            <a:extLst>
-              <a:ext uri="{FF2B5EF4-FFF2-40B4-BE49-F238E27FC236}">
-                <a16:creationId xmlns:a16="http://schemas.microsoft.com/office/drawing/2014/main" id="{B9058778-1778-0CC6-9455-37CBBFF803F6}"/>
-              </a:ext>
-            </a:extLst>
-          </p:cNvPr>
+          <p:cNvPr id="2" name="Title Placeholder 1"/>
           <p:cNvSpPr>
             <a:spLocks noGrp="1"/>
           </p:cNvSpPr>
@@ -2796,8 +2470,8 @@
         </p:nvSpPr>
         <p:spPr>
           <a:xfrm>
-            <a:off x="838200" y="365125"/>
-            <a:ext cx="10515600" cy="1325563"/>
+            <a:off x="1114872" y="365126"/>
+            <a:ext cx="13986570" cy="1325563"/>
           </a:xfrm>
           <a:prstGeom prst="rect">
             <a:avLst/>
@@ -2813,18 +2487,13 @@
               <a:rPr lang="en-US"/>
               <a:t>Click to edit Master title style</a:t>
             </a:r>
-          </a:p>
-        </p:txBody>
-      </p:sp>
-      <p:sp>
-        <p:nvSpPr>
-          <p:cNvPr id="3" name="Text Placeholder 2">
-            <a:extLst>
-              <a:ext uri="{FF2B5EF4-FFF2-40B4-BE49-F238E27FC236}">
-                <a16:creationId xmlns:a16="http://schemas.microsoft.com/office/drawing/2014/main" id="{1801F7E6-9E94-D866-7315-9D1B2C259CA1}"/>
-              </a:ext>
-            </a:extLst>
-          </p:cNvPr>
+            <a:endParaRPr lang="en-US" dirty="0"/>
+          </a:p>
+        </p:txBody>
+      </p:sp>
+      <p:sp>
+        <p:nvSpPr>
+          <p:cNvPr id="3" name="Text Placeholder 2"/>
           <p:cNvSpPr>
             <a:spLocks noGrp="1"/>
           </p:cNvSpPr>
@@ -2834,8 +2503,8 @@
         </p:nvSpPr>
         <p:spPr>
           <a:xfrm>
-            <a:off x="838200" y="1825625"/>
-            <a:ext cx="10515600" cy="4351338"/>
+            <a:off x="1114872" y="1825625"/>
+            <a:ext cx="13986570" cy="4351338"/>
           </a:xfrm>
           <a:prstGeom prst="rect">
             <a:avLst/>
@@ -2880,18 +2549,13 @@
               <a:rPr lang="en-US"/>
               <a:t>Fifth level</a:t>
             </a:r>
-          </a:p>
-        </p:txBody>
-      </p:sp>
-      <p:sp>
-        <p:nvSpPr>
-          <p:cNvPr id="4" name="Date Placeholder 3">
-            <a:extLst>
-              <a:ext uri="{FF2B5EF4-FFF2-40B4-BE49-F238E27FC236}">
-                <a16:creationId xmlns:a16="http://schemas.microsoft.com/office/drawing/2014/main" id="{8FC1329E-2118-7596-FE88-B38E1DE57B50}"/>
-              </a:ext>
-            </a:extLst>
-          </p:cNvPr>
+            <a:endParaRPr lang="en-US" dirty="0"/>
+          </a:p>
+        </p:txBody>
+      </p:sp>
+      <p:sp>
+        <p:nvSpPr>
+          <p:cNvPr id="4" name="Date Placeholder 3"/>
           <p:cNvSpPr>
             <a:spLocks noGrp="1"/>
           </p:cNvSpPr>
@@ -2901,8 +2565,8 @@
         </p:nvSpPr>
         <p:spPr>
           <a:xfrm>
-            <a:off x="838200" y="6356350"/>
-            <a:ext cx="2743200" cy="365125"/>
+            <a:off x="1114872" y="6356351"/>
+            <a:ext cx="3648670" cy="365125"/>
           </a:xfrm>
           <a:prstGeom prst="rect">
             <a:avLst/>
@@ -2924,7 +2588,7 @@
           <a:p>
             <a:fld id="{E83DCB1C-7482-A248-B459-A59749D0D03F}" type="datetimeFigureOut">
               <a:rPr lang="en-US" smtClean="0"/>
-              <a:t>3/12/25</a:t>
+              <a:t>3/13/25</a:t>
             </a:fld>
             <a:endParaRPr lang="en-US"/>
           </a:p>
@@ -2932,13 +2596,7 @@
       </p:sp>
       <p:sp>
         <p:nvSpPr>
-          <p:cNvPr id="5" name="Footer Placeholder 4">
-            <a:extLst>
-              <a:ext uri="{FF2B5EF4-FFF2-40B4-BE49-F238E27FC236}">
-                <a16:creationId xmlns:a16="http://schemas.microsoft.com/office/drawing/2014/main" id="{2F3A6F88-9BC1-A022-4C89-4B0CCB493E5C}"/>
-              </a:ext>
-            </a:extLst>
-          </p:cNvPr>
+          <p:cNvPr id="5" name="Footer Placeholder 4"/>
           <p:cNvSpPr>
             <a:spLocks noGrp="1"/>
           </p:cNvSpPr>
@@ -2948,8 +2606,8 @@
         </p:nvSpPr>
         <p:spPr>
           <a:xfrm>
-            <a:off x="4038600" y="6356350"/>
-            <a:ext cx="4114800" cy="365125"/>
+            <a:off x="5371654" y="6356351"/>
+            <a:ext cx="5473006" cy="365125"/>
           </a:xfrm>
           <a:prstGeom prst="rect">
             <a:avLst/>
@@ -2975,13 +2633,7 @@
       </p:sp>
       <p:sp>
         <p:nvSpPr>
-          <p:cNvPr id="6" name="Slide Number Placeholder 5">
-            <a:extLst>
-              <a:ext uri="{FF2B5EF4-FFF2-40B4-BE49-F238E27FC236}">
-                <a16:creationId xmlns:a16="http://schemas.microsoft.com/office/drawing/2014/main" id="{DC6A7C8C-45B2-7261-9C41-0DAE1FFAB619}"/>
-              </a:ext>
-            </a:extLst>
-          </p:cNvPr>
+          <p:cNvPr id="6" name="Slide Number Placeholder 5"/>
           <p:cNvSpPr>
             <a:spLocks noGrp="1"/>
           </p:cNvSpPr>
@@ -2991,8 +2643,8 @@
         </p:nvSpPr>
         <p:spPr>
           <a:xfrm>
-            <a:off x="8610600" y="6356350"/>
-            <a:ext cx="2743200" cy="365125"/>
+            <a:off x="11452771" y="6356351"/>
+            <a:ext cx="3648670" cy="365125"/>
           </a:xfrm>
           <a:prstGeom prst="rect">
             <a:avLst/>
@@ -3023,23 +2675,23 @@
     </p:spTree>
     <p:extLst>
       <p:ext uri="{BB962C8B-B14F-4D97-AF65-F5344CB8AC3E}">
-        <p14:creationId xmlns:p14="http://schemas.microsoft.com/office/powerpoint/2010/main" val="716842653"/>
+        <p14:creationId xmlns:p14="http://schemas.microsoft.com/office/powerpoint/2010/main" val="3570583945"/>
       </p:ext>
     </p:extLst>
   </p:cSld>
   <p:clrMap bg1="lt1" tx1="dk1" bg2="lt2" tx2="dk2" accent1="accent1" accent2="accent2" accent3="accent3" accent4="accent4" accent5="accent5" accent6="accent6" hlink="hlink" folHlink="folHlink"/>
   <p:sldLayoutIdLst>
-    <p:sldLayoutId id="2147483649" r:id="rId1"/>
-    <p:sldLayoutId id="2147483650" r:id="rId2"/>
-    <p:sldLayoutId id="2147483651" r:id="rId3"/>
-    <p:sldLayoutId id="2147483652" r:id="rId4"/>
-    <p:sldLayoutId id="2147483653" r:id="rId5"/>
-    <p:sldLayoutId id="2147483654" r:id="rId6"/>
-    <p:sldLayoutId id="2147483655" r:id="rId7"/>
-    <p:sldLayoutId id="2147483656" r:id="rId8"/>
-    <p:sldLayoutId id="2147483657" r:id="rId9"/>
-    <p:sldLayoutId id="2147483658" r:id="rId10"/>
-    <p:sldLayoutId id="2147483659" r:id="rId11"/>
+    <p:sldLayoutId id="2147483673" r:id="rId1"/>
+    <p:sldLayoutId id="2147483674" r:id="rId2"/>
+    <p:sldLayoutId id="2147483675" r:id="rId3"/>
+    <p:sldLayoutId id="2147483676" r:id="rId4"/>
+    <p:sldLayoutId id="2147483677" r:id="rId5"/>
+    <p:sldLayoutId id="2147483678" r:id="rId6"/>
+    <p:sldLayoutId id="2147483679" r:id="rId7"/>
+    <p:sldLayoutId id="2147483680" r:id="rId8"/>
+    <p:sldLayoutId id="2147483681" r:id="rId9"/>
+    <p:sldLayoutId id="2147483682" r:id="rId10"/>
+    <p:sldLayoutId id="2147483683" r:id="rId11"/>
   </p:sldLayoutIdLst>
   <p:txStyles>
     <p:titleStyle>
@@ -3363,7 +3015,7 @@
         </p:blipFill>
         <p:spPr>
           <a:xfrm>
-            <a:off x="2249621" y="1055235"/>
+            <a:off x="4261779" y="1055235"/>
             <a:ext cx="7692757" cy="4747530"/>
           </a:xfrm>
           <a:prstGeom prst="rect">
@@ -3385,7 +3037,7 @@
         </p:nvSpPr>
         <p:spPr>
           <a:xfrm>
-            <a:off x="3105902" y="1224833"/>
+            <a:off x="5118058" y="1224835"/>
             <a:ext cx="2545752" cy="584775"/>
           </a:xfrm>
           <a:prstGeom prst="rect">
@@ -3426,7 +3078,7 @@
         </p:nvSpPr>
         <p:spPr>
           <a:xfrm>
-            <a:off x="6959970" y="1224833"/>
+            <a:off x="8972126" y="1224835"/>
             <a:ext cx="2545752" cy="584775"/>
           </a:xfrm>
           <a:prstGeom prst="rect">
@@ -3512,7 +3164,7 @@
         </p:blipFill>
         <p:spPr bwMode="auto">
           <a:xfrm>
-            <a:off x="1912803" y="441002"/>
+            <a:off x="3924961" y="441004"/>
             <a:ext cx="8366393" cy="5975995"/>
           </a:xfrm>
           <a:prstGeom prst="rect">
@@ -3544,7 +3196,7 @@
         </p:nvSpPr>
         <p:spPr>
           <a:xfrm>
-            <a:off x="3657600" y="727115"/>
+            <a:off x="5669756" y="727117"/>
             <a:ext cx="5253208" cy="646331"/>
           </a:xfrm>
           <a:prstGeom prst="rect">
@@ -3630,7 +3282,7 @@
         </p:blipFill>
         <p:spPr bwMode="auto">
           <a:xfrm>
-            <a:off x="1918312" y="444937"/>
+            <a:off x="3930468" y="444937"/>
             <a:ext cx="8355376" cy="5968126"/>
           </a:xfrm>
           <a:prstGeom prst="rect">
@@ -3662,7 +3314,7 @@
         </p:nvSpPr>
         <p:spPr>
           <a:xfrm>
-            <a:off x="3657600" y="727115"/>
+            <a:off x="5669756" y="727117"/>
             <a:ext cx="5253208" cy="646331"/>
           </a:xfrm>
           <a:prstGeom prst="rect">
@@ -3748,7 +3400,7 @@
         </p:blipFill>
         <p:spPr bwMode="auto">
           <a:xfrm>
-            <a:off x="1866211" y="407722"/>
+            <a:off x="3878367" y="407722"/>
             <a:ext cx="8459578" cy="6042556"/>
           </a:xfrm>
           <a:prstGeom prst="rect">
@@ -3780,7 +3432,7 @@
         </p:nvSpPr>
         <p:spPr>
           <a:xfrm>
-            <a:off x="3657600" y="727115"/>
+            <a:off x="5669756" y="727117"/>
             <a:ext cx="5253208" cy="646331"/>
           </a:xfrm>
           <a:prstGeom prst="rect">
@@ -3866,7 +3518,7 @@
         </p:blipFill>
         <p:spPr bwMode="auto">
           <a:xfrm>
-            <a:off x="1786109" y="350507"/>
+            <a:off x="3798267" y="350507"/>
             <a:ext cx="8619781" cy="6156986"/>
           </a:xfrm>
           <a:prstGeom prst="rect">
@@ -3898,7 +3550,7 @@
         </p:nvSpPr>
         <p:spPr>
           <a:xfrm>
-            <a:off x="3469395" y="727114"/>
+            <a:off x="5481551" y="727114"/>
             <a:ext cx="5253208" cy="369332"/>
           </a:xfrm>
           <a:prstGeom prst="rect">
@@ -3984,7 +3636,7 @@
         </p:blipFill>
         <p:spPr bwMode="auto">
           <a:xfrm>
-            <a:off x="1906858" y="436756"/>
+            <a:off x="3919016" y="436756"/>
             <a:ext cx="8378283" cy="5984488"/>
           </a:xfrm>
           <a:prstGeom prst="rect">
@@ -4016,7 +3668,7 @@
         </p:nvSpPr>
         <p:spPr>
           <a:xfrm>
-            <a:off x="3888036" y="793214"/>
+            <a:off x="5900192" y="793214"/>
             <a:ext cx="4716138" cy="369332"/>
           </a:xfrm>
           <a:prstGeom prst="rect">
@@ -4102,7 +3754,7 @@
         </p:blipFill>
         <p:spPr bwMode="auto">
           <a:xfrm>
-            <a:off x="2067040" y="551171"/>
+            <a:off x="4079196" y="551173"/>
             <a:ext cx="8057920" cy="5755657"/>
           </a:xfrm>
           <a:prstGeom prst="rect">
@@ -4134,7 +3786,7 @@
         </p:nvSpPr>
         <p:spPr>
           <a:xfrm>
-            <a:off x="4009221" y="859316"/>
+            <a:off x="6021377" y="859316"/>
             <a:ext cx="4716138" cy="369332"/>
           </a:xfrm>
           <a:prstGeom prst="rect">
@@ -4220,7 +3872,7 @@
         </p:blipFill>
         <p:spPr bwMode="auto">
           <a:xfrm>
-            <a:off x="1830177" y="381983"/>
+            <a:off x="3842333" y="381985"/>
             <a:ext cx="8531646" cy="6094033"/>
           </a:xfrm>
           <a:prstGeom prst="rect">
@@ -4252,7 +3904,7 @@
         </p:nvSpPr>
         <p:spPr>
           <a:xfrm>
-            <a:off x="3998205" y="771181"/>
+            <a:off x="6010361" y="771181"/>
             <a:ext cx="4716138" cy="369332"/>
           </a:xfrm>
           <a:prstGeom prst="rect">
@@ -4338,7 +3990,7 @@
         </p:blipFill>
         <p:spPr bwMode="auto">
           <a:xfrm>
-            <a:off x="1841194" y="389853"/>
+            <a:off x="3853350" y="389853"/>
             <a:ext cx="8509612" cy="6078294"/>
           </a:xfrm>
           <a:prstGeom prst="rect">
@@ -4370,7 +4022,7 @@
         </p:nvSpPr>
         <p:spPr>
           <a:xfrm>
-            <a:off x="3998205" y="771181"/>
+            <a:off x="6010361" y="771181"/>
             <a:ext cx="4716138" cy="369332"/>
           </a:xfrm>
           <a:prstGeom prst="rect">
@@ -4456,7 +4108,7 @@
         </p:blipFill>
         <p:spPr bwMode="auto">
           <a:xfrm>
-            <a:off x="1824668" y="378049"/>
+            <a:off x="3836826" y="378049"/>
             <a:ext cx="8542663" cy="6101902"/>
           </a:xfrm>
           <a:prstGeom prst="rect">
@@ -4488,7 +4140,7 @@
         </p:nvSpPr>
         <p:spPr>
           <a:xfrm>
-            <a:off x="3998205" y="771181"/>
+            <a:off x="6010361" y="771181"/>
             <a:ext cx="4716138" cy="369332"/>
           </a:xfrm>
           <a:prstGeom prst="rect">
@@ -4574,7 +4226,7 @@
         </p:blipFill>
         <p:spPr bwMode="auto">
           <a:xfrm>
-            <a:off x="2061531" y="547237"/>
+            <a:off x="4073689" y="547237"/>
             <a:ext cx="8068937" cy="5763526"/>
           </a:xfrm>
           <a:prstGeom prst="rect">
@@ -4606,7 +4258,7 @@
         </p:nvSpPr>
         <p:spPr>
           <a:xfrm>
-            <a:off x="3998205" y="870333"/>
+            <a:off x="6010361" y="870333"/>
             <a:ext cx="4716138" cy="369332"/>
           </a:xfrm>
           <a:prstGeom prst="rect">
@@ -4685,7 +4337,7 @@
         </p:blipFill>
         <p:spPr>
           <a:xfrm>
-            <a:off x="2321555" y="1099628"/>
+            <a:off x="4333713" y="1099630"/>
             <a:ext cx="7548889" cy="4658743"/>
           </a:xfrm>
           <a:prstGeom prst="rect">
@@ -4707,7 +4359,7 @@
         </p:nvSpPr>
         <p:spPr>
           <a:xfrm>
-            <a:off x="3183020" y="1279917"/>
+            <a:off x="5195176" y="1279919"/>
             <a:ext cx="2545752" cy="584775"/>
           </a:xfrm>
           <a:prstGeom prst="rect">
@@ -4748,7 +4400,7 @@
         </p:nvSpPr>
         <p:spPr>
           <a:xfrm>
-            <a:off x="6915902" y="1279916"/>
+            <a:off x="8928058" y="1279918"/>
             <a:ext cx="2545752" cy="584775"/>
           </a:xfrm>
           <a:prstGeom prst="rect">
@@ -4834,7 +4486,7 @@
         </p:blipFill>
         <p:spPr bwMode="auto">
           <a:xfrm>
-            <a:off x="1857719" y="401657"/>
+            <a:off x="3869877" y="401657"/>
             <a:ext cx="8476561" cy="6054686"/>
           </a:xfrm>
           <a:prstGeom prst="rect">
@@ -4866,7 +4518,7 @@
         </p:nvSpPr>
         <p:spPr>
           <a:xfrm>
-            <a:off x="3998205" y="782198"/>
+            <a:off x="6010361" y="782198"/>
             <a:ext cx="4716138" cy="369332"/>
           </a:xfrm>
           <a:prstGeom prst="rect">
@@ -4952,7 +4604,7 @@
         </p:blipFill>
         <p:spPr bwMode="auto">
           <a:xfrm>
-            <a:off x="1945854" y="464610"/>
+            <a:off x="3958010" y="464610"/>
             <a:ext cx="8300292" cy="5928780"/>
           </a:xfrm>
           <a:prstGeom prst="rect">
@@ -4984,7 +4636,7 @@
         </p:nvSpPr>
         <p:spPr>
           <a:xfrm>
-            <a:off x="3998205" y="782198"/>
+            <a:off x="6010361" y="782198"/>
             <a:ext cx="4716138" cy="369332"/>
           </a:xfrm>
           <a:prstGeom prst="rect">
@@ -5063,7 +4715,7 @@
         </p:blipFill>
         <p:spPr>
           <a:xfrm>
-            <a:off x="2342742" y="1112703"/>
+            <a:off x="4354898" y="1112705"/>
             <a:ext cx="7506516" cy="4632593"/>
           </a:xfrm>
           <a:prstGeom prst="rect">
@@ -5085,7 +4737,7 @@
         </p:nvSpPr>
         <p:spPr>
           <a:xfrm>
-            <a:off x="3183020" y="1279917"/>
+            <a:off x="5195176" y="1279919"/>
             <a:ext cx="2545752" cy="584775"/>
           </a:xfrm>
           <a:prstGeom prst="rect">
@@ -5126,7 +4778,7 @@
         </p:nvSpPr>
         <p:spPr>
           <a:xfrm>
-            <a:off x="6937936" y="1279916"/>
+            <a:off x="8950092" y="1279918"/>
             <a:ext cx="2545752" cy="584775"/>
           </a:xfrm>
           <a:prstGeom prst="rect">
@@ -5212,8 +4864,8 @@
         </p:blipFill>
         <p:spPr bwMode="auto">
           <a:xfrm>
-            <a:off x="1978904" y="488217"/>
-            <a:ext cx="8234192" cy="5881566"/>
+            <a:off x="866262" y="1745157"/>
+            <a:ext cx="4714760" cy="3367686"/>
           </a:xfrm>
           <a:prstGeom prst="rect">
             <a:avLst/>
@@ -5244,8 +4896,8 @@
         </p:nvSpPr>
         <p:spPr>
           <a:xfrm>
-            <a:off x="3657600" y="727115"/>
-            <a:ext cx="5253208" cy="646331"/>
+            <a:off x="1981515" y="1745159"/>
+            <a:ext cx="2784719" cy="461665"/>
           </a:xfrm>
           <a:prstGeom prst="rect">
             <a:avLst/>
@@ -5262,11 +4914,187 @@
           <a:p>
             <a:pPr algn="ctr"/>
             <a:r>
-              <a:rPr lang="en-US" b="1" dirty="0">
+              <a:rPr lang="en-US" sz="1200" b="1" dirty="0">
                 <a:latin typeface="Arial" panose="020B0604020202020204" pitchFamily="34" charset="0"/>
                 <a:cs typeface="Arial" panose="020B0604020202020204" pitchFamily="34" charset="0"/>
               </a:rPr>
               <a:t>Residuals vs Fitted Plot of ARIMA First-Order Differenced Model</a:t>
+            </a:r>
+          </a:p>
+        </p:txBody>
+      </p:sp>
+      <p:pic>
+        <p:nvPicPr>
+          <p:cNvPr id="3" name="Picture 2">
+            <a:extLst>
+              <a:ext uri="{FF2B5EF4-FFF2-40B4-BE49-F238E27FC236}">
+                <a16:creationId xmlns:a16="http://schemas.microsoft.com/office/drawing/2014/main" id="{3EF051B6-B5C2-4651-ED96-7285E851E3A6}"/>
+              </a:ext>
+            </a:extLst>
+          </p:cNvPr>
+          <p:cNvPicPr>
+            <a:picLocks noChangeAspect="1" noChangeArrowheads="1"/>
+          </p:cNvPicPr>
+          <p:nvPr/>
+        </p:nvPicPr>
+        <p:blipFill>
+          <a:blip r:embed="rId3">
+            <a:extLst>
+              <a:ext uri="{28A0092B-C50C-407E-A947-70E740481C1C}">
+                <a14:useLocalDpi xmlns:a14="http://schemas.microsoft.com/office/drawing/2010/main" val="0"/>
+              </a:ext>
+            </a:extLst>
+          </a:blip>
+          <a:srcRect/>
+          <a:stretch>
+            <a:fillRect/>
+          </a:stretch>
+        </p:blipFill>
+        <p:spPr bwMode="auto">
+          <a:xfrm>
+            <a:off x="5494488" y="1745156"/>
+            <a:ext cx="4590676" cy="3279054"/>
+          </a:xfrm>
+          <a:prstGeom prst="rect">
+            <a:avLst/>
+          </a:prstGeom>
+          <a:noFill/>
+          <a:extLst>
+            <a:ext uri="{909E8E84-426E-40DD-AFC4-6F175D3DCCD1}">
+              <a14:hiddenFill xmlns:a14="http://schemas.microsoft.com/office/drawing/2010/main">
+                <a:solidFill>
+                  <a:srgbClr val="FFFFFF"/>
+                </a:solidFill>
+              </a14:hiddenFill>
+            </a:ext>
+          </a:extLst>
+        </p:spPr>
+      </p:pic>
+      <p:sp>
+        <p:nvSpPr>
+          <p:cNvPr id="4" name="TextBox 3">
+            <a:extLst>
+              <a:ext uri="{FF2B5EF4-FFF2-40B4-BE49-F238E27FC236}">
+                <a16:creationId xmlns:a16="http://schemas.microsoft.com/office/drawing/2014/main" id="{254C6099-F899-1EF3-0F86-96B66FB48F90}"/>
+              </a:ext>
+            </a:extLst>
+          </p:cNvPr>
+          <p:cNvSpPr txBox="1"/>
+          <p:nvPr/>
+        </p:nvSpPr>
+        <p:spPr>
+          <a:xfrm>
+            <a:off x="6223751" y="1749650"/>
+            <a:ext cx="3194892" cy="461665"/>
+          </a:xfrm>
+          <a:prstGeom prst="rect">
+            <a:avLst/>
+          </a:prstGeom>
+          <a:solidFill>
+            <a:schemeClr val="bg1"/>
+          </a:solidFill>
+        </p:spPr>
+        <p:txBody>
+          <a:bodyPr wrap="square" rtlCol="0">
+            <a:spAutoFit/>
+          </a:bodyPr>
+          <a:lstStyle/>
+          <a:p>
+            <a:pPr algn="ctr"/>
+            <a:r>
+              <a:rPr lang="en-US" sz="1200" b="1" dirty="0">
+                <a:latin typeface="Arial" panose="020B0604020202020204" pitchFamily="34" charset="0"/>
+                <a:cs typeface="Arial" panose="020B0604020202020204" pitchFamily="34" charset="0"/>
+              </a:rPr>
+              <a:t>Residuals vs Fitted Plot of ARIMA Box-Cox Differenced Model</a:t>
+            </a:r>
+          </a:p>
+        </p:txBody>
+      </p:sp>
+      <p:pic>
+        <p:nvPicPr>
+          <p:cNvPr id="5" name="Picture 2">
+            <a:extLst>
+              <a:ext uri="{FF2B5EF4-FFF2-40B4-BE49-F238E27FC236}">
+                <a16:creationId xmlns:a16="http://schemas.microsoft.com/office/drawing/2014/main" id="{C5AF0C70-822E-733E-FACF-C8E8218DF908}"/>
+              </a:ext>
+            </a:extLst>
+          </p:cNvPr>
+          <p:cNvPicPr>
+            <a:picLocks noChangeAspect="1" noChangeArrowheads="1"/>
+          </p:cNvPicPr>
+          <p:nvPr/>
+        </p:nvPicPr>
+        <p:blipFill>
+          <a:blip r:embed="rId4">
+            <a:extLst>
+              <a:ext uri="{28A0092B-C50C-407E-A947-70E740481C1C}">
+                <a14:useLocalDpi xmlns:a14="http://schemas.microsoft.com/office/drawing/2010/main" val="0"/>
+              </a:ext>
+            </a:extLst>
+          </a:blip>
+          <a:srcRect/>
+          <a:stretch>
+            <a:fillRect/>
+          </a:stretch>
+        </p:blipFill>
+        <p:spPr bwMode="auto">
+          <a:xfrm>
+            <a:off x="9998629" y="1789473"/>
+            <a:ext cx="4590676" cy="3279054"/>
+          </a:xfrm>
+          <a:prstGeom prst="rect">
+            <a:avLst/>
+          </a:prstGeom>
+          <a:noFill/>
+          <a:extLst>
+            <a:ext uri="{909E8E84-426E-40DD-AFC4-6F175D3DCCD1}">
+              <a14:hiddenFill xmlns:a14="http://schemas.microsoft.com/office/drawing/2010/main">
+                <a:solidFill>
+                  <a:srgbClr val="FFFFFF"/>
+                </a:solidFill>
+              </a14:hiddenFill>
+            </a:ext>
+          </a:extLst>
+        </p:spPr>
+      </p:pic>
+      <p:sp>
+        <p:nvSpPr>
+          <p:cNvPr id="6" name="TextBox 5">
+            <a:extLst>
+              <a:ext uri="{FF2B5EF4-FFF2-40B4-BE49-F238E27FC236}">
+                <a16:creationId xmlns:a16="http://schemas.microsoft.com/office/drawing/2014/main" id="{84397CC1-DE55-F8B4-1B87-9BF0B56D3A7D}"/>
+              </a:ext>
+            </a:extLst>
+          </p:cNvPr>
+          <p:cNvSpPr txBox="1"/>
+          <p:nvPr/>
+        </p:nvSpPr>
+        <p:spPr>
+          <a:xfrm>
+            <a:off x="10929133" y="1745157"/>
+            <a:ext cx="3020380" cy="461665"/>
+          </a:xfrm>
+          <a:prstGeom prst="rect">
+            <a:avLst/>
+          </a:prstGeom>
+          <a:solidFill>
+            <a:schemeClr val="bg1"/>
+          </a:solidFill>
+        </p:spPr>
+        <p:txBody>
+          <a:bodyPr wrap="square" rtlCol="0">
+            <a:spAutoFit/>
+          </a:bodyPr>
+          <a:lstStyle/>
+          <a:p>
+            <a:pPr algn="ctr"/>
+            <a:r>
+              <a:rPr lang="en-US" sz="1200" b="1" dirty="0">
+                <a:latin typeface="Arial" panose="020B0604020202020204" pitchFamily="34" charset="0"/>
+                <a:cs typeface="Arial" panose="020B0604020202020204" pitchFamily="34" charset="0"/>
+              </a:rPr>
+              <a:t>Residuals vs Fitted Plot of ARIMA Seasonal Differenced Model</a:t>
             </a:r>
           </a:p>
         </p:txBody>
@@ -5330,8 +5158,8 @@
         </p:blipFill>
         <p:spPr bwMode="auto">
           <a:xfrm>
-            <a:off x="1977546" y="487247"/>
-            <a:ext cx="8236907" cy="5883505"/>
+            <a:off x="852895" y="1709730"/>
+            <a:ext cx="4988689" cy="3563349"/>
           </a:xfrm>
           <a:prstGeom prst="rect">
             <a:avLst/>
@@ -5362,8 +5190,8 @@
         </p:nvSpPr>
         <p:spPr>
           <a:xfrm>
-            <a:off x="3701666" y="727116"/>
-            <a:ext cx="5266063" cy="646331"/>
+            <a:off x="1856715" y="1709730"/>
+            <a:ext cx="3189395" cy="461665"/>
           </a:xfrm>
           <a:prstGeom prst="rect">
             <a:avLst/>
@@ -5380,11 +5208,187 @@
           <a:p>
             <a:pPr algn="ctr"/>
             <a:r>
-              <a:rPr lang="en-US" b="1" dirty="0">
+              <a:rPr lang="en-US" sz="1200" b="1" dirty="0">
                 <a:latin typeface="Arial" panose="020B0604020202020204" pitchFamily="34" charset="0"/>
                 <a:cs typeface="Arial" panose="020B0604020202020204" pitchFamily="34" charset="0"/>
               </a:rPr>
               <a:t>Residuals vs Fitted Plot of SARIMA First-Order Differenced Model</a:t>
+            </a:r>
+          </a:p>
+        </p:txBody>
+      </p:sp>
+      <p:pic>
+        <p:nvPicPr>
+          <p:cNvPr id="3" name="Picture 2">
+            <a:extLst>
+              <a:ext uri="{FF2B5EF4-FFF2-40B4-BE49-F238E27FC236}">
+                <a16:creationId xmlns:a16="http://schemas.microsoft.com/office/drawing/2014/main" id="{90BE9E13-7D1E-D5C4-BA2A-7F7396738260}"/>
+              </a:ext>
+            </a:extLst>
+          </p:cNvPr>
+          <p:cNvPicPr>
+            <a:picLocks noChangeAspect="1" noChangeArrowheads="1"/>
+          </p:cNvPicPr>
+          <p:nvPr/>
+        </p:nvPicPr>
+        <p:blipFill>
+          <a:blip r:embed="rId3">
+            <a:extLst>
+              <a:ext uri="{28A0092B-C50C-407E-A947-70E740481C1C}">
+                <a14:useLocalDpi xmlns:a14="http://schemas.microsoft.com/office/drawing/2010/main" val="0"/>
+              </a:ext>
+            </a:extLst>
+          </a:blip>
+          <a:srcRect/>
+          <a:stretch>
+            <a:fillRect/>
+          </a:stretch>
+        </p:blipFill>
+        <p:spPr bwMode="auto">
+          <a:xfrm>
+            <a:off x="5681828" y="1709730"/>
+            <a:ext cx="4988689" cy="3563349"/>
+          </a:xfrm>
+          <a:prstGeom prst="rect">
+            <a:avLst/>
+          </a:prstGeom>
+          <a:noFill/>
+          <a:extLst>
+            <a:ext uri="{909E8E84-426E-40DD-AFC4-6F175D3DCCD1}">
+              <a14:hiddenFill xmlns:a14="http://schemas.microsoft.com/office/drawing/2010/main">
+                <a:solidFill>
+                  <a:srgbClr val="FFFFFF"/>
+                </a:solidFill>
+              </a14:hiddenFill>
+            </a:ext>
+          </a:extLst>
+        </p:spPr>
+      </p:pic>
+      <p:sp>
+        <p:nvSpPr>
+          <p:cNvPr id="4" name="TextBox 3">
+            <a:extLst>
+              <a:ext uri="{FF2B5EF4-FFF2-40B4-BE49-F238E27FC236}">
+                <a16:creationId xmlns:a16="http://schemas.microsoft.com/office/drawing/2014/main" id="{6FA80158-2E60-ABE8-D707-2D999F59A858}"/>
+              </a:ext>
+            </a:extLst>
+          </p:cNvPr>
+          <p:cNvSpPr txBox="1"/>
+          <p:nvPr/>
+        </p:nvSpPr>
+        <p:spPr>
+          <a:xfrm>
+            <a:off x="6685647" y="1709730"/>
+            <a:ext cx="3308226" cy="461665"/>
+          </a:xfrm>
+          <a:prstGeom prst="rect">
+            <a:avLst/>
+          </a:prstGeom>
+          <a:solidFill>
+            <a:schemeClr val="bg1"/>
+          </a:solidFill>
+        </p:spPr>
+        <p:txBody>
+          <a:bodyPr wrap="square" rtlCol="0">
+            <a:spAutoFit/>
+          </a:bodyPr>
+          <a:lstStyle/>
+          <a:p>
+            <a:pPr algn="ctr"/>
+            <a:r>
+              <a:rPr lang="en-US" sz="1200" b="1" dirty="0">
+                <a:latin typeface="Arial" panose="020B0604020202020204" pitchFamily="34" charset="0"/>
+                <a:cs typeface="Arial" panose="020B0604020202020204" pitchFamily="34" charset="0"/>
+              </a:rPr>
+              <a:t>Residuals vs Fitted Plot of SARIMA Box-Cox Differenced Model</a:t>
+            </a:r>
+          </a:p>
+        </p:txBody>
+      </p:sp>
+      <p:pic>
+        <p:nvPicPr>
+          <p:cNvPr id="5" name="Picture 2">
+            <a:extLst>
+              <a:ext uri="{FF2B5EF4-FFF2-40B4-BE49-F238E27FC236}">
+                <a16:creationId xmlns:a16="http://schemas.microsoft.com/office/drawing/2014/main" id="{93A3F20C-DA49-0492-05E6-219880FEDD01}"/>
+              </a:ext>
+            </a:extLst>
+          </p:cNvPr>
+          <p:cNvPicPr>
+            <a:picLocks noChangeAspect="1" noChangeArrowheads="1"/>
+          </p:cNvPicPr>
+          <p:nvPr/>
+        </p:nvPicPr>
+        <p:blipFill>
+          <a:blip r:embed="rId4">
+            <a:extLst>
+              <a:ext uri="{28A0092B-C50C-407E-A947-70E740481C1C}">
+                <a14:useLocalDpi xmlns:a14="http://schemas.microsoft.com/office/drawing/2010/main" val="0"/>
+              </a:ext>
+            </a:extLst>
+          </a:blip>
+          <a:srcRect/>
+          <a:stretch>
+            <a:fillRect/>
+          </a:stretch>
+        </p:blipFill>
+        <p:spPr bwMode="auto">
+          <a:xfrm>
+            <a:off x="10495787" y="1709730"/>
+            <a:ext cx="4988688" cy="3563348"/>
+          </a:xfrm>
+          <a:prstGeom prst="rect">
+            <a:avLst/>
+          </a:prstGeom>
+          <a:noFill/>
+          <a:extLst>
+            <a:ext uri="{909E8E84-426E-40DD-AFC4-6F175D3DCCD1}">
+              <a14:hiddenFill xmlns:a14="http://schemas.microsoft.com/office/drawing/2010/main">
+                <a:solidFill>
+                  <a:srgbClr val="FFFFFF"/>
+                </a:solidFill>
+              </a14:hiddenFill>
+            </a:ext>
+          </a:extLst>
+        </p:spPr>
+      </p:pic>
+      <p:sp>
+        <p:nvSpPr>
+          <p:cNvPr id="6" name="TextBox 5">
+            <a:extLst>
+              <a:ext uri="{FF2B5EF4-FFF2-40B4-BE49-F238E27FC236}">
+                <a16:creationId xmlns:a16="http://schemas.microsoft.com/office/drawing/2014/main" id="{1FE91A5D-BEB5-62FC-8D58-B4B4B21D2759}"/>
+              </a:ext>
+            </a:extLst>
+          </p:cNvPr>
+          <p:cNvSpPr txBox="1"/>
+          <p:nvPr/>
+        </p:nvSpPr>
+        <p:spPr>
+          <a:xfrm>
+            <a:off x="11514581" y="1709730"/>
+            <a:ext cx="3133497" cy="461665"/>
+          </a:xfrm>
+          <a:prstGeom prst="rect">
+            <a:avLst/>
+          </a:prstGeom>
+          <a:solidFill>
+            <a:schemeClr val="bg1"/>
+          </a:solidFill>
+        </p:spPr>
+        <p:txBody>
+          <a:bodyPr wrap="square" rtlCol="0">
+            <a:spAutoFit/>
+          </a:bodyPr>
+          <a:lstStyle/>
+          <a:p>
+            <a:pPr algn="ctr"/>
+            <a:r>
+              <a:rPr lang="en-US" sz="1200" b="1" dirty="0">
+                <a:latin typeface="Arial" panose="020B0604020202020204" pitchFamily="34" charset="0"/>
+                <a:cs typeface="Arial" panose="020B0604020202020204" pitchFamily="34" charset="0"/>
+              </a:rPr>
+              <a:t>Residuals vs Fitted Plot of SARIMA Seasonal Differenced Model</a:t>
             </a:r>
           </a:p>
         </p:txBody>
@@ -5448,8 +5452,8 @@
         </p:blipFill>
         <p:spPr bwMode="auto">
           <a:xfrm>
-            <a:off x="1978905" y="488218"/>
-            <a:ext cx="8234190" cy="5881564"/>
+            <a:off x="731837" y="1597827"/>
+            <a:ext cx="5127286" cy="3662347"/>
           </a:xfrm>
           <a:prstGeom prst="rect">
             <a:avLst/>
@@ -5480,8 +5484,8 @@
         </p:nvSpPr>
         <p:spPr>
           <a:xfrm>
-            <a:off x="3701666" y="727116"/>
-            <a:ext cx="5266063" cy="646331"/>
+            <a:off x="1884568" y="1633071"/>
+            <a:ext cx="3065958" cy="461665"/>
           </a:xfrm>
           <a:prstGeom prst="rect">
             <a:avLst/>
@@ -5498,11 +5502,187 @@
           <a:p>
             <a:pPr algn="ctr"/>
             <a:r>
-              <a:rPr lang="en-US" b="1" dirty="0">
+              <a:rPr lang="en-US" sz="1200" b="1" dirty="0">
                 <a:latin typeface="Arial" panose="020B0604020202020204" pitchFamily="34" charset="0"/>
                 <a:cs typeface="Arial" panose="020B0604020202020204" pitchFamily="34" charset="0"/>
               </a:rPr>
               <a:t>Residuals vs Fitted Plot of ARFIMA First-Order Differenced Model</a:t>
+            </a:r>
+          </a:p>
+        </p:txBody>
+      </p:sp>
+      <p:pic>
+        <p:nvPicPr>
+          <p:cNvPr id="5" name="Picture 2">
+            <a:extLst>
+              <a:ext uri="{FF2B5EF4-FFF2-40B4-BE49-F238E27FC236}">
+                <a16:creationId xmlns:a16="http://schemas.microsoft.com/office/drawing/2014/main" id="{16EE7962-3FA2-BE83-18BE-43A8F8586166}"/>
+              </a:ext>
+            </a:extLst>
+          </p:cNvPr>
+          <p:cNvPicPr>
+            <a:picLocks noChangeAspect="1" noChangeArrowheads="1"/>
+          </p:cNvPicPr>
+          <p:nvPr/>
+        </p:nvPicPr>
+        <p:blipFill>
+          <a:blip r:embed="rId3">
+            <a:extLst>
+              <a:ext uri="{28A0092B-C50C-407E-A947-70E740481C1C}">
+                <a14:useLocalDpi xmlns:a14="http://schemas.microsoft.com/office/drawing/2010/main" val="0"/>
+              </a:ext>
+            </a:extLst>
+          </a:blip>
+          <a:srcRect/>
+          <a:stretch>
+            <a:fillRect/>
+          </a:stretch>
+        </p:blipFill>
+        <p:spPr bwMode="auto">
+          <a:xfrm>
+            <a:off x="5608729" y="1633070"/>
+            <a:ext cx="5127285" cy="3662346"/>
+          </a:xfrm>
+          <a:prstGeom prst="rect">
+            <a:avLst/>
+          </a:prstGeom>
+          <a:noFill/>
+          <a:extLst>
+            <a:ext uri="{909E8E84-426E-40DD-AFC4-6F175D3DCCD1}">
+              <a14:hiddenFill xmlns:a14="http://schemas.microsoft.com/office/drawing/2010/main">
+                <a:solidFill>
+                  <a:srgbClr val="FFFFFF"/>
+                </a:solidFill>
+              </a14:hiddenFill>
+            </a:ext>
+          </a:extLst>
+        </p:spPr>
+      </p:pic>
+      <p:sp>
+        <p:nvSpPr>
+          <p:cNvPr id="6" name="TextBox 5">
+            <a:extLst>
+              <a:ext uri="{FF2B5EF4-FFF2-40B4-BE49-F238E27FC236}">
+                <a16:creationId xmlns:a16="http://schemas.microsoft.com/office/drawing/2014/main" id="{E11E1F04-DEDE-A8B8-2004-470947A4E8F1}"/>
+              </a:ext>
+            </a:extLst>
+          </p:cNvPr>
+          <p:cNvSpPr txBox="1"/>
+          <p:nvPr/>
+        </p:nvSpPr>
+        <p:spPr>
+          <a:xfrm>
+            <a:off x="6593667" y="1634111"/>
+            <a:ext cx="3456215" cy="461665"/>
+          </a:xfrm>
+          <a:prstGeom prst="rect">
+            <a:avLst/>
+          </a:prstGeom>
+          <a:solidFill>
+            <a:schemeClr val="bg1"/>
+          </a:solidFill>
+        </p:spPr>
+        <p:txBody>
+          <a:bodyPr wrap="square" rtlCol="0">
+            <a:spAutoFit/>
+          </a:bodyPr>
+          <a:lstStyle/>
+          <a:p>
+            <a:pPr algn="ctr"/>
+            <a:r>
+              <a:rPr lang="en-US" sz="1200" b="1" dirty="0">
+                <a:latin typeface="Arial" panose="020B0604020202020204" pitchFamily="34" charset="0"/>
+                <a:cs typeface="Arial" panose="020B0604020202020204" pitchFamily="34" charset="0"/>
+              </a:rPr>
+              <a:t>Residuals vs Fitted Plot of SARIMA Seasonal Differenced Model</a:t>
+            </a:r>
+          </a:p>
+        </p:txBody>
+      </p:sp>
+      <p:pic>
+        <p:nvPicPr>
+          <p:cNvPr id="7" name="Picture 2">
+            <a:extLst>
+              <a:ext uri="{FF2B5EF4-FFF2-40B4-BE49-F238E27FC236}">
+                <a16:creationId xmlns:a16="http://schemas.microsoft.com/office/drawing/2014/main" id="{B8243183-B8D1-B21B-47B1-799869818064}"/>
+              </a:ext>
+            </a:extLst>
+          </p:cNvPr>
+          <p:cNvPicPr>
+            <a:picLocks noChangeAspect="1" noChangeArrowheads="1"/>
+          </p:cNvPicPr>
+          <p:nvPr/>
+        </p:nvPicPr>
+        <p:blipFill>
+          <a:blip r:embed="rId4">
+            <a:extLst>
+              <a:ext uri="{28A0092B-C50C-407E-A947-70E740481C1C}">
+                <a14:useLocalDpi xmlns:a14="http://schemas.microsoft.com/office/drawing/2010/main" val="0"/>
+              </a:ext>
+            </a:extLst>
+          </a:blip>
+          <a:srcRect/>
+          <a:stretch>
+            <a:fillRect/>
+          </a:stretch>
+        </p:blipFill>
+        <p:spPr bwMode="auto">
+          <a:xfrm>
+            <a:off x="10625619" y="1597827"/>
+            <a:ext cx="5127285" cy="3662347"/>
+          </a:xfrm>
+          <a:prstGeom prst="rect">
+            <a:avLst/>
+          </a:prstGeom>
+          <a:noFill/>
+          <a:extLst>
+            <a:ext uri="{909E8E84-426E-40DD-AFC4-6F175D3DCCD1}">
+              <a14:hiddenFill xmlns:a14="http://schemas.microsoft.com/office/drawing/2010/main">
+                <a:solidFill>
+                  <a:srgbClr val="FFFFFF"/>
+                </a:solidFill>
+              </a14:hiddenFill>
+            </a:ext>
+          </a:extLst>
+        </p:spPr>
+      </p:pic>
+      <p:sp>
+        <p:nvSpPr>
+          <p:cNvPr id="8" name="TextBox 7">
+            <a:extLst>
+              <a:ext uri="{FF2B5EF4-FFF2-40B4-BE49-F238E27FC236}">
+                <a16:creationId xmlns:a16="http://schemas.microsoft.com/office/drawing/2014/main" id="{D537E11F-F2CB-7375-9AA8-850A279A7AFB}"/>
+              </a:ext>
+            </a:extLst>
+          </p:cNvPr>
+          <p:cNvSpPr txBox="1"/>
+          <p:nvPr/>
+        </p:nvSpPr>
+        <p:spPr>
+          <a:xfrm>
+            <a:off x="11636744" y="1633070"/>
+            <a:ext cx="3374656" cy="461665"/>
+          </a:xfrm>
+          <a:prstGeom prst="rect">
+            <a:avLst/>
+          </a:prstGeom>
+          <a:solidFill>
+            <a:schemeClr val="bg1"/>
+          </a:solidFill>
+        </p:spPr>
+        <p:txBody>
+          <a:bodyPr wrap="square" rtlCol="0">
+            <a:spAutoFit/>
+          </a:bodyPr>
+          <a:lstStyle/>
+          <a:p>
+            <a:pPr algn="ctr"/>
+            <a:r>
+              <a:rPr lang="en-US" sz="1200" b="1" dirty="0">
+                <a:latin typeface="Arial" panose="020B0604020202020204" pitchFamily="34" charset="0"/>
+                <a:cs typeface="Arial" panose="020B0604020202020204" pitchFamily="34" charset="0"/>
+              </a:rPr>
+              <a:t>Residuals vs Fitted Plot of ARFIMA Seasonal Differenced Model</a:t>
             </a:r>
           </a:p>
         </p:txBody>
@@ -5566,7 +5746,7 @@
         </p:blipFill>
         <p:spPr bwMode="auto">
           <a:xfrm>
-            <a:off x="1775093" y="342638"/>
+            <a:off x="3787249" y="342638"/>
             <a:ext cx="8641814" cy="6172724"/>
           </a:xfrm>
           <a:prstGeom prst="rect">
@@ -5598,7 +5778,7 @@
         </p:nvSpPr>
         <p:spPr>
           <a:xfrm>
-            <a:off x="3580481" y="616948"/>
+            <a:off x="5592639" y="616950"/>
             <a:ext cx="5266063" cy="646331"/>
           </a:xfrm>
           <a:prstGeom prst="rect">
@@ -5684,7 +5864,7 @@
         </p:blipFill>
         <p:spPr bwMode="auto">
           <a:xfrm>
-            <a:off x="1916453" y="443609"/>
+            <a:off x="3928611" y="443611"/>
             <a:ext cx="8359093" cy="5970781"/>
           </a:xfrm>
           <a:prstGeom prst="rect">
@@ -5716,7 +5896,7 @@
         </p:nvSpPr>
         <p:spPr>
           <a:xfrm>
-            <a:off x="3635566" y="672033"/>
+            <a:off x="5647724" y="672035"/>
             <a:ext cx="5266063" cy="646331"/>
           </a:xfrm>
           <a:prstGeom prst="rect">
@@ -5802,7 +5982,7 @@
         </p:blipFill>
         <p:spPr bwMode="auto">
           <a:xfrm>
-            <a:off x="2033913" y="527509"/>
+            <a:off x="4046071" y="527511"/>
             <a:ext cx="8124173" cy="5802981"/>
           </a:xfrm>
           <a:prstGeom prst="rect">
@@ -5834,7 +6014,7 @@
         </p:nvSpPr>
         <p:spPr>
           <a:xfrm>
-            <a:off x="3701666" y="727116"/>
+            <a:off x="5713824" y="727118"/>
             <a:ext cx="5266063" cy="646331"/>
           </a:xfrm>
           <a:prstGeom prst="rect">
@@ -5877,7 +6057,7 @@
 <file path=ppt/theme/theme1.xml><?xml version="1.0" encoding="utf-8"?>
 <a:theme xmlns:a="http://schemas.openxmlformats.org/drawingml/2006/main" name="Office Theme">
   <a:themeElements>
-    <a:clrScheme name="Office">
+    <a:clrScheme name="Office Theme">
       <a:dk1>
         <a:sysClr val="windowText" lastClr="000000"/>
       </a:dk1>
@@ -5915,7 +6095,7 @@
         <a:srgbClr val="96607D"/>
       </a:folHlink>
     </a:clrScheme>
-    <a:fontScheme name="Office">
+    <a:fontScheme name="Office Theme">
       <a:majorFont>
         <a:latin typeface="Aptos Display" panose="02110004020202020204"/>
         <a:ea typeface=""/>
@@ -6021,7 +6201,7 @@
         <a:font script="Tfng" typeface="Ebrima"/>
       </a:minorFont>
     </a:fontScheme>
-    <a:fmtScheme name="Office">
+    <a:fmtScheme name="Office Theme">
       <a:fillStyleLst>
         <a:solidFill>
           <a:schemeClr val="phClr"/>

--- a/ARIMA_HJ/Plots/arima plots.pptx
+++ b/ARIMA_HJ/Plots/arima plots.pptx
@@ -6,26 +6,9 @@
   </p:sldMasterIdLst>
   <p:sldIdLst>
     <p:sldId id="257" r:id="rId2"/>
-    <p:sldId id="258" r:id="rId3"/>
-    <p:sldId id="259" r:id="rId4"/>
-    <p:sldId id="260" r:id="rId5"/>
-    <p:sldId id="261" r:id="rId6"/>
-    <p:sldId id="262" r:id="rId7"/>
-    <p:sldId id="263" r:id="rId8"/>
-    <p:sldId id="264" r:id="rId9"/>
-    <p:sldId id="265" r:id="rId10"/>
-    <p:sldId id="266" r:id="rId11"/>
-    <p:sldId id="267" r:id="rId12"/>
-    <p:sldId id="268" r:id="rId13"/>
-    <p:sldId id="269" r:id="rId14"/>
-    <p:sldId id="270" r:id="rId15"/>
-    <p:sldId id="271" r:id="rId16"/>
-    <p:sldId id="272" r:id="rId17"/>
-    <p:sldId id="273" r:id="rId18"/>
-    <p:sldId id="274" r:id="rId19"/>
-    <p:sldId id="275" r:id="rId20"/>
-    <p:sldId id="276" r:id="rId21"/>
-    <p:sldId id="277" r:id="rId22"/>
+    <p:sldId id="260" r:id="rId3"/>
+    <p:sldId id="278" r:id="rId4"/>
+    <p:sldId id="279" r:id="rId5"/>
   </p:sldIdLst>
   <p:sldSz cx="16216313" cy="6858000"/>
   <p:notesSz cx="6858000" cy="9144000"/>
@@ -263,7 +246,7 @@
           <a:p>
             <a:fld id="{E83DCB1C-7482-A248-B459-A59749D0D03F}" type="datetimeFigureOut">
               <a:rPr lang="en-US" smtClean="0"/>
-              <a:t>3/13/25</a:t>
+              <a:t>3/14/25</a:t>
             </a:fld>
             <a:endParaRPr lang="en-US"/>
           </a:p>
@@ -433,7 +416,7 @@
           <a:p>
             <a:fld id="{E83DCB1C-7482-A248-B459-A59749D0D03F}" type="datetimeFigureOut">
               <a:rPr lang="en-US" smtClean="0"/>
-              <a:t>3/13/25</a:t>
+              <a:t>3/14/25</a:t>
             </a:fld>
             <a:endParaRPr lang="en-US"/>
           </a:p>
@@ -613,7 +596,7 @@
           <a:p>
             <a:fld id="{E83DCB1C-7482-A248-B459-A59749D0D03F}" type="datetimeFigureOut">
               <a:rPr lang="en-US" smtClean="0"/>
-              <a:t>3/13/25</a:t>
+              <a:t>3/14/25</a:t>
             </a:fld>
             <a:endParaRPr lang="en-US"/>
           </a:p>
@@ -783,7 +766,7 @@
           <a:p>
             <a:fld id="{E83DCB1C-7482-A248-B459-A59749D0D03F}" type="datetimeFigureOut">
               <a:rPr lang="en-US" smtClean="0"/>
-              <a:t>3/13/25</a:t>
+              <a:t>3/14/25</a:t>
             </a:fld>
             <a:endParaRPr lang="en-US"/>
           </a:p>
@@ -1029,7 +1012,7 @@
           <a:p>
             <a:fld id="{E83DCB1C-7482-A248-B459-A59749D0D03F}" type="datetimeFigureOut">
               <a:rPr lang="en-US" smtClean="0"/>
-              <a:t>3/13/25</a:t>
+              <a:t>3/14/25</a:t>
             </a:fld>
             <a:endParaRPr lang="en-US"/>
           </a:p>
@@ -1261,7 +1244,7 @@
           <a:p>
             <a:fld id="{E83DCB1C-7482-A248-B459-A59749D0D03F}" type="datetimeFigureOut">
               <a:rPr lang="en-US" smtClean="0"/>
-              <a:t>3/13/25</a:t>
+              <a:t>3/14/25</a:t>
             </a:fld>
             <a:endParaRPr lang="en-US"/>
           </a:p>
@@ -1628,7 +1611,7 @@
           <a:p>
             <a:fld id="{E83DCB1C-7482-A248-B459-A59749D0D03F}" type="datetimeFigureOut">
               <a:rPr lang="en-US" smtClean="0"/>
-              <a:t>3/13/25</a:t>
+              <a:t>3/14/25</a:t>
             </a:fld>
             <a:endParaRPr lang="en-US"/>
           </a:p>
@@ -1746,7 +1729,7 @@
           <a:p>
             <a:fld id="{E83DCB1C-7482-A248-B459-A59749D0D03F}" type="datetimeFigureOut">
               <a:rPr lang="en-US" smtClean="0"/>
-              <a:t>3/13/25</a:t>
+              <a:t>3/14/25</a:t>
             </a:fld>
             <a:endParaRPr lang="en-US"/>
           </a:p>
@@ -1841,7 +1824,7 @@
           <a:p>
             <a:fld id="{E83DCB1C-7482-A248-B459-A59749D0D03F}" type="datetimeFigureOut">
               <a:rPr lang="en-US" smtClean="0"/>
-              <a:t>3/13/25</a:t>
+              <a:t>3/14/25</a:t>
             </a:fld>
             <a:endParaRPr lang="en-US"/>
           </a:p>
@@ -2118,7 +2101,7 @@
           <a:p>
             <a:fld id="{E83DCB1C-7482-A248-B459-A59749D0D03F}" type="datetimeFigureOut">
               <a:rPr lang="en-US" smtClean="0"/>
-              <a:t>3/13/25</a:t>
+              <a:t>3/14/25</a:t>
             </a:fld>
             <a:endParaRPr lang="en-US"/>
           </a:p>
@@ -2375,7 +2358,7 @@
           <a:p>
             <a:fld id="{E83DCB1C-7482-A248-B459-A59749D0D03F}" type="datetimeFigureOut">
               <a:rPr lang="en-US" smtClean="0"/>
-              <a:t>3/13/25</a:t>
+              <a:t>3/14/25</a:t>
             </a:fld>
             <a:endParaRPr lang="en-US"/>
           </a:p>
@@ -2588,7 +2571,7 @@
           <a:p>
             <a:fld id="{E83DCB1C-7482-A248-B459-A59749D0D03F}" type="datetimeFigureOut">
               <a:rPr lang="en-US" smtClean="0"/>
-              <a:t>3/13/25</a:t>
+              <a:t>3/14/25</a:t>
             </a:fld>
             <a:endParaRPr lang="en-US"/>
           </a:p>
@@ -2995,10 +2978,10 @@
       </p:grpSpPr>
       <p:pic>
         <p:nvPicPr>
-          <p:cNvPr id="3" name="Picture 2" descr="A comparison of a diagram&#10;&#10;AI-generated content may be incorrect.">
+          <p:cNvPr id="4" name="Picture 3" descr="A graph of a number of objects&#10;&#10;AI-generated content may be incorrect.">
             <a:extLst>
               <a:ext uri="{FF2B5EF4-FFF2-40B4-BE49-F238E27FC236}">
-                <a16:creationId xmlns:a16="http://schemas.microsoft.com/office/drawing/2014/main" id="{FB911D55-CC42-5FAA-ED1F-F50005423F25}"/>
+                <a16:creationId xmlns:a16="http://schemas.microsoft.com/office/drawing/2014/main" id="{D8B042E6-7E3D-20FB-9ABC-ADB3211B7434}"/>
               </a:ext>
             </a:extLst>
           </p:cNvPr>
@@ -3015,1280 +2998,76 @@
         </p:blipFill>
         <p:spPr>
           <a:xfrm>
-            <a:off x="4261779" y="1055235"/>
-            <a:ext cx="7692757" cy="4747530"/>
+            <a:off x="10408016" y="1873824"/>
+            <a:ext cx="5590381" cy="3450064"/>
           </a:xfrm>
           <a:prstGeom prst="rect">
             <a:avLst/>
           </a:prstGeom>
         </p:spPr>
       </p:pic>
-      <p:sp>
-        <p:nvSpPr>
-          <p:cNvPr id="9" name="TextBox 8">
+      <p:pic>
+        <p:nvPicPr>
+          <p:cNvPr id="6" name="Picture 5" descr="A graph of a number of objects&#10;&#10;AI-generated content may be incorrect.">
             <a:extLst>
               <a:ext uri="{FF2B5EF4-FFF2-40B4-BE49-F238E27FC236}">
-                <a16:creationId xmlns:a16="http://schemas.microsoft.com/office/drawing/2014/main" id="{9528FA72-EE8C-2410-F9EB-7C44719E1138}"/>
+                <a16:creationId xmlns:a16="http://schemas.microsoft.com/office/drawing/2014/main" id="{A8E0A1FF-86F1-9A32-EEC0-6A837A27C832}"/>
               </a:ext>
             </a:extLst>
           </p:cNvPr>
-          <p:cNvSpPr txBox="1"/>
+          <p:cNvPicPr>
+            <a:picLocks noChangeAspect="1"/>
+          </p:cNvPicPr>
           <p:nvPr/>
-        </p:nvSpPr>
+        </p:nvPicPr>
+        <p:blipFill>
+          <a:blip r:embed="rId3"/>
+          <a:srcRect r="2999"/>
+          <a:stretch/>
+        </p:blipFill>
         <p:spPr>
           <a:xfrm>
-            <a:off x="5118058" y="1224835"/>
-            <a:ext cx="2545752" cy="584775"/>
+            <a:off x="5181601" y="1936281"/>
+            <a:ext cx="5226415" cy="3325150"/>
           </a:xfrm>
           <a:prstGeom prst="rect">
             <a:avLst/>
           </a:prstGeom>
-          <a:solidFill>
-            <a:schemeClr val="bg1"/>
-          </a:solidFill>
         </p:spPr>
-        <p:txBody>
-          <a:bodyPr wrap="square" rtlCol="0">
-            <a:spAutoFit/>
-          </a:bodyPr>
-          <a:lstStyle/>
-          <a:p>
-            <a:pPr algn="ctr"/>
-            <a:r>
-              <a:rPr lang="en-US" sz="1600" b="1" dirty="0">
-                <a:latin typeface="Arial" panose="020B0604020202020204" pitchFamily="34" charset="0"/>
-                <a:cs typeface="Arial" panose="020B0604020202020204" pitchFamily="34" charset="0"/>
-              </a:rPr>
-              <a:t>ACF Plot of Box-Cox Differenced Data</a:t>
-            </a:r>
-          </a:p>
-        </p:txBody>
-      </p:sp>
-      <p:sp>
-        <p:nvSpPr>
-          <p:cNvPr id="10" name="TextBox 9">
+      </p:pic>
+      <p:pic>
+        <p:nvPicPr>
+          <p:cNvPr id="8" name="Picture 7" descr="A graph of a number of lines&#10;&#10;AI-generated content may be incorrect.">
             <a:extLst>
               <a:ext uri="{FF2B5EF4-FFF2-40B4-BE49-F238E27FC236}">
-                <a16:creationId xmlns:a16="http://schemas.microsoft.com/office/drawing/2014/main" id="{D88777EA-2592-260B-7AB9-A45AE0AC71CF}"/>
+                <a16:creationId xmlns:a16="http://schemas.microsoft.com/office/drawing/2014/main" id="{702382B6-46CA-0B94-3BBA-FC37CED5439B}"/>
               </a:ext>
             </a:extLst>
           </p:cNvPr>
-          <p:cNvSpPr txBox="1"/>
+          <p:cNvPicPr>
+            <a:picLocks noChangeAspect="1"/>
+          </p:cNvPicPr>
           <p:nvPr/>
-        </p:nvSpPr>
+        </p:nvPicPr>
+        <p:blipFill>
+          <a:blip r:embed="rId4"/>
+          <a:srcRect r="3098"/>
+          <a:stretch/>
+        </p:blipFill>
         <p:spPr>
           <a:xfrm>
-            <a:off x="8972126" y="1224835"/>
-            <a:ext cx="2545752" cy="584775"/>
+            <a:off x="227809" y="2021384"/>
+            <a:ext cx="4953792" cy="3154943"/>
           </a:xfrm>
           <a:prstGeom prst="rect">
             <a:avLst/>
           </a:prstGeom>
-          <a:solidFill>
-            <a:schemeClr val="bg1"/>
-          </a:solidFill>
         </p:spPr>
-        <p:txBody>
-          <a:bodyPr wrap="square" rtlCol="0">
-            <a:spAutoFit/>
-          </a:bodyPr>
-          <a:lstStyle/>
-          <a:p>
-            <a:pPr algn="ctr"/>
-            <a:r>
-              <a:rPr lang="en-US" sz="1600" b="1" dirty="0">
-                <a:latin typeface="Arial" panose="020B0604020202020204" pitchFamily="34" charset="0"/>
-                <a:cs typeface="Arial" panose="020B0604020202020204" pitchFamily="34" charset="0"/>
-              </a:rPr>
-              <a:t>PACF Plot of Box-Cox Differenced Data</a:t>
-            </a:r>
-          </a:p>
-        </p:txBody>
-      </p:sp>
+      </p:pic>
     </p:spTree>
     <p:extLst>
       <p:ext uri="{BB962C8B-B14F-4D97-AF65-F5344CB8AC3E}">
         <p14:creationId xmlns:p14="http://schemas.microsoft.com/office/powerpoint/2010/main" val="2229634145"/>
-      </p:ext>
-    </p:extLst>
-  </p:cSld>
-  <p:clrMapOvr>
-    <a:masterClrMapping/>
-  </p:clrMapOvr>
-</p:sld>
-</file>
-
-<file path=ppt/slides/slide10.xml><?xml version="1.0" encoding="utf-8"?>
-<p:sld xmlns:a="http://schemas.openxmlformats.org/drawingml/2006/main" xmlns:r="http://schemas.openxmlformats.org/officeDocument/2006/relationships" xmlns:p="http://schemas.openxmlformats.org/presentationml/2006/main">
-  <p:cSld>
-    <p:spTree>
-      <p:nvGrpSpPr>
-        <p:cNvPr id="1" name=""/>
-        <p:cNvGrpSpPr/>
-        <p:nvPr/>
-      </p:nvGrpSpPr>
-      <p:grpSpPr>
-        <a:xfrm>
-          <a:off x="0" y="0"/>
-          <a:ext cx="0" cy="0"/>
-          <a:chOff x="0" y="0"/>
-          <a:chExt cx="0" cy="0"/>
-        </a:xfrm>
-      </p:grpSpPr>
-      <p:pic>
-        <p:nvPicPr>
-          <p:cNvPr id="7170" name="Picture 2">
-            <a:extLst>
-              <a:ext uri="{FF2B5EF4-FFF2-40B4-BE49-F238E27FC236}">
-                <a16:creationId xmlns:a16="http://schemas.microsoft.com/office/drawing/2014/main" id="{0A6A9693-94A4-AA4F-E9E9-F85DAE9FE156}"/>
-              </a:ext>
-            </a:extLst>
-          </p:cNvPr>
-          <p:cNvPicPr>
-            <a:picLocks noChangeAspect="1" noChangeArrowheads="1"/>
-          </p:cNvPicPr>
-          <p:nvPr/>
-        </p:nvPicPr>
-        <p:blipFill>
-          <a:blip r:embed="rId2">
-            <a:extLst>
-              <a:ext uri="{28A0092B-C50C-407E-A947-70E740481C1C}">
-                <a14:useLocalDpi xmlns:a14="http://schemas.microsoft.com/office/drawing/2010/main" val="0"/>
-              </a:ext>
-            </a:extLst>
-          </a:blip>
-          <a:srcRect/>
-          <a:stretch>
-            <a:fillRect/>
-          </a:stretch>
-        </p:blipFill>
-        <p:spPr bwMode="auto">
-          <a:xfrm>
-            <a:off x="3924961" y="441004"/>
-            <a:ext cx="8366393" cy="5975995"/>
-          </a:xfrm>
-          <a:prstGeom prst="rect">
-            <a:avLst/>
-          </a:prstGeom>
-          <a:noFill/>
-          <a:extLst>
-            <a:ext uri="{909E8E84-426E-40DD-AFC4-6F175D3DCCD1}">
-              <a14:hiddenFill xmlns:a14="http://schemas.microsoft.com/office/drawing/2010/main">
-                <a:solidFill>
-                  <a:srgbClr val="FFFFFF"/>
-                </a:solidFill>
-              </a14:hiddenFill>
-            </a:ext>
-          </a:extLst>
-        </p:spPr>
-      </p:pic>
-      <p:sp>
-        <p:nvSpPr>
-          <p:cNvPr id="2" name="TextBox 1">
-            <a:extLst>
-              <a:ext uri="{FF2B5EF4-FFF2-40B4-BE49-F238E27FC236}">
-                <a16:creationId xmlns:a16="http://schemas.microsoft.com/office/drawing/2014/main" id="{8F2B8E18-3E3F-6C80-AF75-533B8C25C1CA}"/>
-              </a:ext>
-            </a:extLst>
-          </p:cNvPr>
-          <p:cNvSpPr txBox="1"/>
-          <p:nvPr/>
-        </p:nvSpPr>
-        <p:spPr>
-          <a:xfrm>
-            <a:off x="5669756" y="727117"/>
-            <a:ext cx="5253208" cy="646331"/>
-          </a:xfrm>
-          <a:prstGeom prst="rect">
-            <a:avLst/>
-          </a:prstGeom>
-          <a:solidFill>
-            <a:schemeClr val="bg1"/>
-          </a:solidFill>
-        </p:spPr>
-        <p:txBody>
-          <a:bodyPr wrap="square" rtlCol="0">
-            <a:spAutoFit/>
-          </a:bodyPr>
-          <a:lstStyle/>
-          <a:p>
-            <a:pPr algn="ctr"/>
-            <a:r>
-              <a:rPr lang="en-US" b="1" dirty="0">
-                <a:latin typeface="Arial" panose="020B0604020202020204" pitchFamily="34" charset="0"/>
-                <a:cs typeface="Arial" panose="020B0604020202020204" pitchFamily="34" charset="0"/>
-              </a:rPr>
-              <a:t>Residuals vs Fitted Plot of ARIMA Seasonal Differenced Model</a:t>
-            </a:r>
-          </a:p>
-        </p:txBody>
-      </p:sp>
-    </p:spTree>
-    <p:extLst>
-      <p:ext uri="{BB962C8B-B14F-4D97-AF65-F5344CB8AC3E}">
-        <p14:creationId xmlns:p14="http://schemas.microsoft.com/office/powerpoint/2010/main" val="3774256270"/>
-      </p:ext>
-    </p:extLst>
-  </p:cSld>
-  <p:clrMapOvr>
-    <a:masterClrMapping/>
-  </p:clrMapOvr>
-</p:sld>
-</file>
-
-<file path=ppt/slides/slide11.xml><?xml version="1.0" encoding="utf-8"?>
-<p:sld xmlns:a="http://schemas.openxmlformats.org/drawingml/2006/main" xmlns:r="http://schemas.openxmlformats.org/officeDocument/2006/relationships" xmlns:p="http://schemas.openxmlformats.org/presentationml/2006/main">
-  <p:cSld>
-    <p:spTree>
-      <p:nvGrpSpPr>
-        <p:cNvPr id="1" name=""/>
-        <p:cNvGrpSpPr/>
-        <p:nvPr/>
-      </p:nvGrpSpPr>
-      <p:grpSpPr>
-        <a:xfrm>
-          <a:off x="0" y="0"/>
-          <a:ext cx="0" cy="0"/>
-          <a:chOff x="0" y="0"/>
-          <a:chExt cx="0" cy="0"/>
-        </a:xfrm>
-      </p:grpSpPr>
-      <p:pic>
-        <p:nvPicPr>
-          <p:cNvPr id="8194" name="Picture 2">
-            <a:extLst>
-              <a:ext uri="{FF2B5EF4-FFF2-40B4-BE49-F238E27FC236}">
-                <a16:creationId xmlns:a16="http://schemas.microsoft.com/office/drawing/2014/main" id="{5D04B678-2B9A-E26D-9AA0-C7DF12039F38}"/>
-              </a:ext>
-            </a:extLst>
-          </p:cNvPr>
-          <p:cNvPicPr>
-            <a:picLocks noChangeAspect="1" noChangeArrowheads="1"/>
-          </p:cNvPicPr>
-          <p:nvPr/>
-        </p:nvPicPr>
-        <p:blipFill>
-          <a:blip r:embed="rId2">
-            <a:extLst>
-              <a:ext uri="{28A0092B-C50C-407E-A947-70E740481C1C}">
-                <a14:useLocalDpi xmlns:a14="http://schemas.microsoft.com/office/drawing/2010/main" val="0"/>
-              </a:ext>
-            </a:extLst>
-          </a:blip>
-          <a:srcRect/>
-          <a:stretch>
-            <a:fillRect/>
-          </a:stretch>
-        </p:blipFill>
-        <p:spPr bwMode="auto">
-          <a:xfrm>
-            <a:off x="3930468" y="444937"/>
-            <a:ext cx="8355376" cy="5968126"/>
-          </a:xfrm>
-          <a:prstGeom prst="rect">
-            <a:avLst/>
-          </a:prstGeom>
-          <a:noFill/>
-          <a:extLst>
-            <a:ext uri="{909E8E84-426E-40DD-AFC4-6F175D3DCCD1}">
-              <a14:hiddenFill xmlns:a14="http://schemas.microsoft.com/office/drawing/2010/main">
-                <a:solidFill>
-                  <a:srgbClr val="FFFFFF"/>
-                </a:solidFill>
-              </a14:hiddenFill>
-            </a:ext>
-          </a:extLst>
-        </p:spPr>
-      </p:pic>
-      <p:sp>
-        <p:nvSpPr>
-          <p:cNvPr id="2" name="TextBox 1">
-            <a:extLst>
-              <a:ext uri="{FF2B5EF4-FFF2-40B4-BE49-F238E27FC236}">
-                <a16:creationId xmlns:a16="http://schemas.microsoft.com/office/drawing/2014/main" id="{38D9B8E1-20B2-EB4C-C744-DED24513FEE4}"/>
-              </a:ext>
-            </a:extLst>
-          </p:cNvPr>
-          <p:cNvSpPr txBox="1"/>
-          <p:nvPr/>
-        </p:nvSpPr>
-        <p:spPr>
-          <a:xfrm>
-            <a:off x="5669756" y="727117"/>
-            <a:ext cx="5253208" cy="646331"/>
-          </a:xfrm>
-          <a:prstGeom prst="rect">
-            <a:avLst/>
-          </a:prstGeom>
-          <a:solidFill>
-            <a:schemeClr val="bg1"/>
-          </a:solidFill>
-        </p:spPr>
-        <p:txBody>
-          <a:bodyPr wrap="square" rtlCol="0">
-            <a:spAutoFit/>
-          </a:bodyPr>
-          <a:lstStyle/>
-          <a:p>
-            <a:pPr algn="ctr"/>
-            <a:r>
-              <a:rPr lang="en-US" b="1" dirty="0">
-                <a:latin typeface="Arial" panose="020B0604020202020204" pitchFamily="34" charset="0"/>
-                <a:cs typeface="Arial" panose="020B0604020202020204" pitchFamily="34" charset="0"/>
-              </a:rPr>
-              <a:t>Residuals vs Fitted Plot of SARIMA Seasonal Differenced Model</a:t>
-            </a:r>
-          </a:p>
-        </p:txBody>
-      </p:sp>
-    </p:spTree>
-    <p:extLst>
-      <p:ext uri="{BB962C8B-B14F-4D97-AF65-F5344CB8AC3E}">
-        <p14:creationId xmlns:p14="http://schemas.microsoft.com/office/powerpoint/2010/main" val="2271613725"/>
-      </p:ext>
-    </p:extLst>
-  </p:cSld>
-  <p:clrMapOvr>
-    <a:masterClrMapping/>
-  </p:clrMapOvr>
-</p:sld>
-</file>
-
-<file path=ppt/slides/slide12.xml><?xml version="1.0" encoding="utf-8"?>
-<p:sld xmlns:a="http://schemas.openxmlformats.org/drawingml/2006/main" xmlns:r="http://schemas.openxmlformats.org/officeDocument/2006/relationships" xmlns:p="http://schemas.openxmlformats.org/presentationml/2006/main">
-  <p:cSld>
-    <p:spTree>
-      <p:nvGrpSpPr>
-        <p:cNvPr id="1" name=""/>
-        <p:cNvGrpSpPr/>
-        <p:nvPr/>
-      </p:nvGrpSpPr>
-      <p:grpSpPr>
-        <a:xfrm>
-          <a:off x="0" y="0"/>
-          <a:ext cx="0" cy="0"/>
-          <a:chOff x="0" y="0"/>
-          <a:chExt cx="0" cy="0"/>
-        </a:xfrm>
-      </p:grpSpPr>
-      <p:pic>
-        <p:nvPicPr>
-          <p:cNvPr id="9218" name="Picture 2">
-            <a:extLst>
-              <a:ext uri="{FF2B5EF4-FFF2-40B4-BE49-F238E27FC236}">
-                <a16:creationId xmlns:a16="http://schemas.microsoft.com/office/drawing/2014/main" id="{DE6DCF57-BBA3-A850-570A-ACC79D967E07}"/>
-              </a:ext>
-            </a:extLst>
-          </p:cNvPr>
-          <p:cNvPicPr>
-            <a:picLocks noChangeAspect="1" noChangeArrowheads="1"/>
-          </p:cNvPicPr>
-          <p:nvPr/>
-        </p:nvPicPr>
-        <p:blipFill>
-          <a:blip r:embed="rId2">
-            <a:extLst>
-              <a:ext uri="{28A0092B-C50C-407E-A947-70E740481C1C}">
-                <a14:useLocalDpi xmlns:a14="http://schemas.microsoft.com/office/drawing/2010/main" val="0"/>
-              </a:ext>
-            </a:extLst>
-          </a:blip>
-          <a:srcRect/>
-          <a:stretch>
-            <a:fillRect/>
-          </a:stretch>
-        </p:blipFill>
-        <p:spPr bwMode="auto">
-          <a:xfrm>
-            <a:off x="3878367" y="407722"/>
-            <a:ext cx="8459578" cy="6042556"/>
-          </a:xfrm>
-          <a:prstGeom prst="rect">
-            <a:avLst/>
-          </a:prstGeom>
-          <a:noFill/>
-          <a:extLst>
-            <a:ext uri="{909E8E84-426E-40DD-AFC4-6F175D3DCCD1}">
-              <a14:hiddenFill xmlns:a14="http://schemas.microsoft.com/office/drawing/2010/main">
-                <a:solidFill>
-                  <a:srgbClr val="FFFFFF"/>
-                </a:solidFill>
-              </a14:hiddenFill>
-            </a:ext>
-          </a:extLst>
-        </p:spPr>
-      </p:pic>
-      <p:sp>
-        <p:nvSpPr>
-          <p:cNvPr id="2" name="TextBox 1">
-            <a:extLst>
-              <a:ext uri="{FF2B5EF4-FFF2-40B4-BE49-F238E27FC236}">
-                <a16:creationId xmlns:a16="http://schemas.microsoft.com/office/drawing/2014/main" id="{DE430AD4-27CC-810B-2649-6759E39477A5}"/>
-              </a:ext>
-            </a:extLst>
-          </p:cNvPr>
-          <p:cNvSpPr txBox="1"/>
-          <p:nvPr/>
-        </p:nvSpPr>
-        <p:spPr>
-          <a:xfrm>
-            <a:off x="5669756" y="727117"/>
-            <a:ext cx="5253208" cy="646331"/>
-          </a:xfrm>
-          <a:prstGeom prst="rect">
-            <a:avLst/>
-          </a:prstGeom>
-          <a:solidFill>
-            <a:schemeClr val="bg1"/>
-          </a:solidFill>
-        </p:spPr>
-        <p:txBody>
-          <a:bodyPr wrap="square" rtlCol="0">
-            <a:spAutoFit/>
-          </a:bodyPr>
-          <a:lstStyle/>
-          <a:p>
-            <a:pPr algn="ctr"/>
-            <a:r>
-              <a:rPr lang="en-US" b="1" dirty="0">
-                <a:latin typeface="Arial" panose="020B0604020202020204" pitchFamily="34" charset="0"/>
-                <a:cs typeface="Arial" panose="020B0604020202020204" pitchFamily="34" charset="0"/>
-              </a:rPr>
-              <a:t>Residuals vs Fitted Plot of ARFIMA Seasonal Differenced Model</a:t>
-            </a:r>
-          </a:p>
-        </p:txBody>
-      </p:sp>
-    </p:spTree>
-    <p:extLst>
-      <p:ext uri="{BB962C8B-B14F-4D97-AF65-F5344CB8AC3E}">
-        <p14:creationId xmlns:p14="http://schemas.microsoft.com/office/powerpoint/2010/main" val="3256497455"/>
-      </p:ext>
-    </p:extLst>
-  </p:cSld>
-  <p:clrMapOvr>
-    <a:masterClrMapping/>
-  </p:clrMapOvr>
-</p:sld>
-</file>
-
-<file path=ppt/slides/slide13.xml><?xml version="1.0" encoding="utf-8"?>
-<p:sld xmlns:a="http://schemas.openxmlformats.org/drawingml/2006/main" xmlns:r="http://schemas.openxmlformats.org/officeDocument/2006/relationships" xmlns:p="http://schemas.openxmlformats.org/presentationml/2006/main">
-  <p:cSld>
-    <p:spTree>
-      <p:nvGrpSpPr>
-        <p:cNvPr id="1" name=""/>
-        <p:cNvGrpSpPr/>
-        <p:nvPr/>
-      </p:nvGrpSpPr>
-      <p:grpSpPr>
-        <a:xfrm>
-          <a:off x="0" y="0"/>
-          <a:ext cx="0" cy="0"/>
-          <a:chOff x="0" y="0"/>
-          <a:chExt cx="0" cy="0"/>
-        </a:xfrm>
-      </p:grpSpPr>
-      <p:pic>
-        <p:nvPicPr>
-          <p:cNvPr id="10242" name="Picture 2">
-            <a:extLst>
-              <a:ext uri="{FF2B5EF4-FFF2-40B4-BE49-F238E27FC236}">
-                <a16:creationId xmlns:a16="http://schemas.microsoft.com/office/drawing/2014/main" id="{221870AD-8730-BE71-9DFB-B656C39E89BA}"/>
-              </a:ext>
-            </a:extLst>
-          </p:cNvPr>
-          <p:cNvPicPr>
-            <a:picLocks noChangeAspect="1" noChangeArrowheads="1"/>
-          </p:cNvPicPr>
-          <p:nvPr/>
-        </p:nvPicPr>
-        <p:blipFill>
-          <a:blip r:embed="rId2">
-            <a:extLst>
-              <a:ext uri="{28A0092B-C50C-407E-A947-70E740481C1C}">
-                <a14:useLocalDpi xmlns:a14="http://schemas.microsoft.com/office/drawing/2010/main" val="0"/>
-              </a:ext>
-            </a:extLst>
-          </a:blip>
-          <a:srcRect/>
-          <a:stretch>
-            <a:fillRect/>
-          </a:stretch>
-        </p:blipFill>
-        <p:spPr bwMode="auto">
-          <a:xfrm>
-            <a:off x="3798267" y="350507"/>
-            <a:ext cx="8619781" cy="6156986"/>
-          </a:xfrm>
-          <a:prstGeom prst="rect">
-            <a:avLst/>
-          </a:prstGeom>
-          <a:noFill/>
-          <a:extLst>
-            <a:ext uri="{909E8E84-426E-40DD-AFC4-6F175D3DCCD1}">
-              <a14:hiddenFill xmlns:a14="http://schemas.microsoft.com/office/drawing/2010/main">
-                <a:solidFill>
-                  <a:srgbClr val="FFFFFF"/>
-                </a:solidFill>
-              </a14:hiddenFill>
-            </a:ext>
-          </a:extLst>
-        </p:spPr>
-      </p:pic>
-      <p:sp>
-        <p:nvSpPr>
-          <p:cNvPr id="2" name="TextBox 1">
-            <a:extLst>
-              <a:ext uri="{FF2B5EF4-FFF2-40B4-BE49-F238E27FC236}">
-                <a16:creationId xmlns:a16="http://schemas.microsoft.com/office/drawing/2014/main" id="{65304E5F-24B6-BCB8-6C67-832688BEBB28}"/>
-              </a:ext>
-            </a:extLst>
-          </p:cNvPr>
-          <p:cNvSpPr txBox="1"/>
-          <p:nvPr/>
-        </p:nvSpPr>
-        <p:spPr>
-          <a:xfrm>
-            <a:off x="5481551" y="727114"/>
-            <a:ext cx="5253208" cy="369332"/>
-          </a:xfrm>
-          <a:prstGeom prst="rect">
-            <a:avLst/>
-          </a:prstGeom>
-          <a:solidFill>
-            <a:schemeClr val="bg1"/>
-          </a:solidFill>
-        </p:spPr>
-        <p:txBody>
-          <a:bodyPr wrap="square" rtlCol="0">
-            <a:spAutoFit/>
-          </a:bodyPr>
-          <a:lstStyle/>
-          <a:p>
-            <a:pPr algn="ctr"/>
-            <a:r>
-              <a:rPr lang="en-US" b="1" dirty="0">
-                <a:latin typeface="Arial" panose="020B0604020202020204" pitchFamily="34" charset="0"/>
-                <a:cs typeface="Arial" panose="020B0604020202020204" pitchFamily="34" charset="0"/>
-              </a:rPr>
-              <a:t>ARIMA First-Order Difference Forecast</a:t>
-            </a:r>
-          </a:p>
-        </p:txBody>
-      </p:sp>
-    </p:spTree>
-    <p:extLst>
-      <p:ext uri="{BB962C8B-B14F-4D97-AF65-F5344CB8AC3E}">
-        <p14:creationId xmlns:p14="http://schemas.microsoft.com/office/powerpoint/2010/main" val="596999719"/>
-      </p:ext>
-    </p:extLst>
-  </p:cSld>
-  <p:clrMapOvr>
-    <a:masterClrMapping/>
-  </p:clrMapOvr>
-</p:sld>
-</file>
-
-<file path=ppt/slides/slide14.xml><?xml version="1.0" encoding="utf-8"?>
-<p:sld xmlns:a="http://schemas.openxmlformats.org/drawingml/2006/main" xmlns:r="http://schemas.openxmlformats.org/officeDocument/2006/relationships" xmlns:p="http://schemas.openxmlformats.org/presentationml/2006/main">
-  <p:cSld>
-    <p:spTree>
-      <p:nvGrpSpPr>
-        <p:cNvPr id="1" name=""/>
-        <p:cNvGrpSpPr/>
-        <p:nvPr/>
-      </p:nvGrpSpPr>
-      <p:grpSpPr>
-        <a:xfrm>
-          <a:off x="0" y="0"/>
-          <a:ext cx="0" cy="0"/>
-          <a:chOff x="0" y="0"/>
-          <a:chExt cx="0" cy="0"/>
-        </a:xfrm>
-      </p:grpSpPr>
-      <p:pic>
-        <p:nvPicPr>
-          <p:cNvPr id="11266" name="Picture 2">
-            <a:extLst>
-              <a:ext uri="{FF2B5EF4-FFF2-40B4-BE49-F238E27FC236}">
-                <a16:creationId xmlns:a16="http://schemas.microsoft.com/office/drawing/2014/main" id="{685B505E-CE05-F800-FA10-9E5087E131A7}"/>
-              </a:ext>
-            </a:extLst>
-          </p:cNvPr>
-          <p:cNvPicPr>
-            <a:picLocks noChangeAspect="1" noChangeArrowheads="1"/>
-          </p:cNvPicPr>
-          <p:nvPr/>
-        </p:nvPicPr>
-        <p:blipFill>
-          <a:blip r:embed="rId2">
-            <a:extLst>
-              <a:ext uri="{28A0092B-C50C-407E-A947-70E740481C1C}">
-                <a14:useLocalDpi xmlns:a14="http://schemas.microsoft.com/office/drawing/2010/main" val="0"/>
-              </a:ext>
-            </a:extLst>
-          </a:blip>
-          <a:srcRect/>
-          <a:stretch>
-            <a:fillRect/>
-          </a:stretch>
-        </p:blipFill>
-        <p:spPr bwMode="auto">
-          <a:xfrm>
-            <a:off x="3919016" y="436756"/>
-            <a:ext cx="8378283" cy="5984488"/>
-          </a:xfrm>
-          <a:prstGeom prst="rect">
-            <a:avLst/>
-          </a:prstGeom>
-          <a:noFill/>
-          <a:extLst>
-            <a:ext uri="{909E8E84-426E-40DD-AFC4-6F175D3DCCD1}">
-              <a14:hiddenFill xmlns:a14="http://schemas.microsoft.com/office/drawing/2010/main">
-                <a:solidFill>
-                  <a:srgbClr val="FFFFFF"/>
-                </a:solidFill>
-              </a14:hiddenFill>
-            </a:ext>
-          </a:extLst>
-        </p:spPr>
-      </p:pic>
-      <p:sp>
-        <p:nvSpPr>
-          <p:cNvPr id="2" name="TextBox 1">
-            <a:extLst>
-              <a:ext uri="{FF2B5EF4-FFF2-40B4-BE49-F238E27FC236}">
-                <a16:creationId xmlns:a16="http://schemas.microsoft.com/office/drawing/2014/main" id="{E6D8B704-6CB1-E7C5-B709-60D84FDC81BE}"/>
-              </a:ext>
-            </a:extLst>
-          </p:cNvPr>
-          <p:cNvSpPr txBox="1"/>
-          <p:nvPr/>
-        </p:nvSpPr>
-        <p:spPr>
-          <a:xfrm>
-            <a:off x="5900192" y="793214"/>
-            <a:ext cx="4716138" cy="369332"/>
-          </a:xfrm>
-          <a:prstGeom prst="rect">
-            <a:avLst/>
-          </a:prstGeom>
-          <a:solidFill>
-            <a:schemeClr val="bg1"/>
-          </a:solidFill>
-        </p:spPr>
-        <p:txBody>
-          <a:bodyPr wrap="square" rtlCol="0">
-            <a:spAutoFit/>
-          </a:bodyPr>
-          <a:lstStyle/>
-          <a:p>
-            <a:pPr algn="ctr"/>
-            <a:r>
-              <a:rPr lang="en-US" b="1" dirty="0">
-                <a:latin typeface="Arial" panose="020B0604020202020204" pitchFamily="34" charset="0"/>
-                <a:cs typeface="Arial" panose="020B0604020202020204" pitchFamily="34" charset="0"/>
-              </a:rPr>
-              <a:t>SARIMA First-Order Difference Forecast</a:t>
-            </a:r>
-          </a:p>
-        </p:txBody>
-      </p:sp>
-    </p:spTree>
-    <p:extLst>
-      <p:ext uri="{BB962C8B-B14F-4D97-AF65-F5344CB8AC3E}">
-        <p14:creationId xmlns:p14="http://schemas.microsoft.com/office/powerpoint/2010/main" val="4137266350"/>
-      </p:ext>
-    </p:extLst>
-  </p:cSld>
-  <p:clrMapOvr>
-    <a:masterClrMapping/>
-  </p:clrMapOvr>
-</p:sld>
-</file>
-
-<file path=ppt/slides/slide15.xml><?xml version="1.0" encoding="utf-8"?>
-<p:sld xmlns:a="http://schemas.openxmlformats.org/drawingml/2006/main" xmlns:r="http://schemas.openxmlformats.org/officeDocument/2006/relationships" xmlns:p="http://schemas.openxmlformats.org/presentationml/2006/main">
-  <p:cSld>
-    <p:spTree>
-      <p:nvGrpSpPr>
-        <p:cNvPr id="1" name=""/>
-        <p:cNvGrpSpPr/>
-        <p:nvPr/>
-      </p:nvGrpSpPr>
-      <p:grpSpPr>
-        <a:xfrm>
-          <a:off x="0" y="0"/>
-          <a:ext cx="0" cy="0"/>
-          <a:chOff x="0" y="0"/>
-          <a:chExt cx="0" cy="0"/>
-        </a:xfrm>
-      </p:grpSpPr>
-      <p:pic>
-        <p:nvPicPr>
-          <p:cNvPr id="12290" name="Picture 2">
-            <a:extLst>
-              <a:ext uri="{FF2B5EF4-FFF2-40B4-BE49-F238E27FC236}">
-                <a16:creationId xmlns:a16="http://schemas.microsoft.com/office/drawing/2014/main" id="{DF68EDEA-B97D-ADD5-631A-381D48718D14}"/>
-              </a:ext>
-            </a:extLst>
-          </p:cNvPr>
-          <p:cNvPicPr>
-            <a:picLocks noChangeAspect="1" noChangeArrowheads="1"/>
-          </p:cNvPicPr>
-          <p:nvPr/>
-        </p:nvPicPr>
-        <p:blipFill>
-          <a:blip r:embed="rId2">
-            <a:extLst>
-              <a:ext uri="{28A0092B-C50C-407E-A947-70E740481C1C}">
-                <a14:useLocalDpi xmlns:a14="http://schemas.microsoft.com/office/drawing/2010/main" val="0"/>
-              </a:ext>
-            </a:extLst>
-          </a:blip>
-          <a:srcRect/>
-          <a:stretch>
-            <a:fillRect/>
-          </a:stretch>
-        </p:blipFill>
-        <p:spPr bwMode="auto">
-          <a:xfrm>
-            <a:off x="4079196" y="551173"/>
-            <a:ext cx="8057920" cy="5755657"/>
-          </a:xfrm>
-          <a:prstGeom prst="rect">
-            <a:avLst/>
-          </a:prstGeom>
-          <a:noFill/>
-          <a:extLst>
-            <a:ext uri="{909E8E84-426E-40DD-AFC4-6F175D3DCCD1}">
-              <a14:hiddenFill xmlns:a14="http://schemas.microsoft.com/office/drawing/2010/main">
-                <a:solidFill>
-                  <a:srgbClr val="FFFFFF"/>
-                </a:solidFill>
-              </a14:hiddenFill>
-            </a:ext>
-          </a:extLst>
-        </p:spPr>
-      </p:pic>
-      <p:sp>
-        <p:nvSpPr>
-          <p:cNvPr id="2" name="TextBox 1">
-            <a:extLst>
-              <a:ext uri="{FF2B5EF4-FFF2-40B4-BE49-F238E27FC236}">
-                <a16:creationId xmlns:a16="http://schemas.microsoft.com/office/drawing/2014/main" id="{EB544801-4BB1-E26D-D125-148C5DB49AAC}"/>
-              </a:ext>
-            </a:extLst>
-          </p:cNvPr>
-          <p:cNvSpPr txBox="1"/>
-          <p:nvPr/>
-        </p:nvSpPr>
-        <p:spPr>
-          <a:xfrm>
-            <a:off x="6021377" y="859316"/>
-            <a:ext cx="4716138" cy="369332"/>
-          </a:xfrm>
-          <a:prstGeom prst="rect">
-            <a:avLst/>
-          </a:prstGeom>
-          <a:solidFill>
-            <a:schemeClr val="bg1"/>
-          </a:solidFill>
-        </p:spPr>
-        <p:txBody>
-          <a:bodyPr wrap="square" rtlCol="0">
-            <a:spAutoFit/>
-          </a:bodyPr>
-          <a:lstStyle/>
-          <a:p>
-            <a:pPr algn="ctr"/>
-            <a:r>
-              <a:rPr lang="en-US" b="1" dirty="0">
-                <a:latin typeface="Arial" panose="020B0604020202020204" pitchFamily="34" charset="0"/>
-                <a:cs typeface="Arial" panose="020B0604020202020204" pitchFamily="34" charset="0"/>
-              </a:rPr>
-              <a:t>ARFIMA First-Order Difference Forecast</a:t>
-            </a:r>
-          </a:p>
-        </p:txBody>
-      </p:sp>
-    </p:spTree>
-    <p:extLst>
-      <p:ext uri="{BB962C8B-B14F-4D97-AF65-F5344CB8AC3E}">
-        <p14:creationId xmlns:p14="http://schemas.microsoft.com/office/powerpoint/2010/main" val="4273154805"/>
-      </p:ext>
-    </p:extLst>
-  </p:cSld>
-  <p:clrMapOvr>
-    <a:masterClrMapping/>
-  </p:clrMapOvr>
-</p:sld>
-</file>
-
-<file path=ppt/slides/slide16.xml><?xml version="1.0" encoding="utf-8"?>
-<p:sld xmlns:a="http://schemas.openxmlformats.org/drawingml/2006/main" xmlns:r="http://schemas.openxmlformats.org/officeDocument/2006/relationships" xmlns:p="http://schemas.openxmlformats.org/presentationml/2006/main">
-  <p:cSld>
-    <p:spTree>
-      <p:nvGrpSpPr>
-        <p:cNvPr id="1" name=""/>
-        <p:cNvGrpSpPr/>
-        <p:nvPr/>
-      </p:nvGrpSpPr>
-      <p:grpSpPr>
-        <a:xfrm>
-          <a:off x="0" y="0"/>
-          <a:ext cx="0" cy="0"/>
-          <a:chOff x="0" y="0"/>
-          <a:chExt cx="0" cy="0"/>
-        </a:xfrm>
-      </p:grpSpPr>
-      <p:pic>
-        <p:nvPicPr>
-          <p:cNvPr id="13314" name="Picture 2">
-            <a:extLst>
-              <a:ext uri="{FF2B5EF4-FFF2-40B4-BE49-F238E27FC236}">
-                <a16:creationId xmlns:a16="http://schemas.microsoft.com/office/drawing/2014/main" id="{7112CDB2-14A3-FAC9-AFE0-1D02C28EE76A}"/>
-              </a:ext>
-            </a:extLst>
-          </p:cNvPr>
-          <p:cNvPicPr>
-            <a:picLocks noChangeAspect="1" noChangeArrowheads="1"/>
-          </p:cNvPicPr>
-          <p:nvPr/>
-        </p:nvPicPr>
-        <p:blipFill>
-          <a:blip r:embed="rId2">
-            <a:extLst>
-              <a:ext uri="{28A0092B-C50C-407E-A947-70E740481C1C}">
-                <a14:useLocalDpi xmlns:a14="http://schemas.microsoft.com/office/drawing/2010/main" val="0"/>
-              </a:ext>
-            </a:extLst>
-          </a:blip>
-          <a:srcRect/>
-          <a:stretch>
-            <a:fillRect/>
-          </a:stretch>
-        </p:blipFill>
-        <p:spPr bwMode="auto">
-          <a:xfrm>
-            <a:off x="3842333" y="381985"/>
-            <a:ext cx="8531646" cy="6094033"/>
-          </a:xfrm>
-          <a:prstGeom prst="rect">
-            <a:avLst/>
-          </a:prstGeom>
-          <a:noFill/>
-          <a:extLst>
-            <a:ext uri="{909E8E84-426E-40DD-AFC4-6F175D3DCCD1}">
-              <a14:hiddenFill xmlns:a14="http://schemas.microsoft.com/office/drawing/2010/main">
-                <a:solidFill>
-                  <a:srgbClr val="FFFFFF"/>
-                </a:solidFill>
-              </a14:hiddenFill>
-            </a:ext>
-          </a:extLst>
-        </p:spPr>
-      </p:pic>
-      <p:sp>
-        <p:nvSpPr>
-          <p:cNvPr id="2" name="TextBox 1">
-            <a:extLst>
-              <a:ext uri="{FF2B5EF4-FFF2-40B4-BE49-F238E27FC236}">
-                <a16:creationId xmlns:a16="http://schemas.microsoft.com/office/drawing/2014/main" id="{15D16ED7-77AE-E652-3EDB-D3B2EE9933E3}"/>
-              </a:ext>
-            </a:extLst>
-          </p:cNvPr>
-          <p:cNvSpPr txBox="1"/>
-          <p:nvPr/>
-        </p:nvSpPr>
-        <p:spPr>
-          <a:xfrm>
-            <a:off x="6010361" y="771181"/>
-            <a:ext cx="4716138" cy="369332"/>
-          </a:xfrm>
-          <a:prstGeom prst="rect">
-            <a:avLst/>
-          </a:prstGeom>
-          <a:solidFill>
-            <a:schemeClr val="bg1"/>
-          </a:solidFill>
-        </p:spPr>
-        <p:txBody>
-          <a:bodyPr wrap="square" rtlCol="0">
-            <a:spAutoFit/>
-          </a:bodyPr>
-          <a:lstStyle/>
-          <a:p>
-            <a:pPr algn="ctr"/>
-            <a:r>
-              <a:rPr lang="en-US" b="1" dirty="0">
-                <a:latin typeface="Arial" panose="020B0604020202020204" pitchFamily="34" charset="0"/>
-                <a:cs typeface="Arial" panose="020B0604020202020204" pitchFamily="34" charset="0"/>
-              </a:rPr>
-              <a:t>ARIMA Box-Cox Differenced Forecast</a:t>
-            </a:r>
-          </a:p>
-        </p:txBody>
-      </p:sp>
-    </p:spTree>
-    <p:extLst>
-      <p:ext uri="{BB962C8B-B14F-4D97-AF65-F5344CB8AC3E}">
-        <p14:creationId xmlns:p14="http://schemas.microsoft.com/office/powerpoint/2010/main" val="2158522330"/>
-      </p:ext>
-    </p:extLst>
-  </p:cSld>
-  <p:clrMapOvr>
-    <a:masterClrMapping/>
-  </p:clrMapOvr>
-</p:sld>
-</file>
-
-<file path=ppt/slides/slide17.xml><?xml version="1.0" encoding="utf-8"?>
-<p:sld xmlns:a="http://schemas.openxmlformats.org/drawingml/2006/main" xmlns:r="http://schemas.openxmlformats.org/officeDocument/2006/relationships" xmlns:p="http://schemas.openxmlformats.org/presentationml/2006/main">
-  <p:cSld>
-    <p:spTree>
-      <p:nvGrpSpPr>
-        <p:cNvPr id="1" name=""/>
-        <p:cNvGrpSpPr/>
-        <p:nvPr/>
-      </p:nvGrpSpPr>
-      <p:grpSpPr>
-        <a:xfrm>
-          <a:off x="0" y="0"/>
-          <a:ext cx="0" cy="0"/>
-          <a:chOff x="0" y="0"/>
-          <a:chExt cx="0" cy="0"/>
-        </a:xfrm>
-      </p:grpSpPr>
-      <p:pic>
-        <p:nvPicPr>
-          <p:cNvPr id="14338" name="Picture 2">
-            <a:extLst>
-              <a:ext uri="{FF2B5EF4-FFF2-40B4-BE49-F238E27FC236}">
-                <a16:creationId xmlns:a16="http://schemas.microsoft.com/office/drawing/2014/main" id="{45B72552-E9A7-B289-AD36-2C0D594E6312}"/>
-              </a:ext>
-            </a:extLst>
-          </p:cNvPr>
-          <p:cNvPicPr>
-            <a:picLocks noChangeAspect="1" noChangeArrowheads="1"/>
-          </p:cNvPicPr>
-          <p:nvPr/>
-        </p:nvPicPr>
-        <p:blipFill>
-          <a:blip r:embed="rId2">
-            <a:extLst>
-              <a:ext uri="{28A0092B-C50C-407E-A947-70E740481C1C}">
-                <a14:useLocalDpi xmlns:a14="http://schemas.microsoft.com/office/drawing/2010/main" val="0"/>
-              </a:ext>
-            </a:extLst>
-          </a:blip>
-          <a:srcRect/>
-          <a:stretch>
-            <a:fillRect/>
-          </a:stretch>
-        </p:blipFill>
-        <p:spPr bwMode="auto">
-          <a:xfrm>
-            <a:off x="3853350" y="389853"/>
-            <a:ext cx="8509612" cy="6078294"/>
-          </a:xfrm>
-          <a:prstGeom prst="rect">
-            <a:avLst/>
-          </a:prstGeom>
-          <a:noFill/>
-          <a:extLst>
-            <a:ext uri="{909E8E84-426E-40DD-AFC4-6F175D3DCCD1}">
-              <a14:hiddenFill xmlns:a14="http://schemas.microsoft.com/office/drawing/2010/main">
-                <a:solidFill>
-                  <a:srgbClr val="FFFFFF"/>
-                </a:solidFill>
-              </a14:hiddenFill>
-            </a:ext>
-          </a:extLst>
-        </p:spPr>
-      </p:pic>
-      <p:sp>
-        <p:nvSpPr>
-          <p:cNvPr id="2" name="TextBox 1">
-            <a:extLst>
-              <a:ext uri="{FF2B5EF4-FFF2-40B4-BE49-F238E27FC236}">
-                <a16:creationId xmlns:a16="http://schemas.microsoft.com/office/drawing/2014/main" id="{BBA1A8A9-C845-B2AA-B9E6-9734149DEE65}"/>
-              </a:ext>
-            </a:extLst>
-          </p:cNvPr>
-          <p:cNvSpPr txBox="1"/>
-          <p:nvPr/>
-        </p:nvSpPr>
-        <p:spPr>
-          <a:xfrm>
-            <a:off x="6010361" y="771181"/>
-            <a:ext cx="4716138" cy="369332"/>
-          </a:xfrm>
-          <a:prstGeom prst="rect">
-            <a:avLst/>
-          </a:prstGeom>
-          <a:solidFill>
-            <a:schemeClr val="bg1"/>
-          </a:solidFill>
-        </p:spPr>
-        <p:txBody>
-          <a:bodyPr wrap="square" rtlCol="0">
-            <a:spAutoFit/>
-          </a:bodyPr>
-          <a:lstStyle/>
-          <a:p>
-            <a:pPr algn="ctr"/>
-            <a:r>
-              <a:rPr lang="en-US" b="1" dirty="0">
-                <a:latin typeface="Arial" panose="020B0604020202020204" pitchFamily="34" charset="0"/>
-                <a:cs typeface="Arial" panose="020B0604020202020204" pitchFamily="34" charset="0"/>
-              </a:rPr>
-              <a:t>SARIMA Box-Cox Differenced Forecast</a:t>
-            </a:r>
-          </a:p>
-        </p:txBody>
-      </p:sp>
-    </p:spTree>
-    <p:extLst>
-      <p:ext uri="{BB962C8B-B14F-4D97-AF65-F5344CB8AC3E}">
-        <p14:creationId xmlns:p14="http://schemas.microsoft.com/office/powerpoint/2010/main" val="1003771194"/>
-      </p:ext>
-    </p:extLst>
-  </p:cSld>
-  <p:clrMapOvr>
-    <a:masterClrMapping/>
-  </p:clrMapOvr>
-</p:sld>
-</file>
-
-<file path=ppt/slides/slide18.xml><?xml version="1.0" encoding="utf-8"?>
-<p:sld xmlns:a="http://schemas.openxmlformats.org/drawingml/2006/main" xmlns:r="http://schemas.openxmlformats.org/officeDocument/2006/relationships" xmlns:p="http://schemas.openxmlformats.org/presentationml/2006/main">
-  <p:cSld>
-    <p:spTree>
-      <p:nvGrpSpPr>
-        <p:cNvPr id="1" name=""/>
-        <p:cNvGrpSpPr/>
-        <p:nvPr/>
-      </p:nvGrpSpPr>
-      <p:grpSpPr>
-        <a:xfrm>
-          <a:off x="0" y="0"/>
-          <a:ext cx="0" cy="0"/>
-          <a:chOff x="0" y="0"/>
-          <a:chExt cx="0" cy="0"/>
-        </a:xfrm>
-      </p:grpSpPr>
-      <p:pic>
-        <p:nvPicPr>
-          <p:cNvPr id="15362" name="Picture 2">
-            <a:extLst>
-              <a:ext uri="{FF2B5EF4-FFF2-40B4-BE49-F238E27FC236}">
-                <a16:creationId xmlns:a16="http://schemas.microsoft.com/office/drawing/2014/main" id="{8C6482A5-45DC-9860-7CF9-B3B755FE074E}"/>
-              </a:ext>
-            </a:extLst>
-          </p:cNvPr>
-          <p:cNvPicPr>
-            <a:picLocks noChangeAspect="1" noChangeArrowheads="1"/>
-          </p:cNvPicPr>
-          <p:nvPr/>
-        </p:nvPicPr>
-        <p:blipFill>
-          <a:blip r:embed="rId2">
-            <a:extLst>
-              <a:ext uri="{28A0092B-C50C-407E-A947-70E740481C1C}">
-                <a14:useLocalDpi xmlns:a14="http://schemas.microsoft.com/office/drawing/2010/main" val="0"/>
-              </a:ext>
-            </a:extLst>
-          </a:blip>
-          <a:srcRect/>
-          <a:stretch>
-            <a:fillRect/>
-          </a:stretch>
-        </p:blipFill>
-        <p:spPr bwMode="auto">
-          <a:xfrm>
-            <a:off x="3836826" y="378049"/>
-            <a:ext cx="8542663" cy="6101902"/>
-          </a:xfrm>
-          <a:prstGeom prst="rect">
-            <a:avLst/>
-          </a:prstGeom>
-          <a:noFill/>
-          <a:extLst>
-            <a:ext uri="{909E8E84-426E-40DD-AFC4-6F175D3DCCD1}">
-              <a14:hiddenFill xmlns:a14="http://schemas.microsoft.com/office/drawing/2010/main">
-                <a:solidFill>
-                  <a:srgbClr val="FFFFFF"/>
-                </a:solidFill>
-              </a14:hiddenFill>
-            </a:ext>
-          </a:extLst>
-        </p:spPr>
-      </p:pic>
-      <p:sp>
-        <p:nvSpPr>
-          <p:cNvPr id="2" name="TextBox 1">
-            <a:extLst>
-              <a:ext uri="{FF2B5EF4-FFF2-40B4-BE49-F238E27FC236}">
-                <a16:creationId xmlns:a16="http://schemas.microsoft.com/office/drawing/2014/main" id="{2BCDDEA4-0447-8955-6AAD-D8E5519A041A}"/>
-              </a:ext>
-            </a:extLst>
-          </p:cNvPr>
-          <p:cNvSpPr txBox="1"/>
-          <p:nvPr/>
-        </p:nvSpPr>
-        <p:spPr>
-          <a:xfrm>
-            <a:off x="6010361" y="771181"/>
-            <a:ext cx="4716138" cy="369332"/>
-          </a:xfrm>
-          <a:prstGeom prst="rect">
-            <a:avLst/>
-          </a:prstGeom>
-          <a:solidFill>
-            <a:schemeClr val="bg1"/>
-          </a:solidFill>
-        </p:spPr>
-        <p:txBody>
-          <a:bodyPr wrap="square" rtlCol="0">
-            <a:spAutoFit/>
-          </a:bodyPr>
-          <a:lstStyle/>
-          <a:p>
-            <a:pPr algn="ctr"/>
-            <a:r>
-              <a:rPr lang="en-US" b="1" dirty="0">
-                <a:latin typeface="Arial" panose="020B0604020202020204" pitchFamily="34" charset="0"/>
-                <a:cs typeface="Arial" panose="020B0604020202020204" pitchFamily="34" charset="0"/>
-              </a:rPr>
-              <a:t>ARFIMA Box-Cox Differenced Forecast</a:t>
-            </a:r>
-          </a:p>
-        </p:txBody>
-      </p:sp>
-    </p:spTree>
-    <p:extLst>
-      <p:ext uri="{BB962C8B-B14F-4D97-AF65-F5344CB8AC3E}">
-        <p14:creationId xmlns:p14="http://schemas.microsoft.com/office/powerpoint/2010/main" val="714245586"/>
-      </p:ext>
-    </p:extLst>
-  </p:cSld>
-  <p:clrMapOvr>
-    <a:masterClrMapping/>
-  </p:clrMapOvr>
-</p:sld>
-</file>
-
-<file path=ppt/slides/slide19.xml><?xml version="1.0" encoding="utf-8"?>
-<p:sld xmlns:a="http://schemas.openxmlformats.org/drawingml/2006/main" xmlns:r="http://schemas.openxmlformats.org/officeDocument/2006/relationships" xmlns:p="http://schemas.openxmlformats.org/presentationml/2006/main">
-  <p:cSld>
-    <p:spTree>
-      <p:nvGrpSpPr>
-        <p:cNvPr id="1" name=""/>
-        <p:cNvGrpSpPr/>
-        <p:nvPr/>
-      </p:nvGrpSpPr>
-      <p:grpSpPr>
-        <a:xfrm>
-          <a:off x="0" y="0"/>
-          <a:ext cx="0" cy="0"/>
-          <a:chOff x="0" y="0"/>
-          <a:chExt cx="0" cy="0"/>
-        </a:xfrm>
-      </p:grpSpPr>
-      <p:pic>
-        <p:nvPicPr>
-          <p:cNvPr id="16386" name="Picture 2">
-            <a:extLst>
-              <a:ext uri="{FF2B5EF4-FFF2-40B4-BE49-F238E27FC236}">
-                <a16:creationId xmlns:a16="http://schemas.microsoft.com/office/drawing/2014/main" id="{FB14D1B3-C335-9E66-B383-B00F5EAEA760}"/>
-              </a:ext>
-            </a:extLst>
-          </p:cNvPr>
-          <p:cNvPicPr>
-            <a:picLocks noChangeAspect="1" noChangeArrowheads="1"/>
-          </p:cNvPicPr>
-          <p:nvPr/>
-        </p:nvPicPr>
-        <p:blipFill>
-          <a:blip r:embed="rId2">
-            <a:extLst>
-              <a:ext uri="{28A0092B-C50C-407E-A947-70E740481C1C}">
-                <a14:useLocalDpi xmlns:a14="http://schemas.microsoft.com/office/drawing/2010/main" val="0"/>
-              </a:ext>
-            </a:extLst>
-          </a:blip>
-          <a:srcRect/>
-          <a:stretch>
-            <a:fillRect/>
-          </a:stretch>
-        </p:blipFill>
-        <p:spPr bwMode="auto">
-          <a:xfrm>
-            <a:off x="4073689" y="547237"/>
-            <a:ext cx="8068937" cy="5763526"/>
-          </a:xfrm>
-          <a:prstGeom prst="rect">
-            <a:avLst/>
-          </a:prstGeom>
-          <a:noFill/>
-          <a:extLst>
-            <a:ext uri="{909E8E84-426E-40DD-AFC4-6F175D3DCCD1}">
-              <a14:hiddenFill xmlns:a14="http://schemas.microsoft.com/office/drawing/2010/main">
-                <a:solidFill>
-                  <a:srgbClr val="FFFFFF"/>
-                </a:solidFill>
-              </a14:hiddenFill>
-            </a:ext>
-          </a:extLst>
-        </p:spPr>
-      </p:pic>
-      <p:sp>
-        <p:nvSpPr>
-          <p:cNvPr id="2" name="TextBox 1">
-            <a:extLst>
-              <a:ext uri="{FF2B5EF4-FFF2-40B4-BE49-F238E27FC236}">
-                <a16:creationId xmlns:a16="http://schemas.microsoft.com/office/drawing/2014/main" id="{D8163A2E-D725-A3E4-A86A-967C26AB8CBB}"/>
-              </a:ext>
-            </a:extLst>
-          </p:cNvPr>
-          <p:cNvSpPr txBox="1"/>
-          <p:nvPr/>
-        </p:nvSpPr>
-        <p:spPr>
-          <a:xfrm>
-            <a:off x="6010361" y="870333"/>
-            <a:ext cx="4716138" cy="369332"/>
-          </a:xfrm>
-          <a:prstGeom prst="rect">
-            <a:avLst/>
-          </a:prstGeom>
-          <a:solidFill>
-            <a:schemeClr val="bg1"/>
-          </a:solidFill>
-        </p:spPr>
-        <p:txBody>
-          <a:bodyPr wrap="square" rtlCol="0">
-            <a:spAutoFit/>
-          </a:bodyPr>
-          <a:lstStyle/>
-          <a:p>
-            <a:pPr algn="ctr"/>
-            <a:r>
-              <a:rPr lang="en-US" b="1" dirty="0">
-                <a:latin typeface="Arial" panose="020B0604020202020204" pitchFamily="34" charset="0"/>
-                <a:cs typeface="Arial" panose="020B0604020202020204" pitchFamily="34" charset="0"/>
-              </a:rPr>
-              <a:t>ARIMA Seasonal Differenced Forecast</a:t>
-            </a:r>
-          </a:p>
-        </p:txBody>
-      </p:sp>
-    </p:spTree>
-    <p:extLst>
-      <p:ext uri="{BB962C8B-B14F-4D97-AF65-F5344CB8AC3E}">
-        <p14:creationId xmlns:p14="http://schemas.microsoft.com/office/powerpoint/2010/main" val="1039129090"/>
       </p:ext>
     </p:extLst>
   </p:cSld>
@@ -4317,10 +3096,10 @@
       </p:grpSpPr>
       <p:pic>
         <p:nvPicPr>
-          <p:cNvPr id="2" name="Picture 1" descr="A comparison of a normalized plot&#10;&#10;AI-generated content may be incorrect.">
+          <p:cNvPr id="8" name="Picture 7" descr="A blue dotted line with a red line&#10;&#10;AI-generated content may be incorrect.">
             <a:extLst>
               <a:ext uri="{FF2B5EF4-FFF2-40B4-BE49-F238E27FC236}">
-                <a16:creationId xmlns:a16="http://schemas.microsoft.com/office/drawing/2014/main" id="{6973AD75-26DD-862F-D035-C79C82383252}"/>
+                <a16:creationId xmlns:a16="http://schemas.microsoft.com/office/drawing/2014/main" id="{922208D8-A099-7DC4-1A57-D73E4A6F9EDE}"/>
               </a:ext>
             </a:extLst>
           </p:cNvPr>
@@ -4331,342 +3110,81 @@
         </p:nvPicPr>
         <p:blipFill>
           <a:blip r:embed="rId2"/>
-          <a:stretch>
-            <a:fillRect/>
-          </a:stretch>
+          <a:srcRect r="3867"/>
+          <a:stretch/>
         </p:blipFill>
         <p:spPr>
           <a:xfrm>
-            <a:off x="4333713" y="1099630"/>
-            <a:ext cx="7548889" cy="4658743"/>
+            <a:off x="10566400" y="1537374"/>
+            <a:ext cx="5168900" cy="3318270"/>
           </a:xfrm>
           <a:prstGeom prst="rect">
             <a:avLst/>
           </a:prstGeom>
         </p:spPr>
       </p:pic>
-      <p:sp>
-        <p:nvSpPr>
-          <p:cNvPr id="4" name="TextBox 3">
+      <p:pic>
+        <p:nvPicPr>
+          <p:cNvPr id="10" name="Picture 9" descr="A blue dotted line with a red line&#10;&#10;AI-generated content may be incorrect.">
             <a:extLst>
               <a:ext uri="{FF2B5EF4-FFF2-40B4-BE49-F238E27FC236}">
-                <a16:creationId xmlns:a16="http://schemas.microsoft.com/office/drawing/2014/main" id="{4858F350-FEF6-18F7-F37A-F1D7E64A68E9}"/>
+                <a16:creationId xmlns:a16="http://schemas.microsoft.com/office/drawing/2014/main" id="{C2EDE137-7AD5-5735-4302-372ED2921E96}"/>
               </a:ext>
             </a:extLst>
           </p:cNvPr>
-          <p:cNvSpPr txBox="1"/>
+          <p:cNvPicPr>
+            <a:picLocks noChangeAspect="1"/>
+          </p:cNvPicPr>
           <p:nvPr/>
-        </p:nvSpPr>
+        </p:nvPicPr>
+        <p:blipFill>
+          <a:blip r:embed="rId3"/>
+          <a:srcRect r="4009"/>
+          <a:stretch/>
+        </p:blipFill>
         <p:spPr>
           <a:xfrm>
-            <a:off x="5195176" y="1279919"/>
-            <a:ext cx="2545752" cy="584775"/>
+            <a:off x="5397500" y="1532453"/>
+            <a:ext cx="5168900" cy="3323191"/>
           </a:xfrm>
           <a:prstGeom prst="rect">
             <a:avLst/>
           </a:prstGeom>
-          <a:solidFill>
-            <a:schemeClr val="bg1"/>
-          </a:solidFill>
         </p:spPr>
-        <p:txBody>
-          <a:bodyPr wrap="square" rtlCol="0">
-            <a:spAutoFit/>
-          </a:bodyPr>
-          <a:lstStyle/>
-          <a:p>
-            <a:pPr algn="ctr"/>
-            <a:r>
-              <a:rPr lang="en-US" sz="1600" b="1" dirty="0">
-                <a:latin typeface="Arial" panose="020B0604020202020204" pitchFamily="34" charset="0"/>
-                <a:cs typeface="Arial" panose="020B0604020202020204" pitchFamily="34" charset="0"/>
-              </a:rPr>
-              <a:t>ACF Plot of Seasonal Differenced Data</a:t>
-            </a:r>
-          </a:p>
-        </p:txBody>
-      </p:sp>
-      <p:sp>
-        <p:nvSpPr>
-          <p:cNvPr id="5" name="TextBox 4">
+      </p:pic>
+      <p:pic>
+        <p:nvPicPr>
+          <p:cNvPr id="12" name="Picture 11" descr="A blue dotted line with a red line&#10;&#10;AI-generated content may be incorrect.">
             <a:extLst>
               <a:ext uri="{FF2B5EF4-FFF2-40B4-BE49-F238E27FC236}">
-                <a16:creationId xmlns:a16="http://schemas.microsoft.com/office/drawing/2014/main" id="{4ADBAF76-78F2-81A9-BDF5-A8F036DB1F0A}"/>
+                <a16:creationId xmlns:a16="http://schemas.microsoft.com/office/drawing/2014/main" id="{A214BF42-C31A-30C4-4797-19FBC246FA09}"/>
               </a:ext>
             </a:extLst>
           </p:cNvPr>
-          <p:cNvSpPr txBox="1"/>
+          <p:cNvPicPr>
+            <a:picLocks noChangeAspect="1"/>
+          </p:cNvPicPr>
           <p:nvPr/>
-        </p:nvSpPr>
+        </p:nvPicPr>
+        <p:blipFill>
+          <a:blip r:embed="rId4"/>
+          <a:srcRect r="4009"/>
+          <a:stretch/>
+        </p:blipFill>
         <p:spPr>
           <a:xfrm>
-            <a:off x="8928058" y="1279918"/>
-            <a:ext cx="2545752" cy="584775"/>
+            <a:off x="228600" y="1532453"/>
+            <a:ext cx="5168900" cy="3323191"/>
           </a:xfrm>
           <a:prstGeom prst="rect">
             <a:avLst/>
           </a:prstGeom>
-          <a:solidFill>
-            <a:schemeClr val="bg1"/>
-          </a:solidFill>
         </p:spPr>
-        <p:txBody>
-          <a:bodyPr wrap="square" rtlCol="0">
-            <a:spAutoFit/>
-          </a:bodyPr>
-          <a:lstStyle/>
-          <a:p>
-            <a:pPr algn="ctr"/>
-            <a:r>
-              <a:rPr lang="en-US" sz="1600" b="1" dirty="0">
-                <a:latin typeface="Arial" panose="020B0604020202020204" pitchFamily="34" charset="0"/>
-                <a:cs typeface="Arial" panose="020B0604020202020204" pitchFamily="34" charset="0"/>
-              </a:rPr>
-              <a:t>PACF Plot of Seasonal Differenced Data</a:t>
-            </a:r>
-          </a:p>
-        </p:txBody>
-      </p:sp>
+      </p:pic>
     </p:spTree>
     <p:extLst>
       <p:ext uri="{BB962C8B-B14F-4D97-AF65-F5344CB8AC3E}">
-        <p14:creationId xmlns:p14="http://schemas.microsoft.com/office/powerpoint/2010/main" val="1450078751"/>
-      </p:ext>
-    </p:extLst>
-  </p:cSld>
-  <p:clrMapOvr>
-    <a:masterClrMapping/>
-  </p:clrMapOvr>
-</p:sld>
-</file>
-
-<file path=ppt/slides/slide20.xml><?xml version="1.0" encoding="utf-8"?>
-<p:sld xmlns:a="http://schemas.openxmlformats.org/drawingml/2006/main" xmlns:r="http://schemas.openxmlformats.org/officeDocument/2006/relationships" xmlns:p="http://schemas.openxmlformats.org/presentationml/2006/main">
-  <p:cSld>
-    <p:spTree>
-      <p:nvGrpSpPr>
-        <p:cNvPr id="1" name=""/>
-        <p:cNvGrpSpPr/>
-        <p:nvPr/>
-      </p:nvGrpSpPr>
-      <p:grpSpPr>
-        <a:xfrm>
-          <a:off x="0" y="0"/>
-          <a:ext cx="0" cy="0"/>
-          <a:chOff x="0" y="0"/>
-          <a:chExt cx="0" cy="0"/>
-        </a:xfrm>
-      </p:grpSpPr>
-      <p:pic>
-        <p:nvPicPr>
-          <p:cNvPr id="17410" name="Picture 2">
-            <a:extLst>
-              <a:ext uri="{FF2B5EF4-FFF2-40B4-BE49-F238E27FC236}">
-                <a16:creationId xmlns:a16="http://schemas.microsoft.com/office/drawing/2014/main" id="{7BD6424A-7755-49CD-E651-D9C8CAFCD603}"/>
-              </a:ext>
-            </a:extLst>
-          </p:cNvPr>
-          <p:cNvPicPr>
-            <a:picLocks noChangeAspect="1" noChangeArrowheads="1"/>
-          </p:cNvPicPr>
-          <p:nvPr/>
-        </p:nvPicPr>
-        <p:blipFill>
-          <a:blip r:embed="rId2">
-            <a:extLst>
-              <a:ext uri="{28A0092B-C50C-407E-A947-70E740481C1C}">
-                <a14:useLocalDpi xmlns:a14="http://schemas.microsoft.com/office/drawing/2010/main" val="0"/>
-              </a:ext>
-            </a:extLst>
-          </a:blip>
-          <a:srcRect/>
-          <a:stretch>
-            <a:fillRect/>
-          </a:stretch>
-        </p:blipFill>
-        <p:spPr bwMode="auto">
-          <a:xfrm>
-            <a:off x="3869877" y="401657"/>
-            <a:ext cx="8476561" cy="6054686"/>
-          </a:xfrm>
-          <a:prstGeom prst="rect">
-            <a:avLst/>
-          </a:prstGeom>
-          <a:noFill/>
-          <a:extLst>
-            <a:ext uri="{909E8E84-426E-40DD-AFC4-6F175D3DCCD1}">
-              <a14:hiddenFill xmlns:a14="http://schemas.microsoft.com/office/drawing/2010/main">
-                <a:solidFill>
-                  <a:srgbClr val="FFFFFF"/>
-                </a:solidFill>
-              </a14:hiddenFill>
-            </a:ext>
-          </a:extLst>
-        </p:spPr>
-      </p:pic>
-      <p:sp>
-        <p:nvSpPr>
-          <p:cNvPr id="2" name="TextBox 1">
-            <a:extLst>
-              <a:ext uri="{FF2B5EF4-FFF2-40B4-BE49-F238E27FC236}">
-                <a16:creationId xmlns:a16="http://schemas.microsoft.com/office/drawing/2014/main" id="{CA4DE886-129B-86B3-9330-B720EE47CE9B}"/>
-              </a:ext>
-            </a:extLst>
-          </p:cNvPr>
-          <p:cNvSpPr txBox="1"/>
-          <p:nvPr/>
-        </p:nvSpPr>
-        <p:spPr>
-          <a:xfrm>
-            <a:off x="6010361" y="782198"/>
-            <a:ext cx="4716138" cy="369332"/>
-          </a:xfrm>
-          <a:prstGeom prst="rect">
-            <a:avLst/>
-          </a:prstGeom>
-          <a:solidFill>
-            <a:schemeClr val="bg1"/>
-          </a:solidFill>
-        </p:spPr>
-        <p:txBody>
-          <a:bodyPr wrap="square" rtlCol="0">
-            <a:spAutoFit/>
-          </a:bodyPr>
-          <a:lstStyle/>
-          <a:p>
-            <a:pPr algn="ctr"/>
-            <a:r>
-              <a:rPr lang="en-US" b="1" dirty="0">
-                <a:latin typeface="Arial" panose="020B0604020202020204" pitchFamily="34" charset="0"/>
-                <a:cs typeface="Arial" panose="020B0604020202020204" pitchFamily="34" charset="0"/>
-              </a:rPr>
-              <a:t>SARIMA Seasonal Differenced Forecast</a:t>
-            </a:r>
-          </a:p>
-        </p:txBody>
-      </p:sp>
-    </p:spTree>
-    <p:extLst>
-      <p:ext uri="{BB962C8B-B14F-4D97-AF65-F5344CB8AC3E}">
-        <p14:creationId xmlns:p14="http://schemas.microsoft.com/office/powerpoint/2010/main" val="573876586"/>
-      </p:ext>
-    </p:extLst>
-  </p:cSld>
-  <p:clrMapOvr>
-    <a:masterClrMapping/>
-  </p:clrMapOvr>
-</p:sld>
-</file>
-
-<file path=ppt/slides/slide21.xml><?xml version="1.0" encoding="utf-8"?>
-<p:sld xmlns:a="http://schemas.openxmlformats.org/drawingml/2006/main" xmlns:r="http://schemas.openxmlformats.org/officeDocument/2006/relationships" xmlns:p="http://schemas.openxmlformats.org/presentationml/2006/main">
-  <p:cSld>
-    <p:spTree>
-      <p:nvGrpSpPr>
-        <p:cNvPr id="1" name=""/>
-        <p:cNvGrpSpPr/>
-        <p:nvPr/>
-      </p:nvGrpSpPr>
-      <p:grpSpPr>
-        <a:xfrm>
-          <a:off x="0" y="0"/>
-          <a:ext cx="0" cy="0"/>
-          <a:chOff x="0" y="0"/>
-          <a:chExt cx="0" cy="0"/>
-        </a:xfrm>
-      </p:grpSpPr>
-      <p:pic>
-        <p:nvPicPr>
-          <p:cNvPr id="18434" name="Picture 2">
-            <a:extLst>
-              <a:ext uri="{FF2B5EF4-FFF2-40B4-BE49-F238E27FC236}">
-                <a16:creationId xmlns:a16="http://schemas.microsoft.com/office/drawing/2014/main" id="{9D3FFBB3-9753-67DC-B43C-FD8CE4D463B1}"/>
-              </a:ext>
-            </a:extLst>
-          </p:cNvPr>
-          <p:cNvPicPr>
-            <a:picLocks noChangeAspect="1" noChangeArrowheads="1"/>
-          </p:cNvPicPr>
-          <p:nvPr/>
-        </p:nvPicPr>
-        <p:blipFill>
-          <a:blip r:embed="rId2">
-            <a:extLst>
-              <a:ext uri="{28A0092B-C50C-407E-A947-70E740481C1C}">
-                <a14:useLocalDpi xmlns:a14="http://schemas.microsoft.com/office/drawing/2010/main" val="0"/>
-              </a:ext>
-            </a:extLst>
-          </a:blip>
-          <a:srcRect/>
-          <a:stretch>
-            <a:fillRect/>
-          </a:stretch>
-        </p:blipFill>
-        <p:spPr bwMode="auto">
-          <a:xfrm>
-            <a:off x="3958010" y="464610"/>
-            <a:ext cx="8300292" cy="5928780"/>
-          </a:xfrm>
-          <a:prstGeom prst="rect">
-            <a:avLst/>
-          </a:prstGeom>
-          <a:noFill/>
-          <a:extLst>
-            <a:ext uri="{909E8E84-426E-40DD-AFC4-6F175D3DCCD1}">
-              <a14:hiddenFill xmlns:a14="http://schemas.microsoft.com/office/drawing/2010/main">
-                <a:solidFill>
-                  <a:srgbClr val="FFFFFF"/>
-                </a:solidFill>
-              </a14:hiddenFill>
-            </a:ext>
-          </a:extLst>
-        </p:spPr>
-      </p:pic>
-      <p:sp>
-        <p:nvSpPr>
-          <p:cNvPr id="2" name="TextBox 1">
-            <a:extLst>
-              <a:ext uri="{FF2B5EF4-FFF2-40B4-BE49-F238E27FC236}">
-                <a16:creationId xmlns:a16="http://schemas.microsoft.com/office/drawing/2014/main" id="{4FB7C4A3-DB51-5219-0AFE-3125B199AE35}"/>
-              </a:ext>
-            </a:extLst>
-          </p:cNvPr>
-          <p:cNvSpPr txBox="1"/>
-          <p:nvPr/>
-        </p:nvSpPr>
-        <p:spPr>
-          <a:xfrm>
-            <a:off x="6010361" y="782198"/>
-            <a:ext cx="4716138" cy="369332"/>
-          </a:xfrm>
-          <a:prstGeom prst="rect">
-            <a:avLst/>
-          </a:prstGeom>
-          <a:solidFill>
-            <a:schemeClr val="bg1"/>
-          </a:solidFill>
-        </p:spPr>
-        <p:txBody>
-          <a:bodyPr wrap="square" rtlCol="0">
-            <a:spAutoFit/>
-          </a:bodyPr>
-          <a:lstStyle/>
-          <a:p>
-            <a:pPr algn="ctr"/>
-            <a:r>
-              <a:rPr lang="en-US" b="1" dirty="0">
-                <a:latin typeface="Arial" panose="020B0604020202020204" pitchFamily="34" charset="0"/>
-                <a:cs typeface="Arial" panose="020B0604020202020204" pitchFamily="34" charset="0"/>
-              </a:rPr>
-              <a:t>ARFIMA Seasonal Differenced Forecast</a:t>
-            </a:r>
-          </a:p>
-        </p:txBody>
-      </p:sp>
-    </p:spTree>
-    <p:extLst>
-      <p:ext uri="{BB962C8B-B14F-4D97-AF65-F5344CB8AC3E}">
-        <p14:creationId xmlns:p14="http://schemas.microsoft.com/office/powerpoint/2010/main" val="3460641191"/>
+        <p14:creationId xmlns:p14="http://schemas.microsoft.com/office/powerpoint/2010/main" val="4037854207"/>
       </p:ext>
     </p:extLst>
   </p:cSld>
@@ -4693,122 +3211,10 @@
           <a:chExt cx="0" cy="0"/>
         </a:xfrm>
       </p:grpSpPr>
-      <p:pic>
-        <p:nvPicPr>
-          <p:cNvPr id="2" name="Picture 1" descr="A comparison of a graph&#10;&#10;AI-generated content may be incorrect.">
-            <a:extLst>
-              <a:ext uri="{FF2B5EF4-FFF2-40B4-BE49-F238E27FC236}">
-                <a16:creationId xmlns:a16="http://schemas.microsoft.com/office/drawing/2014/main" id="{69D26E71-0263-FBBF-4349-2027507F2FD8}"/>
-              </a:ext>
-            </a:extLst>
-          </p:cNvPr>
-          <p:cNvPicPr>
-            <a:picLocks noChangeAspect="1"/>
-          </p:cNvPicPr>
-          <p:nvPr/>
-        </p:nvPicPr>
-        <p:blipFill>
-          <a:blip r:embed="rId2"/>
-          <a:stretch>
-            <a:fillRect/>
-          </a:stretch>
-        </p:blipFill>
-        <p:spPr>
-          <a:xfrm>
-            <a:off x="4354898" y="1112705"/>
-            <a:ext cx="7506516" cy="4632593"/>
-          </a:xfrm>
-          <a:prstGeom prst="rect">
-            <a:avLst/>
-          </a:prstGeom>
-        </p:spPr>
-      </p:pic>
-      <p:sp>
-        <p:nvSpPr>
-          <p:cNvPr id="3" name="TextBox 2">
-            <a:extLst>
-              <a:ext uri="{FF2B5EF4-FFF2-40B4-BE49-F238E27FC236}">
-                <a16:creationId xmlns:a16="http://schemas.microsoft.com/office/drawing/2014/main" id="{1D14CFD4-1BA5-D9CE-85B0-8520FC3D871F}"/>
-              </a:ext>
-            </a:extLst>
-          </p:cNvPr>
-          <p:cNvSpPr txBox="1"/>
-          <p:nvPr/>
-        </p:nvSpPr>
-        <p:spPr>
-          <a:xfrm>
-            <a:off x="5195176" y="1279919"/>
-            <a:ext cx="2545752" cy="584775"/>
-          </a:xfrm>
-          <a:prstGeom prst="rect">
-            <a:avLst/>
-          </a:prstGeom>
-          <a:solidFill>
-            <a:schemeClr val="bg1"/>
-          </a:solidFill>
-        </p:spPr>
-        <p:txBody>
-          <a:bodyPr wrap="square" rtlCol="0">
-            <a:spAutoFit/>
-          </a:bodyPr>
-          <a:lstStyle/>
-          <a:p>
-            <a:pPr algn="ctr"/>
-            <a:r>
-              <a:rPr lang="en-US" sz="1600" b="1" dirty="0">
-                <a:latin typeface="Arial" panose="020B0604020202020204" pitchFamily="34" charset="0"/>
-                <a:cs typeface="Arial" panose="020B0604020202020204" pitchFamily="34" charset="0"/>
-              </a:rPr>
-              <a:t>ACF Plot of First-Order Differenced Data</a:t>
-            </a:r>
-          </a:p>
-        </p:txBody>
-      </p:sp>
-      <p:sp>
-        <p:nvSpPr>
-          <p:cNvPr id="4" name="TextBox 3">
-            <a:extLst>
-              <a:ext uri="{FF2B5EF4-FFF2-40B4-BE49-F238E27FC236}">
-                <a16:creationId xmlns:a16="http://schemas.microsoft.com/office/drawing/2014/main" id="{4E826A44-C6F5-9C3F-B5CB-E453B6C91C3B}"/>
-              </a:ext>
-            </a:extLst>
-          </p:cNvPr>
-          <p:cNvSpPr txBox="1"/>
-          <p:nvPr/>
-        </p:nvSpPr>
-        <p:spPr>
-          <a:xfrm>
-            <a:off x="8950092" y="1279918"/>
-            <a:ext cx="2545752" cy="584775"/>
-          </a:xfrm>
-          <a:prstGeom prst="rect">
-            <a:avLst/>
-          </a:prstGeom>
-          <a:solidFill>
-            <a:schemeClr val="bg1"/>
-          </a:solidFill>
-        </p:spPr>
-        <p:txBody>
-          <a:bodyPr wrap="square" rtlCol="0">
-            <a:spAutoFit/>
-          </a:bodyPr>
-          <a:lstStyle/>
-          <a:p>
-            <a:pPr algn="ctr"/>
-            <a:r>
-              <a:rPr lang="en-US" sz="1600" b="1" dirty="0">
-                <a:latin typeface="Arial" panose="020B0604020202020204" pitchFamily="34" charset="0"/>
-                <a:cs typeface="Arial" panose="020B0604020202020204" pitchFamily="34" charset="0"/>
-              </a:rPr>
-              <a:t>PACF Plot of First-Order Differenced Data</a:t>
-            </a:r>
-          </a:p>
-        </p:txBody>
-      </p:sp>
     </p:spTree>
     <p:extLst>
       <p:ext uri="{BB962C8B-B14F-4D97-AF65-F5344CB8AC3E}">
-        <p14:creationId xmlns:p14="http://schemas.microsoft.com/office/powerpoint/2010/main" val="1688088313"/>
+        <p14:creationId xmlns:p14="http://schemas.microsoft.com/office/powerpoint/2010/main" val="3958412184"/>
       </p:ext>
     </p:extLst>
   </p:cSld>
@@ -4835,1216 +3241,10 @@
           <a:chExt cx="0" cy="0"/>
         </a:xfrm>
       </p:grpSpPr>
-      <p:pic>
-        <p:nvPicPr>
-          <p:cNvPr id="1026" name="Picture 2">
-            <a:extLst>
-              <a:ext uri="{FF2B5EF4-FFF2-40B4-BE49-F238E27FC236}">
-                <a16:creationId xmlns:a16="http://schemas.microsoft.com/office/drawing/2014/main" id="{DDD7DB12-0D29-821D-CBC5-AE627F679B9F}"/>
-              </a:ext>
-            </a:extLst>
-          </p:cNvPr>
-          <p:cNvPicPr>
-            <a:picLocks noChangeAspect="1" noChangeArrowheads="1"/>
-          </p:cNvPicPr>
-          <p:nvPr/>
-        </p:nvPicPr>
-        <p:blipFill>
-          <a:blip r:embed="rId2">
-            <a:extLst>
-              <a:ext uri="{28A0092B-C50C-407E-A947-70E740481C1C}">
-                <a14:useLocalDpi xmlns:a14="http://schemas.microsoft.com/office/drawing/2010/main" val="0"/>
-              </a:ext>
-            </a:extLst>
-          </a:blip>
-          <a:srcRect/>
-          <a:stretch>
-            <a:fillRect/>
-          </a:stretch>
-        </p:blipFill>
-        <p:spPr bwMode="auto">
-          <a:xfrm>
-            <a:off x="866262" y="1745157"/>
-            <a:ext cx="4714760" cy="3367686"/>
-          </a:xfrm>
-          <a:prstGeom prst="rect">
-            <a:avLst/>
-          </a:prstGeom>
-          <a:noFill/>
-          <a:extLst>
-            <a:ext uri="{909E8E84-426E-40DD-AFC4-6F175D3DCCD1}">
-              <a14:hiddenFill xmlns:a14="http://schemas.microsoft.com/office/drawing/2010/main">
-                <a:solidFill>
-                  <a:srgbClr val="FFFFFF"/>
-                </a:solidFill>
-              </a14:hiddenFill>
-            </a:ext>
-          </a:extLst>
-        </p:spPr>
-      </p:pic>
-      <p:sp>
-        <p:nvSpPr>
-          <p:cNvPr id="2" name="TextBox 1">
-            <a:extLst>
-              <a:ext uri="{FF2B5EF4-FFF2-40B4-BE49-F238E27FC236}">
-                <a16:creationId xmlns:a16="http://schemas.microsoft.com/office/drawing/2014/main" id="{1DED58CC-3520-E376-3EB5-238438C3D9B9}"/>
-              </a:ext>
-            </a:extLst>
-          </p:cNvPr>
-          <p:cNvSpPr txBox="1"/>
-          <p:nvPr/>
-        </p:nvSpPr>
-        <p:spPr>
-          <a:xfrm>
-            <a:off x="1981515" y="1745159"/>
-            <a:ext cx="2784719" cy="461665"/>
-          </a:xfrm>
-          <a:prstGeom prst="rect">
-            <a:avLst/>
-          </a:prstGeom>
-          <a:solidFill>
-            <a:schemeClr val="bg1"/>
-          </a:solidFill>
-        </p:spPr>
-        <p:txBody>
-          <a:bodyPr wrap="square" rtlCol="0">
-            <a:spAutoFit/>
-          </a:bodyPr>
-          <a:lstStyle/>
-          <a:p>
-            <a:pPr algn="ctr"/>
-            <a:r>
-              <a:rPr lang="en-US" sz="1200" b="1" dirty="0">
-                <a:latin typeface="Arial" panose="020B0604020202020204" pitchFamily="34" charset="0"/>
-                <a:cs typeface="Arial" panose="020B0604020202020204" pitchFamily="34" charset="0"/>
-              </a:rPr>
-              <a:t>Residuals vs Fitted Plot of ARIMA First-Order Differenced Model</a:t>
-            </a:r>
-          </a:p>
-        </p:txBody>
-      </p:sp>
-      <p:pic>
-        <p:nvPicPr>
-          <p:cNvPr id="3" name="Picture 2">
-            <a:extLst>
-              <a:ext uri="{FF2B5EF4-FFF2-40B4-BE49-F238E27FC236}">
-                <a16:creationId xmlns:a16="http://schemas.microsoft.com/office/drawing/2014/main" id="{3EF051B6-B5C2-4651-ED96-7285E851E3A6}"/>
-              </a:ext>
-            </a:extLst>
-          </p:cNvPr>
-          <p:cNvPicPr>
-            <a:picLocks noChangeAspect="1" noChangeArrowheads="1"/>
-          </p:cNvPicPr>
-          <p:nvPr/>
-        </p:nvPicPr>
-        <p:blipFill>
-          <a:blip r:embed="rId3">
-            <a:extLst>
-              <a:ext uri="{28A0092B-C50C-407E-A947-70E740481C1C}">
-                <a14:useLocalDpi xmlns:a14="http://schemas.microsoft.com/office/drawing/2010/main" val="0"/>
-              </a:ext>
-            </a:extLst>
-          </a:blip>
-          <a:srcRect/>
-          <a:stretch>
-            <a:fillRect/>
-          </a:stretch>
-        </p:blipFill>
-        <p:spPr bwMode="auto">
-          <a:xfrm>
-            <a:off x="5494488" y="1745156"/>
-            <a:ext cx="4590676" cy="3279054"/>
-          </a:xfrm>
-          <a:prstGeom prst="rect">
-            <a:avLst/>
-          </a:prstGeom>
-          <a:noFill/>
-          <a:extLst>
-            <a:ext uri="{909E8E84-426E-40DD-AFC4-6F175D3DCCD1}">
-              <a14:hiddenFill xmlns:a14="http://schemas.microsoft.com/office/drawing/2010/main">
-                <a:solidFill>
-                  <a:srgbClr val="FFFFFF"/>
-                </a:solidFill>
-              </a14:hiddenFill>
-            </a:ext>
-          </a:extLst>
-        </p:spPr>
-      </p:pic>
-      <p:sp>
-        <p:nvSpPr>
-          <p:cNvPr id="4" name="TextBox 3">
-            <a:extLst>
-              <a:ext uri="{FF2B5EF4-FFF2-40B4-BE49-F238E27FC236}">
-                <a16:creationId xmlns:a16="http://schemas.microsoft.com/office/drawing/2014/main" id="{254C6099-F899-1EF3-0F86-96B66FB48F90}"/>
-              </a:ext>
-            </a:extLst>
-          </p:cNvPr>
-          <p:cNvSpPr txBox="1"/>
-          <p:nvPr/>
-        </p:nvSpPr>
-        <p:spPr>
-          <a:xfrm>
-            <a:off x="6223751" y="1749650"/>
-            <a:ext cx="3194892" cy="461665"/>
-          </a:xfrm>
-          <a:prstGeom prst="rect">
-            <a:avLst/>
-          </a:prstGeom>
-          <a:solidFill>
-            <a:schemeClr val="bg1"/>
-          </a:solidFill>
-        </p:spPr>
-        <p:txBody>
-          <a:bodyPr wrap="square" rtlCol="0">
-            <a:spAutoFit/>
-          </a:bodyPr>
-          <a:lstStyle/>
-          <a:p>
-            <a:pPr algn="ctr"/>
-            <a:r>
-              <a:rPr lang="en-US" sz="1200" b="1" dirty="0">
-                <a:latin typeface="Arial" panose="020B0604020202020204" pitchFamily="34" charset="0"/>
-                <a:cs typeface="Arial" panose="020B0604020202020204" pitchFamily="34" charset="0"/>
-              </a:rPr>
-              <a:t>Residuals vs Fitted Plot of ARIMA Box-Cox Differenced Model</a:t>
-            </a:r>
-          </a:p>
-        </p:txBody>
-      </p:sp>
-      <p:pic>
-        <p:nvPicPr>
-          <p:cNvPr id="5" name="Picture 2">
-            <a:extLst>
-              <a:ext uri="{FF2B5EF4-FFF2-40B4-BE49-F238E27FC236}">
-                <a16:creationId xmlns:a16="http://schemas.microsoft.com/office/drawing/2014/main" id="{C5AF0C70-822E-733E-FACF-C8E8218DF908}"/>
-              </a:ext>
-            </a:extLst>
-          </p:cNvPr>
-          <p:cNvPicPr>
-            <a:picLocks noChangeAspect="1" noChangeArrowheads="1"/>
-          </p:cNvPicPr>
-          <p:nvPr/>
-        </p:nvPicPr>
-        <p:blipFill>
-          <a:blip r:embed="rId4">
-            <a:extLst>
-              <a:ext uri="{28A0092B-C50C-407E-A947-70E740481C1C}">
-                <a14:useLocalDpi xmlns:a14="http://schemas.microsoft.com/office/drawing/2010/main" val="0"/>
-              </a:ext>
-            </a:extLst>
-          </a:blip>
-          <a:srcRect/>
-          <a:stretch>
-            <a:fillRect/>
-          </a:stretch>
-        </p:blipFill>
-        <p:spPr bwMode="auto">
-          <a:xfrm>
-            <a:off x="9998629" y="1789473"/>
-            <a:ext cx="4590676" cy="3279054"/>
-          </a:xfrm>
-          <a:prstGeom prst="rect">
-            <a:avLst/>
-          </a:prstGeom>
-          <a:noFill/>
-          <a:extLst>
-            <a:ext uri="{909E8E84-426E-40DD-AFC4-6F175D3DCCD1}">
-              <a14:hiddenFill xmlns:a14="http://schemas.microsoft.com/office/drawing/2010/main">
-                <a:solidFill>
-                  <a:srgbClr val="FFFFFF"/>
-                </a:solidFill>
-              </a14:hiddenFill>
-            </a:ext>
-          </a:extLst>
-        </p:spPr>
-      </p:pic>
-      <p:sp>
-        <p:nvSpPr>
-          <p:cNvPr id="6" name="TextBox 5">
-            <a:extLst>
-              <a:ext uri="{FF2B5EF4-FFF2-40B4-BE49-F238E27FC236}">
-                <a16:creationId xmlns:a16="http://schemas.microsoft.com/office/drawing/2014/main" id="{84397CC1-DE55-F8B4-1B87-9BF0B56D3A7D}"/>
-              </a:ext>
-            </a:extLst>
-          </p:cNvPr>
-          <p:cNvSpPr txBox="1"/>
-          <p:nvPr/>
-        </p:nvSpPr>
-        <p:spPr>
-          <a:xfrm>
-            <a:off x="10929133" y="1745157"/>
-            <a:ext cx="3020380" cy="461665"/>
-          </a:xfrm>
-          <a:prstGeom prst="rect">
-            <a:avLst/>
-          </a:prstGeom>
-          <a:solidFill>
-            <a:schemeClr val="bg1"/>
-          </a:solidFill>
-        </p:spPr>
-        <p:txBody>
-          <a:bodyPr wrap="square" rtlCol="0">
-            <a:spAutoFit/>
-          </a:bodyPr>
-          <a:lstStyle/>
-          <a:p>
-            <a:pPr algn="ctr"/>
-            <a:r>
-              <a:rPr lang="en-US" sz="1200" b="1" dirty="0">
-                <a:latin typeface="Arial" panose="020B0604020202020204" pitchFamily="34" charset="0"/>
-                <a:cs typeface="Arial" panose="020B0604020202020204" pitchFamily="34" charset="0"/>
-              </a:rPr>
-              <a:t>Residuals vs Fitted Plot of ARIMA Seasonal Differenced Model</a:t>
-            </a:r>
-          </a:p>
-        </p:txBody>
-      </p:sp>
     </p:spTree>
     <p:extLst>
       <p:ext uri="{BB962C8B-B14F-4D97-AF65-F5344CB8AC3E}">
-        <p14:creationId xmlns:p14="http://schemas.microsoft.com/office/powerpoint/2010/main" val="4037854207"/>
-      </p:ext>
-    </p:extLst>
-  </p:cSld>
-  <p:clrMapOvr>
-    <a:masterClrMapping/>
-  </p:clrMapOvr>
-</p:sld>
-</file>
-
-<file path=ppt/slides/slide5.xml><?xml version="1.0" encoding="utf-8"?>
-<p:sld xmlns:a="http://schemas.openxmlformats.org/drawingml/2006/main" xmlns:r="http://schemas.openxmlformats.org/officeDocument/2006/relationships" xmlns:p="http://schemas.openxmlformats.org/presentationml/2006/main">
-  <p:cSld>
-    <p:spTree>
-      <p:nvGrpSpPr>
-        <p:cNvPr id="1" name=""/>
-        <p:cNvGrpSpPr/>
-        <p:nvPr/>
-      </p:nvGrpSpPr>
-      <p:grpSpPr>
-        <a:xfrm>
-          <a:off x="0" y="0"/>
-          <a:ext cx="0" cy="0"/>
-          <a:chOff x="0" y="0"/>
-          <a:chExt cx="0" cy="0"/>
-        </a:xfrm>
-      </p:grpSpPr>
-      <p:pic>
-        <p:nvPicPr>
-          <p:cNvPr id="2050" name="Picture 2">
-            <a:extLst>
-              <a:ext uri="{FF2B5EF4-FFF2-40B4-BE49-F238E27FC236}">
-                <a16:creationId xmlns:a16="http://schemas.microsoft.com/office/drawing/2014/main" id="{C799F018-31D5-FB70-F472-87B0F2C2F65D}"/>
-              </a:ext>
-            </a:extLst>
-          </p:cNvPr>
-          <p:cNvPicPr>
-            <a:picLocks noChangeAspect="1" noChangeArrowheads="1"/>
-          </p:cNvPicPr>
-          <p:nvPr/>
-        </p:nvPicPr>
-        <p:blipFill>
-          <a:blip r:embed="rId2">
-            <a:extLst>
-              <a:ext uri="{28A0092B-C50C-407E-A947-70E740481C1C}">
-                <a14:useLocalDpi xmlns:a14="http://schemas.microsoft.com/office/drawing/2010/main" val="0"/>
-              </a:ext>
-            </a:extLst>
-          </a:blip>
-          <a:srcRect/>
-          <a:stretch>
-            <a:fillRect/>
-          </a:stretch>
-        </p:blipFill>
-        <p:spPr bwMode="auto">
-          <a:xfrm>
-            <a:off x="852895" y="1709730"/>
-            <a:ext cx="4988689" cy="3563349"/>
-          </a:xfrm>
-          <a:prstGeom prst="rect">
-            <a:avLst/>
-          </a:prstGeom>
-          <a:noFill/>
-          <a:extLst>
-            <a:ext uri="{909E8E84-426E-40DD-AFC4-6F175D3DCCD1}">
-              <a14:hiddenFill xmlns:a14="http://schemas.microsoft.com/office/drawing/2010/main">
-                <a:solidFill>
-                  <a:srgbClr val="FFFFFF"/>
-                </a:solidFill>
-              </a14:hiddenFill>
-            </a:ext>
-          </a:extLst>
-        </p:spPr>
-      </p:pic>
-      <p:sp>
-        <p:nvSpPr>
-          <p:cNvPr id="2" name="TextBox 1">
-            <a:extLst>
-              <a:ext uri="{FF2B5EF4-FFF2-40B4-BE49-F238E27FC236}">
-                <a16:creationId xmlns:a16="http://schemas.microsoft.com/office/drawing/2014/main" id="{4B1081CD-4620-0C0C-5EE1-C1973659F213}"/>
-              </a:ext>
-            </a:extLst>
-          </p:cNvPr>
-          <p:cNvSpPr txBox="1"/>
-          <p:nvPr/>
-        </p:nvSpPr>
-        <p:spPr>
-          <a:xfrm>
-            <a:off x="1856715" y="1709730"/>
-            <a:ext cx="3189395" cy="461665"/>
-          </a:xfrm>
-          <a:prstGeom prst="rect">
-            <a:avLst/>
-          </a:prstGeom>
-          <a:solidFill>
-            <a:schemeClr val="bg1"/>
-          </a:solidFill>
-        </p:spPr>
-        <p:txBody>
-          <a:bodyPr wrap="square" rtlCol="0">
-            <a:spAutoFit/>
-          </a:bodyPr>
-          <a:lstStyle/>
-          <a:p>
-            <a:pPr algn="ctr"/>
-            <a:r>
-              <a:rPr lang="en-US" sz="1200" b="1" dirty="0">
-                <a:latin typeface="Arial" panose="020B0604020202020204" pitchFamily="34" charset="0"/>
-                <a:cs typeface="Arial" panose="020B0604020202020204" pitchFamily="34" charset="0"/>
-              </a:rPr>
-              <a:t>Residuals vs Fitted Plot of SARIMA First-Order Differenced Model</a:t>
-            </a:r>
-          </a:p>
-        </p:txBody>
-      </p:sp>
-      <p:pic>
-        <p:nvPicPr>
-          <p:cNvPr id="3" name="Picture 2">
-            <a:extLst>
-              <a:ext uri="{FF2B5EF4-FFF2-40B4-BE49-F238E27FC236}">
-                <a16:creationId xmlns:a16="http://schemas.microsoft.com/office/drawing/2014/main" id="{90BE9E13-7D1E-D5C4-BA2A-7F7396738260}"/>
-              </a:ext>
-            </a:extLst>
-          </p:cNvPr>
-          <p:cNvPicPr>
-            <a:picLocks noChangeAspect="1" noChangeArrowheads="1"/>
-          </p:cNvPicPr>
-          <p:nvPr/>
-        </p:nvPicPr>
-        <p:blipFill>
-          <a:blip r:embed="rId3">
-            <a:extLst>
-              <a:ext uri="{28A0092B-C50C-407E-A947-70E740481C1C}">
-                <a14:useLocalDpi xmlns:a14="http://schemas.microsoft.com/office/drawing/2010/main" val="0"/>
-              </a:ext>
-            </a:extLst>
-          </a:blip>
-          <a:srcRect/>
-          <a:stretch>
-            <a:fillRect/>
-          </a:stretch>
-        </p:blipFill>
-        <p:spPr bwMode="auto">
-          <a:xfrm>
-            <a:off x="5681828" y="1709730"/>
-            <a:ext cx="4988689" cy="3563349"/>
-          </a:xfrm>
-          <a:prstGeom prst="rect">
-            <a:avLst/>
-          </a:prstGeom>
-          <a:noFill/>
-          <a:extLst>
-            <a:ext uri="{909E8E84-426E-40DD-AFC4-6F175D3DCCD1}">
-              <a14:hiddenFill xmlns:a14="http://schemas.microsoft.com/office/drawing/2010/main">
-                <a:solidFill>
-                  <a:srgbClr val="FFFFFF"/>
-                </a:solidFill>
-              </a14:hiddenFill>
-            </a:ext>
-          </a:extLst>
-        </p:spPr>
-      </p:pic>
-      <p:sp>
-        <p:nvSpPr>
-          <p:cNvPr id="4" name="TextBox 3">
-            <a:extLst>
-              <a:ext uri="{FF2B5EF4-FFF2-40B4-BE49-F238E27FC236}">
-                <a16:creationId xmlns:a16="http://schemas.microsoft.com/office/drawing/2014/main" id="{6FA80158-2E60-ABE8-D707-2D999F59A858}"/>
-              </a:ext>
-            </a:extLst>
-          </p:cNvPr>
-          <p:cNvSpPr txBox="1"/>
-          <p:nvPr/>
-        </p:nvSpPr>
-        <p:spPr>
-          <a:xfrm>
-            <a:off x="6685647" y="1709730"/>
-            <a:ext cx="3308226" cy="461665"/>
-          </a:xfrm>
-          <a:prstGeom prst="rect">
-            <a:avLst/>
-          </a:prstGeom>
-          <a:solidFill>
-            <a:schemeClr val="bg1"/>
-          </a:solidFill>
-        </p:spPr>
-        <p:txBody>
-          <a:bodyPr wrap="square" rtlCol="0">
-            <a:spAutoFit/>
-          </a:bodyPr>
-          <a:lstStyle/>
-          <a:p>
-            <a:pPr algn="ctr"/>
-            <a:r>
-              <a:rPr lang="en-US" sz="1200" b="1" dirty="0">
-                <a:latin typeface="Arial" panose="020B0604020202020204" pitchFamily="34" charset="0"/>
-                <a:cs typeface="Arial" panose="020B0604020202020204" pitchFamily="34" charset="0"/>
-              </a:rPr>
-              <a:t>Residuals vs Fitted Plot of SARIMA Box-Cox Differenced Model</a:t>
-            </a:r>
-          </a:p>
-        </p:txBody>
-      </p:sp>
-      <p:pic>
-        <p:nvPicPr>
-          <p:cNvPr id="5" name="Picture 2">
-            <a:extLst>
-              <a:ext uri="{FF2B5EF4-FFF2-40B4-BE49-F238E27FC236}">
-                <a16:creationId xmlns:a16="http://schemas.microsoft.com/office/drawing/2014/main" id="{93A3F20C-DA49-0492-05E6-219880FEDD01}"/>
-              </a:ext>
-            </a:extLst>
-          </p:cNvPr>
-          <p:cNvPicPr>
-            <a:picLocks noChangeAspect="1" noChangeArrowheads="1"/>
-          </p:cNvPicPr>
-          <p:nvPr/>
-        </p:nvPicPr>
-        <p:blipFill>
-          <a:blip r:embed="rId4">
-            <a:extLst>
-              <a:ext uri="{28A0092B-C50C-407E-A947-70E740481C1C}">
-                <a14:useLocalDpi xmlns:a14="http://schemas.microsoft.com/office/drawing/2010/main" val="0"/>
-              </a:ext>
-            </a:extLst>
-          </a:blip>
-          <a:srcRect/>
-          <a:stretch>
-            <a:fillRect/>
-          </a:stretch>
-        </p:blipFill>
-        <p:spPr bwMode="auto">
-          <a:xfrm>
-            <a:off x="10495787" y="1709730"/>
-            <a:ext cx="4988688" cy="3563348"/>
-          </a:xfrm>
-          <a:prstGeom prst="rect">
-            <a:avLst/>
-          </a:prstGeom>
-          <a:noFill/>
-          <a:extLst>
-            <a:ext uri="{909E8E84-426E-40DD-AFC4-6F175D3DCCD1}">
-              <a14:hiddenFill xmlns:a14="http://schemas.microsoft.com/office/drawing/2010/main">
-                <a:solidFill>
-                  <a:srgbClr val="FFFFFF"/>
-                </a:solidFill>
-              </a14:hiddenFill>
-            </a:ext>
-          </a:extLst>
-        </p:spPr>
-      </p:pic>
-      <p:sp>
-        <p:nvSpPr>
-          <p:cNvPr id="6" name="TextBox 5">
-            <a:extLst>
-              <a:ext uri="{FF2B5EF4-FFF2-40B4-BE49-F238E27FC236}">
-                <a16:creationId xmlns:a16="http://schemas.microsoft.com/office/drawing/2014/main" id="{1FE91A5D-BEB5-62FC-8D58-B4B4B21D2759}"/>
-              </a:ext>
-            </a:extLst>
-          </p:cNvPr>
-          <p:cNvSpPr txBox="1"/>
-          <p:nvPr/>
-        </p:nvSpPr>
-        <p:spPr>
-          <a:xfrm>
-            <a:off x="11514581" y="1709730"/>
-            <a:ext cx="3133497" cy="461665"/>
-          </a:xfrm>
-          <a:prstGeom prst="rect">
-            <a:avLst/>
-          </a:prstGeom>
-          <a:solidFill>
-            <a:schemeClr val="bg1"/>
-          </a:solidFill>
-        </p:spPr>
-        <p:txBody>
-          <a:bodyPr wrap="square" rtlCol="0">
-            <a:spAutoFit/>
-          </a:bodyPr>
-          <a:lstStyle/>
-          <a:p>
-            <a:pPr algn="ctr"/>
-            <a:r>
-              <a:rPr lang="en-US" sz="1200" b="1" dirty="0">
-                <a:latin typeface="Arial" panose="020B0604020202020204" pitchFamily="34" charset="0"/>
-                <a:cs typeface="Arial" panose="020B0604020202020204" pitchFamily="34" charset="0"/>
-              </a:rPr>
-              <a:t>Residuals vs Fitted Plot of SARIMA Seasonal Differenced Model</a:t>
-            </a:r>
-          </a:p>
-        </p:txBody>
-      </p:sp>
-    </p:spTree>
-    <p:extLst>
-      <p:ext uri="{BB962C8B-B14F-4D97-AF65-F5344CB8AC3E}">
-        <p14:creationId xmlns:p14="http://schemas.microsoft.com/office/powerpoint/2010/main" val="629792253"/>
-      </p:ext>
-    </p:extLst>
-  </p:cSld>
-  <p:clrMapOvr>
-    <a:masterClrMapping/>
-  </p:clrMapOvr>
-</p:sld>
-</file>
-
-<file path=ppt/slides/slide6.xml><?xml version="1.0" encoding="utf-8"?>
-<p:sld xmlns:a="http://schemas.openxmlformats.org/drawingml/2006/main" xmlns:r="http://schemas.openxmlformats.org/officeDocument/2006/relationships" xmlns:p="http://schemas.openxmlformats.org/presentationml/2006/main">
-  <p:cSld>
-    <p:spTree>
-      <p:nvGrpSpPr>
-        <p:cNvPr id="1" name=""/>
-        <p:cNvGrpSpPr/>
-        <p:nvPr/>
-      </p:nvGrpSpPr>
-      <p:grpSpPr>
-        <a:xfrm>
-          <a:off x="0" y="0"/>
-          <a:ext cx="0" cy="0"/>
-          <a:chOff x="0" y="0"/>
-          <a:chExt cx="0" cy="0"/>
-        </a:xfrm>
-      </p:grpSpPr>
-      <p:pic>
-        <p:nvPicPr>
-          <p:cNvPr id="3074" name="Picture 2">
-            <a:extLst>
-              <a:ext uri="{FF2B5EF4-FFF2-40B4-BE49-F238E27FC236}">
-                <a16:creationId xmlns:a16="http://schemas.microsoft.com/office/drawing/2014/main" id="{B943A0F4-0C7A-3887-78C7-5631D9FA2E79}"/>
-              </a:ext>
-            </a:extLst>
-          </p:cNvPr>
-          <p:cNvPicPr>
-            <a:picLocks noChangeAspect="1" noChangeArrowheads="1"/>
-          </p:cNvPicPr>
-          <p:nvPr/>
-        </p:nvPicPr>
-        <p:blipFill>
-          <a:blip r:embed="rId2">
-            <a:extLst>
-              <a:ext uri="{28A0092B-C50C-407E-A947-70E740481C1C}">
-                <a14:useLocalDpi xmlns:a14="http://schemas.microsoft.com/office/drawing/2010/main" val="0"/>
-              </a:ext>
-            </a:extLst>
-          </a:blip>
-          <a:srcRect/>
-          <a:stretch>
-            <a:fillRect/>
-          </a:stretch>
-        </p:blipFill>
-        <p:spPr bwMode="auto">
-          <a:xfrm>
-            <a:off x="731837" y="1597827"/>
-            <a:ext cx="5127286" cy="3662347"/>
-          </a:xfrm>
-          <a:prstGeom prst="rect">
-            <a:avLst/>
-          </a:prstGeom>
-          <a:noFill/>
-          <a:extLst>
-            <a:ext uri="{909E8E84-426E-40DD-AFC4-6F175D3DCCD1}">
-              <a14:hiddenFill xmlns:a14="http://schemas.microsoft.com/office/drawing/2010/main">
-                <a:solidFill>
-                  <a:srgbClr val="FFFFFF"/>
-                </a:solidFill>
-              </a14:hiddenFill>
-            </a:ext>
-          </a:extLst>
-        </p:spPr>
-      </p:pic>
-      <p:sp>
-        <p:nvSpPr>
-          <p:cNvPr id="2" name="TextBox 1">
-            <a:extLst>
-              <a:ext uri="{FF2B5EF4-FFF2-40B4-BE49-F238E27FC236}">
-                <a16:creationId xmlns:a16="http://schemas.microsoft.com/office/drawing/2014/main" id="{5DA30CFC-C98E-639D-771A-8A42A3F4BFEA}"/>
-              </a:ext>
-            </a:extLst>
-          </p:cNvPr>
-          <p:cNvSpPr txBox="1"/>
-          <p:nvPr/>
-        </p:nvSpPr>
-        <p:spPr>
-          <a:xfrm>
-            <a:off x="1884568" y="1633071"/>
-            <a:ext cx="3065958" cy="461665"/>
-          </a:xfrm>
-          <a:prstGeom prst="rect">
-            <a:avLst/>
-          </a:prstGeom>
-          <a:solidFill>
-            <a:schemeClr val="bg1"/>
-          </a:solidFill>
-        </p:spPr>
-        <p:txBody>
-          <a:bodyPr wrap="square" rtlCol="0">
-            <a:spAutoFit/>
-          </a:bodyPr>
-          <a:lstStyle/>
-          <a:p>
-            <a:pPr algn="ctr"/>
-            <a:r>
-              <a:rPr lang="en-US" sz="1200" b="1" dirty="0">
-                <a:latin typeface="Arial" panose="020B0604020202020204" pitchFamily="34" charset="0"/>
-                <a:cs typeface="Arial" panose="020B0604020202020204" pitchFamily="34" charset="0"/>
-              </a:rPr>
-              <a:t>Residuals vs Fitted Plot of ARFIMA First-Order Differenced Model</a:t>
-            </a:r>
-          </a:p>
-        </p:txBody>
-      </p:sp>
-      <p:pic>
-        <p:nvPicPr>
-          <p:cNvPr id="5" name="Picture 2">
-            <a:extLst>
-              <a:ext uri="{FF2B5EF4-FFF2-40B4-BE49-F238E27FC236}">
-                <a16:creationId xmlns:a16="http://schemas.microsoft.com/office/drawing/2014/main" id="{16EE7962-3FA2-BE83-18BE-43A8F8586166}"/>
-              </a:ext>
-            </a:extLst>
-          </p:cNvPr>
-          <p:cNvPicPr>
-            <a:picLocks noChangeAspect="1" noChangeArrowheads="1"/>
-          </p:cNvPicPr>
-          <p:nvPr/>
-        </p:nvPicPr>
-        <p:blipFill>
-          <a:blip r:embed="rId3">
-            <a:extLst>
-              <a:ext uri="{28A0092B-C50C-407E-A947-70E740481C1C}">
-                <a14:useLocalDpi xmlns:a14="http://schemas.microsoft.com/office/drawing/2010/main" val="0"/>
-              </a:ext>
-            </a:extLst>
-          </a:blip>
-          <a:srcRect/>
-          <a:stretch>
-            <a:fillRect/>
-          </a:stretch>
-        </p:blipFill>
-        <p:spPr bwMode="auto">
-          <a:xfrm>
-            <a:off x="5608729" y="1633070"/>
-            <a:ext cx="5127285" cy="3662346"/>
-          </a:xfrm>
-          <a:prstGeom prst="rect">
-            <a:avLst/>
-          </a:prstGeom>
-          <a:noFill/>
-          <a:extLst>
-            <a:ext uri="{909E8E84-426E-40DD-AFC4-6F175D3DCCD1}">
-              <a14:hiddenFill xmlns:a14="http://schemas.microsoft.com/office/drawing/2010/main">
-                <a:solidFill>
-                  <a:srgbClr val="FFFFFF"/>
-                </a:solidFill>
-              </a14:hiddenFill>
-            </a:ext>
-          </a:extLst>
-        </p:spPr>
-      </p:pic>
-      <p:sp>
-        <p:nvSpPr>
-          <p:cNvPr id="6" name="TextBox 5">
-            <a:extLst>
-              <a:ext uri="{FF2B5EF4-FFF2-40B4-BE49-F238E27FC236}">
-                <a16:creationId xmlns:a16="http://schemas.microsoft.com/office/drawing/2014/main" id="{E11E1F04-DEDE-A8B8-2004-470947A4E8F1}"/>
-              </a:ext>
-            </a:extLst>
-          </p:cNvPr>
-          <p:cNvSpPr txBox="1"/>
-          <p:nvPr/>
-        </p:nvSpPr>
-        <p:spPr>
-          <a:xfrm>
-            <a:off x="6593667" y="1634111"/>
-            <a:ext cx="3456215" cy="461665"/>
-          </a:xfrm>
-          <a:prstGeom prst="rect">
-            <a:avLst/>
-          </a:prstGeom>
-          <a:solidFill>
-            <a:schemeClr val="bg1"/>
-          </a:solidFill>
-        </p:spPr>
-        <p:txBody>
-          <a:bodyPr wrap="square" rtlCol="0">
-            <a:spAutoFit/>
-          </a:bodyPr>
-          <a:lstStyle/>
-          <a:p>
-            <a:pPr algn="ctr"/>
-            <a:r>
-              <a:rPr lang="en-US" sz="1200" b="1" dirty="0">
-                <a:latin typeface="Arial" panose="020B0604020202020204" pitchFamily="34" charset="0"/>
-                <a:cs typeface="Arial" panose="020B0604020202020204" pitchFamily="34" charset="0"/>
-              </a:rPr>
-              <a:t>Residuals vs Fitted Plot of SARIMA Seasonal Differenced Model</a:t>
-            </a:r>
-          </a:p>
-        </p:txBody>
-      </p:sp>
-      <p:pic>
-        <p:nvPicPr>
-          <p:cNvPr id="7" name="Picture 2">
-            <a:extLst>
-              <a:ext uri="{FF2B5EF4-FFF2-40B4-BE49-F238E27FC236}">
-                <a16:creationId xmlns:a16="http://schemas.microsoft.com/office/drawing/2014/main" id="{B8243183-B8D1-B21B-47B1-799869818064}"/>
-              </a:ext>
-            </a:extLst>
-          </p:cNvPr>
-          <p:cNvPicPr>
-            <a:picLocks noChangeAspect="1" noChangeArrowheads="1"/>
-          </p:cNvPicPr>
-          <p:nvPr/>
-        </p:nvPicPr>
-        <p:blipFill>
-          <a:blip r:embed="rId4">
-            <a:extLst>
-              <a:ext uri="{28A0092B-C50C-407E-A947-70E740481C1C}">
-                <a14:useLocalDpi xmlns:a14="http://schemas.microsoft.com/office/drawing/2010/main" val="0"/>
-              </a:ext>
-            </a:extLst>
-          </a:blip>
-          <a:srcRect/>
-          <a:stretch>
-            <a:fillRect/>
-          </a:stretch>
-        </p:blipFill>
-        <p:spPr bwMode="auto">
-          <a:xfrm>
-            <a:off x="10625619" y="1597827"/>
-            <a:ext cx="5127285" cy="3662347"/>
-          </a:xfrm>
-          <a:prstGeom prst="rect">
-            <a:avLst/>
-          </a:prstGeom>
-          <a:noFill/>
-          <a:extLst>
-            <a:ext uri="{909E8E84-426E-40DD-AFC4-6F175D3DCCD1}">
-              <a14:hiddenFill xmlns:a14="http://schemas.microsoft.com/office/drawing/2010/main">
-                <a:solidFill>
-                  <a:srgbClr val="FFFFFF"/>
-                </a:solidFill>
-              </a14:hiddenFill>
-            </a:ext>
-          </a:extLst>
-        </p:spPr>
-      </p:pic>
-      <p:sp>
-        <p:nvSpPr>
-          <p:cNvPr id="8" name="TextBox 7">
-            <a:extLst>
-              <a:ext uri="{FF2B5EF4-FFF2-40B4-BE49-F238E27FC236}">
-                <a16:creationId xmlns:a16="http://schemas.microsoft.com/office/drawing/2014/main" id="{D537E11F-F2CB-7375-9AA8-850A279A7AFB}"/>
-              </a:ext>
-            </a:extLst>
-          </p:cNvPr>
-          <p:cNvSpPr txBox="1"/>
-          <p:nvPr/>
-        </p:nvSpPr>
-        <p:spPr>
-          <a:xfrm>
-            <a:off x="11636744" y="1633070"/>
-            <a:ext cx="3374656" cy="461665"/>
-          </a:xfrm>
-          <a:prstGeom prst="rect">
-            <a:avLst/>
-          </a:prstGeom>
-          <a:solidFill>
-            <a:schemeClr val="bg1"/>
-          </a:solidFill>
-        </p:spPr>
-        <p:txBody>
-          <a:bodyPr wrap="square" rtlCol="0">
-            <a:spAutoFit/>
-          </a:bodyPr>
-          <a:lstStyle/>
-          <a:p>
-            <a:pPr algn="ctr"/>
-            <a:r>
-              <a:rPr lang="en-US" sz="1200" b="1" dirty="0">
-                <a:latin typeface="Arial" panose="020B0604020202020204" pitchFamily="34" charset="0"/>
-                <a:cs typeface="Arial" panose="020B0604020202020204" pitchFamily="34" charset="0"/>
-              </a:rPr>
-              <a:t>Residuals vs Fitted Plot of ARFIMA Seasonal Differenced Model</a:t>
-            </a:r>
-          </a:p>
-        </p:txBody>
-      </p:sp>
-    </p:spTree>
-    <p:extLst>
-      <p:ext uri="{BB962C8B-B14F-4D97-AF65-F5344CB8AC3E}">
-        <p14:creationId xmlns:p14="http://schemas.microsoft.com/office/powerpoint/2010/main" val="4045099582"/>
-      </p:ext>
-    </p:extLst>
-  </p:cSld>
-  <p:clrMapOvr>
-    <a:masterClrMapping/>
-  </p:clrMapOvr>
-</p:sld>
-</file>
-
-<file path=ppt/slides/slide7.xml><?xml version="1.0" encoding="utf-8"?>
-<p:sld xmlns:a="http://schemas.openxmlformats.org/drawingml/2006/main" xmlns:r="http://schemas.openxmlformats.org/officeDocument/2006/relationships" xmlns:p="http://schemas.openxmlformats.org/presentationml/2006/main">
-  <p:cSld>
-    <p:spTree>
-      <p:nvGrpSpPr>
-        <p:cNvPr id="1" name=""/>
-        <p:cNvGrpSpPr/>
-        <p:nvPr/>
-      </p:nvGrpSpPr>
-      <p:grpSpPr>
-        <a:xfrm>
-          <a:off x="0" y="0"/>
-          <a:ext cx="0" cy="0"/>
-          <a:chOff x="0" y="0"/>
-          <a:chExt cx="0" cy="0"/>
-        </a:xfrm>
-      </p:grpSpPr>
-      <p:pic>
-        <p:nvPicPr>
-          <p:cNvPr id="4098" name="Picture 2">
-            <a:extLst>
-              <a:ext uri="{FF2B5EF4-FFF2-40B4-BE49-F238E27FC236}">
-                <a16:creationId xmlns:a16="http://schemas.microsoft.com/office/drawing/2014/main" id="{33E8A850-08DD-C7B0-69A2-2FD3719C2581}"/>
-              </a:ext>
-            </a:extLst>
-          </p:cNvPr>
-          <p:cNvPicPr>
-            <a:picLocks noChangeAspect="1" noChangeArrowheads="1"/>
-          </p:cNvPicPr>
-          <p:nvPr/>
-        </p:nvPicPr>
-        <p:blipFill>
-          <a:blip r:embed="rId2">
-            <a:extLst>
-              <a:ext uri="{28A0092B-C50C-407E-A947-70E740481C1C}">
-                <a14:useLocalDpi xmlns:a14="http://schemas.microsoft.com/office/drawing/2010/main" val="0"/>
-              </a:ext>
-            </a:extLst>
-          </a:blip>
-          <a:srcRect/>
-          <a:stretch>
-            <a:fillRect/>
-          </a:stretch>
-        </p:blipFill>
-        <p:spPr bwMode="auto">
-          <a:xfrm>
-            <a:off x="3787249" y="342638"/>
-            <a:ext cx="8641814" cy="6172724"/>
-          </a:xfrm>
-          <a:prstGeom prst="rect">
-            <a:avLst/>
-          </a:prstGeom>
-          <a:noFill/>
-          <a:extLst>
-            <a:ext uri="{909E8E84-426E-40DD-AFC4-6F175D3DCCD1}">
-              <a14:hiddenFill xmlns:a14="http://schemas.microsoft.com/office/drawing/2010/main">
-                <a:solidFill>
-                  <a:srgbClr val="FFFFFF"/>
-                </a:solidFill>
-              </a14:hiddenFill>
-            </a:ext>
-          </a:extLst>
-        </p:spPr>
-      </p:pic>
-      <p:sp>
-        <p:nvSpPr>
-          <p:cNvPr id="2" name="TextBox 1">
-            <a:extLst>
-              <a:ext uri="{FF2B5EF4-FFF2-40B4-BE49-F238E27FC236}">
-                <a16:creationId xmlns:a16="http://schemas.microsoft.com/office/drawing/2014/main" id="{BA5900C0-F9D0-1674-B18B-33945C16C404}"/>
-              </a:ext>
-            </a:extLst>
-          </p:cNvPr>
-          <p:cNvSpPr txBox="1"/>
-          <p:nvPr/>
-        </p:nvSpPr>
-        <p:spPr>
-          <a:xfrm>
-            <a:off x="5592639" y="616950"/>
-            <a:ext cx="5266063" cy="646331"/>
-          </a:xfrm>
-          <a:prstGeom prst="rect">
-            <a:avLst/>
-          </a:prstGeom>
-          <a:solidFill>
-            <a:schemeClr val="bg1"/>
-          </a:solidFill>
-        </p:spPr>
-        <p:txBody>
-          <a:bodyPr wrap="square" rtlCol="0">
-            <a:spAutoFit/>
-          </a:bodyPr>
-          <a:lstStyle/>
-          <a:p>
-            <a:pPr algn="ctr"/>
-            <a:r>
-              <a:rPr lang="en-US" b="1" dirty="0">
-                <a:latin typeface="Arial" panose="020B0604020202020204" pitchFamily="34" charset="0"/>
-                <a:cs typeface="Arial" panose="020B0604020202020204" pitchFamily="34" charset="0"/>
-              </a:rPr>
-              <a:t>Residuals vs Fitted Plot of ARIMA Box-Cox Differenced Model</a:t>
-            </a:r>
-          </a:p>
-        </p:txBody>
-      </p:sp>
-    </p:spTree>
-    <p:extLst>
-      <p:ext uri="{BB962C8B-B14F-4D97-AF65-F5344CB8AC3E}">
-        <p14:creationId xmlns:p14="http://schemas.microsoft.com/office/powerpoint/2010/main" val="636949121"/>
-      </p:ext>
-    </p:extLst>
-  </p:cSld>
-  <p:clrMapOvr>
-    <a:masterClrMapping/>
-  </p:clrMapOvr>
-</p:sld>
-</file>
-
-<file path=ppt/slides/slide8.xml><?xml version="1.0" encoding="utf-8"?>
-<p:sld xmlns:a="http://schemas.openxmlformats.org/drawingml/2006/main" xmlns:r="http://schemas.openxmlformats.org/officeDocument/2006/relationships" xmlns:p="http://schemas.openxmlformats.org/presentationml/2006/main">
-  <p:cSld>
-    <p:spTree>
-      <p:nvGrpSpPr>
-        <p:cNvPr id="1" name=""/>
-        <p:cNvGrpSpPr/>
-        <p:nvPr/>
-      </p:nvGrpSpPr>
-      <p:grpSpPr>
-        <a:xfrm>
-          <a:off x="0" y="0"/>
-          <a:ext cx="0" cy="0"/>
-          <a:chOff x="0" y="0"/>
-          <a:chExt cx="0" cy="0"/>
-        </a:xfrm>
-      </p:grpSpPr>
-      <p:pic>
-        <p:nvPicPr>
-          <p:cNvPr id="5122" name="Picture 2">
-            <a:extLst>
-              <a:ext uri="{FF2B5EF4-FFF2-40B4-BE49-F238E27FC236}">
-                <a16:creationId xmlns:a16="http://schemas.microsoft.com/office/drawing/2014/main" id="{31FAB0AF-A93C-B09A-F44E-13C4729567E1}"/>
-              </a:ext>
-            </a:extLst>
-          </p:cNvPr>
-          <p:cNvPicPr>
-            <a:picLocks noChangeAspect="1" noChangeArrowheads="1"/>
-          </p:cNvPicPr>
-          <p:nvPr/>
-        </p:nvPicPr>
-        <p:blipFill>
-          <a:blip r:embed="rId2">
-            <a:extLst>
-              <a:ext uri="{28A0092B-C50C-407E-A947-70E740481C1C}">
-                <a14:useLocalDpi xmlns:a14="http://schemas.microsoft.com/office/drawing/2010/main" val="0"/>
-              </a:ext>
-            </a:extLst>
-          </a:blip>
-          <a:srcRect/>
-          <a:stretch>
-            <a:fillRect/>
-          </a:stretch>
-        </p:blipFill>
-        <p:spPr bwMode="auto">
-          <a:xfrm>
-            <a:off x="3928611" y="443611"/>
-            <a:ext cx="8359093" cy="5970781"/>
-          </a:xfrm>
-          <a:prstGeom prst="rect">
-            <a:avLst/>
-          </a:prstGeom>
-          <a:noFill/>
-          <a:extLst>
-            <a:ext uri="{909E8E84-426E-40DD-AFC4-6F175D3DCCD1}">
-              <a14:hiddenFill xmlns:a14="http://schemas.microsoft.com/office/drawing/2010/main">
-                <a:solidFill>
-                  <a:srgbClr val="FFFFFF"/>
-                </a:solidFill>
-              </a14:hiddenFill>
-            </a:ext>
-          </a:extLst>
-        </p:spPr>
-      </p:pic>
-      <p:sp>
-        <p:nvSpPr>
-          <p:cNvPr id="2" name="TextBox 1">
-            <a:extLst>
-              <a:ext uri="{FF2B5EF4-FFF2-40B4-BE49-F238E27FC236}">
-                <a16:creationId xmlns:a16="http://schemas.microsoft.com/office/drawing/2014/main" id="{233A3B0A-FD5A-DF26-7500-29A53F3C444F}"/>
-              </a:ext>
-            </a:extLst>
-          </p:cNvPr>
-          <p:cNvSpPr txBox="1"/>
-          <p:nvPr/>
-        </p:nvSpPr>
-        <p:spPr>
-          <a:xfrm>
-            <a:off x="5647724" y="672035"/>
-            <a:ext cx="5266063" cy="646331"/>
-          </a:xfrm>
-          <a:prstGeom prst="rect">
-            <a:avLst/>
-          </a:prstGeom>
-          <a:solidFill>
-            <a:schemeClr val="bg1"/>
-          </a:solidFill>
-        </p:spPr>
-        <p:txBody>
-          <a:bodyPr wrap="square" rtlCol="0">
-            <a:spAutoFit/>
-          </a:bodyPr>
-          <a:lstStyle/>
-          <a:p>
-            <a:pPr algn="ctr"/>
-            <a:r>
-              <a:rPr lang="en-US" b="1" dirty="0">
-                <a:latin typeface="Arial" panose="020B0604020202020204" pitchFamily="34" charset="0"/>
-                <a:cs typeface="Arial" panose="020B0604020202020204" pitchFamily="34" charset="0"/>
-              </a:rPr>
-              <a:t>Residuals vs Fitted Plot of SARIMA Box-Cox Differenced Model</a:t>
-            </a:r>
-          </a:p>
-        </p:txBody>
-      </p:sp>
-    </p:spTree>
-    <p:extLst>
-      <p:ext uri="{BB962C8B-B14F-4D97-AF65-F5344CB8AC3E}">
-        <p14:creationId xmlns:p14="http://schemas.microsoft.com/office/powerpoint/2010/main" val="643277098"/>
-      </p:ext>
-    </p:extLst>
-  </p:cSld>
-  <p:clrMapOvr>
-    <a:masterClrMapping/>
-  </p:clrMapOvr>
-</p:sld>
-</file>
-
-<file path=ppt/slides/slide9.xml><?xml version="1.0" encoding="utf-8"?>
-<p:sld xmlns:a="http://schemas.openxmlformats.org/drawingml/2006/main" xmlns:r="http://schemas.openxmlformats.org/officeDocument/2006/relationships" xmlns:p="http://schemas.openxmlformats.org/presentationml/2006/main">
-  <p:cSld>
-    <p:spTree>
-      <p:nvGrpSpPr>
-        <p:cNvPr id="1" name=""/>
-        <p:cNvGrpSpPr/>
-        <p:nvPr/>
-      </p:nvGrpSpPr>
-      <p:grpSpPr>
-        <a:xfrm>
-          <a:off x="0" y="0"/>
-          <a:ext cx="0" cy="0"/>
-          <a:chOff x="0" y="0"/>
-          <a:chExt cx="0" cy="0"/>
-        </a:xfrm>
-      </p:grpSpPr>
-      <p:pic>
-        <p:nvPicPr>
-          <p:cNvPr id="6146" name="Picture 2">
-            <a:extLst>
-              <a:ext uri="{FF2B5EF4-FFF2-40B4-BE49-F238E27FC236}">
-                <a16:creationId xmlns:a16="http://schemas.microsoft.com/office/drawing/2014/main" id="{4BF1E90C-C431-8FCD-E701-4AF66E2FE548}"/>
-              </a:ext>
-            </a:extLst>
-          </p:cNvPr>
-          <p:cNvPicPr>
-            <a:picLocks noChangeAspect="1" noChangeArrowheads="1"/>
-          </p:cNvPicPr>
-          <p:nvPr/>
-        </p:nvPicPr>
-        <p:blipFill>
-          <a:blip r:embed="rId2">
-            <a:extLst>
-              <a:ext uri="{28A0092B-C50C-407E-A947-70E740481C1C}">
-                <a14:useLocalDpi xmlns:a14="http://schemas.microsoft.com/office/drawing/2010/main" val="0"/>
-              </a:ext>
-            </a:extLst>
-          </a:blip>
-          <a:srcRect/>
-          <a:stretch>
-            <a:fillRect/>
-          </a:stretch>
-        </p:blipFill>
-        <p:spPr bwMode="auto">
-          <a:xfrm>
-            <a:off x="4046071" y="527511"/>
-            <a:ext cx="8124173" cy="5802981"/>
-          </a:xfrm>
-          <a:prstGeom prst="rect">
-            <a:avLst/>
-          </a:prstGeom>
-          <a:noFill/>
-          <a:extLst>
-            <a:ext uri="{909E8E84-426E-40DD-AFC4-6F175D3DCCD1}">
-              <a14:hiddenFill xmlns:a14="http://schemas.microsoft.com/office/drawing/2010/main">
-                <a:solidFill>
-                  <a:srgbClr val="FFFFFF"/>
-                </a:solidFill>
-              </a14:hiddenFill>
-            </a:ext>
-          </a:extLst>
-        </p:spPr>
-      </p:pic>
-      <p:sp>
-        <p:nvSpPr>
-          <p:cNvPr id="2" name="TextBox 1">
-            <a:extLst>
-              <a:ext uri="{FF2B5EF4-FFF2-40B4-BE49-F238E27FC236}">
-                <a16:creationId xmlns:a16="http://schemas.microsoft.com/office/drawing/2014/main" id="{4B8554EF-6CAB-D320-EDD6-3F5FF69E2842}"/>
-              </a:ext>
-            </a:extLst>
-          </p:cNvPr>
-          <p:cNvSpPr txBox="1"/>
-          <p:nvPr/>
-        </p:nvSpPr>
-        <p:spPr>
-          <a:xfrm>
-            <a:off x="5713824" y="727118"/>
-            <a:ext cx="5266063" cy="646331"/>
-          </a:xfrm>
-          <a:prstGeom prst="rect">
-            <a:avLst/>
-          </a:prstGeom>
-          <a:solidFill>
-            <a:schemeClr val="bg1"/>
-          </a:solidFill>
-        </p:spPr>
-        <p:txBody>
-          <a:bodyPr wrap="square" rtlCol="0">
-            <a:spAutoFit/>
-          </a:bodyPr>
-          <a:lstStyle/>
-          <a:p>
-            <a:pPr algn="ctr"/>
-            <a:r>
-              <a:rPr lang="en-US" b="1" dirty="0">
-                <a:latin typeface="Arial" panose="020B0604020202020204" pitchFamily="34" charset="0"/>
-                <a:cs typeface="Arial" panose="020B0604020202020204" pitchFamily="34" charset="0"/>
-              </a:rPr>
-              <a:t>Residuals vs Fitted Plot of ARFIMA Box-Cox Differenced Model</a:t>
-            </a:r>
-          </a:p>
-        </p:txBody>
-      </p:sp>
-    </p:spTree>
-    <p:extLst>
-      <p:ext uri="{BB962C8B-B14F-4D97-AF65-F5344CB8AC3E}">
-        <p14:creationId xmlns:p14="http://schemas.microsoft.com/office/powerpoint/2010/main" val="505314361"/>
+        <p14:creationId xmlns:p14="http://schemas.microsoft.com/office/powerpoint/2010/main" val="785048709"/>
       </p:ext>
     </p:extLst>
   </p:cSld>

--- a/ARIMA_HJ/Plots/arima plots.pptx
+++ b/ARIMA_HJ/Plots/arima plots.pptx
@@ -2978,10 +2978,10 @@
       </p:grpSpPr>
       <p:pic>
         <p:nvPicPr>
-          <p:cNvPr id="4" name="Picture 3" descr="A graph of a number of objects&#10;&#10;AI-generated content may be incorrect.">
+          <p:cNvPr id="12" name="Picture 11" descr="A graph with a line&#10;&#10;AI-generated content may be incorrect.">
             <a:extLst>
               <a:ext uri="{FF2B5EF4-FFF2-40B4-BE49-F238E27FC236}">
-                <a16:creationId xmlns:a16="http://schemas.microsoft.com/office/drawing/2014/main" id="{D8B042E6-7E3D-20FB-9ABC-ADB3211B7434}"/>
+                <a16:creationId xmlns:a16="http://schemas.microsoft.com/office/drawing/2014/main" id="{F83270CB-4656-CC82-F785-293ECDCB440C}"/>
               </a:ext>
             </a:extLst>
           </p:cNvPr>
@@ -2992,14 +2992,13 @@
         </p:nvPicPr>
         <p:blipFill>
           <a:blip r:embed="rId2"/>
-          <a:stretch>
-            <a:fillRect/>
-          </a:stretch>
+          <a:srcRect r="3108"/>
+          <a:stretch/>
         </p:blipFill>
         <p:spPr>
           <a:xfrm>
-            <a:off x="10408016" y="1873824"/>
-            <a:ext cx="5590381" cy="3450064"/>
+            <a:off x="164306" y="1790700"/>
+            <a:ext cx="5144294" cy="3276600"/>
           </a:xfrm>
           <a:prstGeom prst="rect">
             <a:avLst/>
@@ -3008,10 +3007,10 @@
       </p:pic>
       <p:pic>
         <p:nvPicPr>
-          <p:cNvPr id="6" name="Picture 5" descr="A graph of a number of objects&#10;&#10;AI-generated content may be incorrect.">
+          <p:cNvPr id="14" name="Picture 13" descr="A graph with a line&#10;&#10;AI-generated content may be incorrect.">
             <a:extLst>
               <a:ext uri="{FF2B5EF4-FFF2-40B4-BE49-F238E27FC236}">
-                <a16:creationId xmlns:a16="http://schemas.microsoft.com/office/drawing/2014/main" id="{A8E0A1FF-86F1-9A32-EEC0-6A837A27C832}"/>
+                <a16:creationId xmlns:a16="http://schemas.microsoft.com/office/drawing/2014/main" id="{D8DEB048-8C89-3E41-ADE8-8A967412172C}"/>
               </a:ext>
             </a:extLst>
           </p:cNvPr>
@@ -3022,13 +3021,13 @@
         </p:nvPicPr>
         <p:blipFill>
           <a:blip r:embed="rId3"/>
-          <a:srcRect r="2999"/>
+          <a:srcRect r="3108"/>
           <a:stretch/>
         </p:blipFill>
         <p:spPr>
           <a:xfrm>
-            <a:off x="5181601" y="1936281"/>
-            <a:ext cx="5226415" cy="3325150"/>
+            <a:off x="5536009" y="1790700"/>
+            <a:ext cx="5144294" cy="3276600"/>
           </a:xfrm>
           <a:prstGeom prst="rect">
             <a:avLst/>
@@ -3037,10 +3036,10 @@
       </p:pic>
       <p:pic>
         <p:nvPicPr>
-          <p:cNvPr id="8" name="Picture 7" descr="A graph of a number of lines&#10;&#10;AI-generated content may be incorrect.">
+          <p:cNvPr id="16" name="Picture 15" descr="A graph with a line&#10;&#10;AI-generated content may be incorrect.">
             <a:extLst>
               <a:ext uri="{FF2B5EF4-FFF2-40B4-BE49-F238E27FC236}">
-                <a16:creationId xmlns:a16="http://schemas.microsoft.com/office/drawing/2014/main" id="{702382B6-46CA-0B94-3BBA-FC37CED5439B}"/>
+                <a16:creationId xmlns:a16="http://schemas.microsoft.com/office/drawing/2014/main" id="{6671708C-3DBB-1378-E27D-0B43D08A3C2C}"/>
               </a:ext>
             </a:extLst>
           </p:cNvPr>
@@ -3051,13 +3050,13 @@
         </p:nvPicPr>
         <p:blipFill>
           <a:blip r:embed="rId4"/>
-          <a:srcRect r="3098"/>
+          <a:srcRect r="3108"/>
           <a:stretch/>
         </p:blipFill>
         <p:spPr>
           <a:xfrm>
-            <a:off x="227809" y="2021384"/>
-            <a:ext cx="4953792" cy="3154943"/>
+            <a:off x="10907712" y="1790700"/>
+            <a:ext cx="5144294" cy="3276601"/>
           </a:xfrm>
           <a:prstGeom prst="rect">
             <a:avLst/>

--- a/ARIMA_HJ/Plots/arima plots.pptx
+++ b/ARIMA_HJ/Plots/arima plots.pptx
@@ -9,6 +9,7 @@
     <p:sldId id="260" r:id="rId3"/>
     <p:sldId id="278" r:id="rId4"/>
     <p:sldId id="279" r:id="rId5"/>
+    <p:sldId id="280" r:id="rId6"/>
   </p:sldIdLst>
   <p:sldSz cx="16216313" cy="6858000"/>
   <p:notesSz cx="6858000" cy="9144000"/>
@@ -3194,7 +3195,7 @@
 </file>
 
 <file path=ppt/slides/slide3.xml><?xml version="1.0" encoding="utf-8"?>
-<p:sld xmlns:a="http://schemas.openxmlformats.org/drawingml/2006/main" xmlns:r="http://schemas.openxmlformats.org/officeDocument/2006/relationships" xmlns:p="http://schemas.openxmlformats.org/presentationml/2006/main">
+<p:sld xmlns:a="http://schemas.openxmlformats.org/drawingml/2006/main" xmlns:r="http://schemas.openxmlformats.org/officeDocument/2006/relationships" xmlns:p="http://schemas.openxmlformats.org/presentationml/2006/main" show="0">
   <p:cSld>
     <p:spTree>
       <p:nvGrpSpPr>
@@ -3210,6 +3211,96 @@
           <a:chExt cx="0" cy="0"/>
         </a:xfrm>
       </p:grpSpPr>
+      <p:pic>
+        <p:nvPicPr>
+          <p:cNvPr id="3" name="Picture 2" descr="A graph of a graph showing the growth of a number of people&#10;&#10;AI-generated content may be incorrect.">
+            <a:extLst>
+              <a:ext uri="{FF2B5EF4-FFF2-40B4-BE49-F238E27FC236}">
+                <a16:creationId xmlns:a16="http://schemas.microsoft.com/office/drawing/2014/main" id="{3A3E5FB4-CC83-0A92-2376-50297C020E1F}"/>
+              </a:ext>
+            </a:extLst>
+          </p:cNvPr>
+          <p:cNvPicPr>
+            <a:picLocks noChangeAspect="1"/>
+          </p:cNvPicPr>
+          <p:nvPr/>
+        </p:nvPicPr>
+        <p:blipFill>
+          <a:blip r:embed="rId2"/>
+          <a:stretch>
+            <a:fillRect/>
+          </a:stretch>
+        </p:blipFill>
+        <p:spPr>
+          <a:xfrm>
+            <a:off x="177006" y="1916075"/>
+            <a:ext cx="5372894" cy="3315844"/>
+          </a:xfrm>
+          <a:prstGeom prst="rect">
+            <a:avLst/>
+          </a:prstGeom>
+        </p:spPr>
+      </p:pic>
+      <p:pic>
+        <p:nvPicPr>
+          <p:cNvPr id="5" name="Picture 4" descr="A graph of a graph showing the growth of a number of people&#10;&#10;AI-generated content may be incorrect.">
+            <a:extLst>
+              <a:ext uri="{FF2B5EF4-FFF2-40B4-BE49-F238E27FC236}">
+                <a16:creationId xmlns:a16="http://schemas.microsoft.com/office/drawing/2014/main" id="{B9D2FA3A-A505-82B9-619D-A5A998A131E8}"/>
+              </a:ext>
+            </a:extLst>
+          </p:cNvPr>
+          <p:cNvPicPr>
+            <a:picLocks noChangeAspect="1"/>
+          </p:cNvPicPr>
+          <p:nvPr/>
+        </p:nvPicPr>
+        <p:blipFill>
+          <a:blip r:embed="rId3"/>
+          <a:stretch>
+            <a:fillRect/>
+          </a:stretch>
+        </p:blipFill>
+        <p:spPr>
+          <a:xfrm>
+            <a:off x="10843419" y="1916075"/>
+            <a:ext cx="5372894" cy="3315844"/>
+          </a:xfrm>
+          <a:prstGeom prst="rect">
+            <a:avLst/>
+          </a:prstGeom>
+        </p:spPr>
+      </p:pic>
+      <p:pic>
+        <p:nvPicPr>
+          <p:cNvPr id="7" name="Picture 6" descr="A graph of a graph showing the number of the same graph&#10;&#10;AI-generated content may be incorrect.">
+            <a:extLst>
+              <a:ext uri="{FF2B5EF4-FFF2-40B4-BE49-F238E27FC236}">
+                <a16:creationId xmlns:a16="http://schemas.microsoft.com/office/drawing/2014/main" id="{37B55D83-D13C-1636-EAB5-867428C5B2F7}"/>
+              </a:ext>
+            </a:extLst>
+          </p:cNvPr>
+          <p:cNvPicPr>
+            <a:picLocks noChangeAspect="1"/>
+          </p:cNvPicPr>
+          <p:nvPr/>
+        </p:nvPicPr>
+        <p:blipFill>
+          <a:blip r:embed="rId4"/>
+          <a:stretch>
+            <a:fillRect/>
+          </a:stretch>
+        </p:blipFill>
+        <p:spPr>
+          <a:xfrm>
+            <a:off x="5549900" y="1916075"/>
+            <a:ext cx="5372894" cy="3315844"/>
+          </a:xfrm>
+          <a:prstGeom prst="rect">
+            <a:avLst/>
+          </a:prstGeom>
+        </p:spPr>
+      </p:pic>
     </p:spTree>
     <p:extLst>
       <p:ext uri="{BB962C8B-B14F-4D97-AF65-F5344CB8AC3E}">
@@ -3240,10 +3331,219 @@
           <a:chExt cx="0" cy="0"/>
         </a:xfrm>
       </p:grpSpPr>
+      <p:pic>
+        <p:nvPicPr>
+          <p:cNvPr id="3" name="Picture 2" descr="A graph of a number of numbers&#10;&#10;AI-generated content may be incorrect.">
+            <a:extLst>
+              <a:ext uri="{FF2B5EF4-FFF2-40B4-BE49-F238E27FC236}">
+                <a16:creationId xmlns:a16="http://schemas.microsoft.com/office/drawing/2014/main" id="{0092FEFF-B3FA-9D18-E4CB-978FCC6919A7}"/>
+              </a:ext>
+            </a:extLst>
+          </p:cNvPr>
+          <p:cNvPicPr>
+            <a:picLocks noChangeAspect="1"/>
+          </p:cNvPicPr>
+          <p:nvPr/>
+        </p:nvPicPr>
+        <p:blipFill>
+          <a:blip r:embed="rId2"/>
+          <a:stretch>
+            <a:fillRect/>
+          </a:stretch>
+        </p:blipFill>
+        <p:spPr>
+          <a:xfrm>
+            <a:off x="5721116" y="1928776"/>
+            <a:ext cx="5188464" cy="3202024"/>
+          </a:xfrm>
+          <a:prstGeom prst="rect">
+            <a:avLst/>
+          </a:prstGeom>
+        </p:spPr>
+      </p:pic>
+      <p:pic>
+        <p:nvPicPr>
+          <p:cNvPr id="5" name="Picture 4" descr="A graph with a line&#10;&#10;AI-generated content may be incorrect.">
+            <a:extLst>
+              <a:ext uri="{FF2B5EF4-FFF2-40B4-BE49-F238E27FC236}">
+                <a16:creationId xmlns:a16="http://schemas.microsoft.com/office/drawing/2014/main" id="{B3B4175F-1F2A-E555-6D05-3C60DA8ED6F1}"/>
+              </a:ext>
+            </a:extLst>
+          </p:cNvPr>
+          <p:cNvPicPr>
+            <a:picLocks noChangeAspect="1"/>
+          </p:cNvPicPr>
+          <p:nvPr/>
+        </p:nvPicPr>
+        <p:blipFill>
+          <a:blip r:embed="rId3"/>
+          <a:stretch>
+            <a:fillRect/>
+          </a:stretch>
+        </p:blipFill>
+        <p:spPr>
+          <a:xfrm>
+            <a:off x="10909580" y="1928776"/>
+            <a:ext cx="5188464" cy="3202024"/>
+          </a:xfrm>
+          <a:prstGeom prst="rect">
+            <a:avLst/>
+          </a:prstGeom>
+        </p:spPr>
+      </p:pic>
+      <p:pic>
+        <p:nvPicPr>
+          <p:cNvPr id="7" name="Picture 6" descr="A graph with a line&#10;&#10;AI-generated content may be incorrect.">
+            <a:extLst>
+              <a:ext uri="{FF2B5EF4-FFF2-40B4-BE49-F238E27FC236}">
+                <a16:creationId xmlns:a16="http://schemas.microsoft.com/office/drawing/2014/main" id="{B3467953-A9C5-7302-FD9C-433D16784576}"/>
+              </a:ext>
+            </a:extLst>
+          </p:cNvPr>
+          <p:cNvPicPr>
+            <a:picLocks noChangeAspect="1"/>
+          </p:cNvPicPr>
+          <p:nvPr/>
+        </p:nvPicPr>
+        <p:blipFill>
+          <a:blip r:embed="rId4"/>
+          <a:stretch>
+            <a:fillRect/>
+          </a:stretch>
+        </p:blipFill>
+        <p:spPr>
+          <a:xfrm>
+            <a:off x="532652" y="1928776"/>
+            <a:ext cx="5188464" cy="3202024"/>
+          </a:xfrm>
+          <a:prstGeom prst="rect">
+            <a:avLst/>
+          </a:prstGeom>
+        </p:spPr>
+      </p:pic>
     </p:spTree>
     <p:extLst>
       <p:ext uri="{BB962C8B-B14F-4D97-AF65-F5344CB8AC3E}">
         <p14:creationId xmlns:p14="http://schemas.microsoft.com/office/powerpoint/2010/main" val="785048709"/>
+      </p:ext>
+    </p:extLst>
+  </p:cSld>
+  <p:clrMapOvr>
+    <a:masterClrMapping/>
+  </p:clrMapOvr>
+</p:sld>
+</file>
+
+<file path=ppt/slides/slide5.xml><?xml version="1.0" encoding="utf-8"?>
+<p:sld xmlns:a="http://schemas.openxmlformats.org/drawingml/2006/main" xmlns:r="http://schemas.openxmlformats.org/officeDocument/2006/relationships" xmlns:p="http://schemas.openxmlformats.org/presentationml/2006/main">
+  <p:cSld>
+    <p:spTree>
+      <p:nvGrpSpPr>
+        <p:cNvPr id="1" name=""/>
+        <p:cNvGrpSpPr/>
+        <p:nvPr/>
+      </p:nvGrpSpPr>
+      <p:grpSpPr>
+        <a:xfrm>
+          <a:off x="0" y="0"/>
+          <a:ext cx="0" cy="0"/>
+          <a:chOff x="0" y="0"/>
+          <a:chExt cx="0" cy="0"/>
+        </a:xfrm>
+      </p:grpSpPr>
+      <p:pic>
+        <p:nvPicPr>
+          <p:cNvPr id="3" name="Picture 2" descr="A diagram of a graph&#10;&#10;AI-generated content may be incorrect.">
+            <a:extLst>
+              <a:ext uri="{FF2B5EF4-FFF2-40B4-BE49-F238E27FC236}">
+                <a16:creationId xmlns:a16="http://schemas.microsoft.com/office/drawing/2014/main" id="{11CA9031-D642-1930-1352-70524F633CC2}"/>
+              </a:ext>
+            </a:extLst>
+          </p:cNvPr>
+          <p:cNvPicPr>
+            <a:picLocks noChangeAspect="1"/>
+          </p:cNvPicPr>
+          <p:nvPr/>
+        </p:nvPicPr>
+        <p:blipFill>
+          <a:blip r:embed="rId2"/>
+          <a:stretch>
+            <a:fillRect/>
+          </a:stretch>
+        </p:blipFill>
+        <p:spPr>
+          <a:xfrm>
+            <a:off x="38100" y="1708150"/>
+            <a:ext cx="5576829" cy="3441700"/>
+          </a:xfrm>
+          <a:prstGeom prst="rect">
+            <a:avLst/>
+          </a:prstGeom>
+        </p:spPr>
+      </p:pic>
+      <p:pic>
+        <p:nvPicPr>
+          <p:cNvPr id="5" name="Picture 4" descr="A diagram of a graph&#10;&#10;AI-generated content may be incorrect.">
+            <a:extLst>
+              <a:ext uri="{FF2B5EF4-FFF2-40B4-BE49-F238E27FC236}">
+                <a16:creationId xmlns:a16="http://schemas.microsoft.com/office/drawing/2014/main" id="{8D8B9DF8-FE53-1985-8D1A-0F4DE4507C22}"/>
+              </a:ext>
+            </a:extLst>
+          </p:cNvPr>
+          <p:cNvPicPr>
+            <a:picLocks noChangeAspect="1"/>
+          </p:cNvPicPr>
+          <p:nvPr/>
+        </p:nvPicPr>
+        <p:blipFill>
+          <a:blip r:embed="rId3"/>
+          <a:stretch>
+            <a:fillRect/>
+          </a:stretch>
+        </p:blipFill>
+        <p:spPr>
+          <a:xfrm>
+            <a:off x="5418534" y="1708150"/>
+            <a:ext cx="5576829" cy="3441700"/>
+          </a:xfrm>
+          <a:prstGeom prst="rect">
+            <a:avLst/>
+          </a:prstGeom>
+        </p:spPr>
+      </p:pic>
+      <p:pic>
+        <p:nvPicPr>
+          <p:cNvPr id="7" name="Picture 6" descr="A blue line with white text&#10;&#10;AI-generated content may be incorrect.">
+            <a:extLst>
+              <a:ext uri="{FF2B5EF4-FFF2-40B4-BE49-F238E27FC236}">
+                <a16:creationId xmlns:a16="http://schemas.microsoft.com/office/drawing/2014/main" id="{646C19E0-C44C-E9EF-8C97-499EC1074E70}"/>
+              </a:ext>
+            </a:extLst>
+          </p:cNvPr>
+          <p:cNvPicPr>
+            <a:picLocks noChangeAspect="1"/>
+          </p:cNvPicPr>
+          <p:nvPr/>
+        </p:nvPicPr>
+        <p:blipFill>
+          <a:blip r:embed="rId4"/>
+          <a:srcRect r="4526"/>
+          <a:stretch/>
+        </p:blipFill>
+        <p:spPr>
+          <a:xfrm>
+            <a:off x="10798968" y="1708150"/>
+            <a:ext cx="5324416" cy="3441700"/>
+          </a:xfrm>
+          <a:prstGeom prst="rect">
+            <a:avLst/>
+          </a:prstGeom>
+        </p:spPr>
+      </p:pic>
+    </p:spTree>
+    <p:extLst>
+      <p:ext uri="{BB962C8B-B14F-4D97-AF65-F5344CB8AC3E}">
+        <p14:creationId xmlns:p14="http://schemas.microsoft.com/office/powerpoint/2010/main" val="1964503289"/>
       </p:ext>
     </p:extLst>
   </p:cSld>
